--- a/generate file/BI-Pet-Competitor-Ecosystem-20260514.pptx
+++ b/generate file/BI-Pet-Competitor-Ecosystem-20260514.pptx
@@ -5,20 +5,22 @@
     <p:sldMasterId id="2147483648" r:id="rId1"/>
   </p:sldMasterIdLst>
   <p:notesMasterIdLst>
-    <p:notesMasterId r:id="rId13"/>
+    <p:notesMasterId r:id="rId15"/>
   </p:notesMasterIdLst>
   <p:sldIdLst>
     <p:sldId id="256" r:id="rId2"/>
     <p:sldId id="257" r:id="rId3"/>
-    <p:sldId id="258" r:id="rId4"/>
-    <p:sldId id="259" r:id="rId5"/>
-    <p:sldId id="260" r:id="rId6"/>
-    <p:sldId id="261" r:id="rId7"/>
-    <p:sldId id="262" r:id="rId8"/>
-    <p:sldId id="263" r:id="rId9"/>
-    <p:sldId id="264" r:id="rId10"/>
-    <p:sldId id="266" r:id="rId11"/>
-    <p:sldId id="267" r:id="rId12"/>
+    <p:sldId id="268" r:id="rId4"/>
+    <p:sldId id="258" r:id="rId5"/>
+    <p:sldId id="259" r:id="rId6"/>
+    <p:sldId id="260" r:id="rId7"/>
+    <p:sldId id="261" r:id="rId8"/>
+    <p:sldId id="262" r:id="rId9"/>
+    <p:sldId id="263" r:id="rId10"/>
+    <p:sldId id="264" r:id="rId11"/>
+    <p:sldId id="266" r:id="rId12"/>
+    <p:sldId id="269" r:id="rId13"/>
+    <p:sldId id="267" r:id="rId14"/>
   </p:sldIdLst>
   <p:sldSz cx="9144000" cy="5143500" type="screen16x9"/>
   <p:notesSz cx="5143500" cy="9144000"/>
@@ -525,6 +527,174 @@
             <a:fld id="{F7021451-1387-4CA6-816F-3879F97B5CBC}" type="slidenum">
               <a:rPr lang="en-US"/>
               <a:t>11</a:t>
+            </a:fld>
+            <a:endParaRPr lang="en-US"/>
+          </a:p>
+        </p:txBody>
+      </p:sp>
+    </p:spTree>
+    <p:extLst>
+      <p:ext uri="{BB962C8B-B14F-4D97-AF65-F5344CB8AC3E}">
+        <p14:creationId xmlns:p14="http://schemas.microsoft.com/office/powerpoint/2010/main" val="1024086991"/>
+      </p:ext>
+    </p:extLst>
+  </p:cSld>
+  <p:clrMapOvr>
+    <a:masterClrMapping/>
+  </p:clrMapOvr>
+</p:notes>
+</file>
+
+<file path=ppt/notesSlides/notesSlide12.xml><?xml version="1.0" encoding="utf-8"?>
+<p:notes xmlns:a="http://schemas.openxmlformats.org/drawingml/2006/main" xmlns:r="http://schemas.openxmlformats.org/officeDocument/2006/relationships" xmlns:p="http://schemas.openxmlformats.org/presentationml/2006/main">
+  <p:cSld>
+    <p:spTree>
+      <p:nvGrpSpPr>
+        <p:cNvPr id="1" name=""/>
+        <p:cNvGrpSpPr/>
+        <p:nvPr/>
+      </p:nvGrpSpPr>
+      <p:grpSpPr>
+        <a:xfrm>
+          <a:off x="0" y="0"/>
+          <a:ext cx="0" cy="0"/>
+          <a:chOff x="0" y="0"/>
+          <a:chExt cx="0" cy="0"/>
+        </a:xfrm>
+      </p:grpSpPr>
+      <p:sp>
+        <p:nvSpPr>
+          <p:cNvPr id="2" name="Slide Image Placeholder 1"/>
+          <p:cNvSpPr>
+            <a:spLocks noGrp="1" noRot="1" noChangeAspect="1"/>
+          </p:cNvSpPr>
+          <p:nvPr>
+            <p:ph type="sldImg"/>
+          </p:nvPr>
+        </p:nvSpPr>
+        <p:spPr/>
+      </p:sp>
+      <p:sp>
+        <p:nvSpPr>
+          <p:cNvPr id="3" name="Notes Placeholder 2"/>
+          <p:cNvSpPr>
+            <a:spLocks noGrp="1"/>
+          </p:cNvSpPr>
+          <p:nvPr>
+            <p:ph type="body" idx="1"/>
+          </p:nvPr>
+        </p:nvSpPr>
+        <p:spPr/>
+        <p:txBody>
+          <a:bodyPr/>
+          <a:lstStyle/>
+          <a:p>
+            <a:endParaRPr lang="en-US" dirty="0"/>
+          </a:p>
+        </p:txBody>
+      </p:sp>
+      <p:sp>
+        <p:nvSpPr>
+          <p:cNvPr id="4" name="Slide Number Placeholder 3"/>
+          <p:cNvSpPr>
+            <a:spLocks noGrp="1"/>
+          </p:cNvSpPr>
+          <p:nvPr>
+            <p:ph type="sldNum" sz="quarter" idx="10"/>
+          </p:nvPr>
+        </p:nvSpPr>
+        <p:spPr/>
+        <p:txBody>
+          <a:bodyPr/>
+          <a:lstStyle/>
+          <a:p>
+            <a:fld id="{F7021451-1387-4CA6-816F-3879F97B5CBC}" type="slidenum">
+              <a:rPr lang="en-US"/>
+              <a:t>12</a:t>
+            </a:fld>
+            <a:endParaRPr lang="en-US"/>
+          </a:p>
+        </p:txBody>
+      </p:sp>
+    </p:spTree>
+    <p:extLst>
+      <p:ext uri="{BB962C8B-B14F-4D97-AF65-F5344CB8AC3E}">
+        <p14:creationId xmlns:p14="http://schemas.microsoft.com/office/powerpoint/2010/main" val="1024086991"/>
+      </p:ext>
+    </p:extLst>
+  </p:cSld>
+  <p:clrMapOvr>
+    <a:masterClrMapping/>
+  </p:clrMapOvr>
+</p:notes>
+</file>
+
+<file path=ppt/notesSlides/notesSlide13.xml><?xml version="1.0" encoding="utf-8"?>
+<p:notes xmlns:a="http://schemas.openxmlformats.org/drawingml/2006/main" xmlns:r="http://schemas.openxmlformats.org/officeDocument/2006/relationships" xmlns:p="http://schemas.openxmlformats.org/presentationml/2006/main">
+  <p:cSld>
+    <p:spTree>
+      <p:nvGrpSpPr>
+        <p:cNvPr id="1" name=""/>
+        <p:cNvGrpSpPr/>
+        <p:nvPr/>
+      </p:nvGrpSpPr>
+      <p:grpSpPr>
+        <a:xfrm>
+          <a:off x="0" y="0"/>
+          <a:ext cx="0" cy="0"/>
+          <a:chOff x="0" y="0"/>
+          <a:chExt cx="0" cy="0"/>
+        </a:xfrm>
+      </p:grpSpPr>
+      <p:sp>
+        <p:nvSpPr>
+          <p:cNvPr id="2" name="Slide Image Placeholder 1"/>
+          <p:cNvSpPr>
+            <a:spLocks noGrp="1" noRot="1" noChangeAspect="1"/>
+          </p:cNvSpPr>
+          <p:nvPr>
+            <p:ph type="sldImg"/>
+          </p:nvPr>
+        </p:nvSpPr>
+        <p:spPr/>
+      </p:sp>
+      <p:sp>
+        <p:nvSpPr>
+          <p:cNvPr id="3" name="Notes Placeholder 2"/>
+          <p:cNvSpPr>
+            <a:spLocks noGrp="1"/>
+          </p:cNvSpPr>
+          <p:nvPr>
+            <p:ph type="body" idx="1"/>
+          </p:nvPr>
+        </p:nvSpPr>
+        <p:spPr/>
+        <p:txBody>
+          <a:bodyPr/>
+          <a:lstStyle/>
+          <a:p>
+            <a:endParaRPr lang="en-US" dirty="0"/>
+          </a:p>
+        </p:txBody>
+      </p:sp>
+      <p:sp>
+        <p:nvSpPr>
+          <p:cNvPr id="4" name="Slide Number Placeholder 3"/>
+          <p:cNvSpPr>
+            <a:spLocks noGrp="1"/>
+          </p:cNvSpPr>
+          <p:nvPr>
+            <p:ph type="sldNum" sz="quarter" idx="10"/>
+          </p:nvPr>
+        </p:nvSpPr>
+        <p:spPr/>
+        <p:txBody>
+          <a:bodyPr/>
+          <a:lstStyle/>
+          <a:p>
+            <a:fld id="{F7021451-1387-4CA6-816F-3879F97B5CBC}" type="slidenum">
+              <a:rPr lang="en-US"/>
+              <a:t>13</a:t>
             </a:fld>
             <a:endParaRPr lang="en-US"/>
           </a:p>
@@ -1901,6 +2071,2762 @@
 
 <file path=ppt/slides/slide10.xml><?xml version="1.0" encoding="utf-8"?>
 <p:sld xmlns:a="http://schemas.openxmlformats.org/drawingml/2006/main" xmlns:r="http://schemas.openxmlformats.org/officeDocument/2006/relationships" xmlns:p="http://schemas.openxmlformats.org/presentationml/2006/main">
+  <p:cSld name="Slide 9">
+    <p:bg>
+      <p:bgPr>
+        <a:solidFill>
+          <a:srgbClr val="FAF9F8"/>
+        </a:solidFill>
+        <a:effectLst/>
+      </p:bgPr>
+    </p:bg>
+    <p:spTree>
+      <p:nvGrpSpPr>
+        <p:cNvPr id="1" name=""/>
+        <p:cNvGrpSpPr/>
+        <p:nvPr/>
+      </p:nvGrpSpPr>
+      <p:grpSpPr>
+        <a:xfrm>
+          <a:off x="0" y="0"/>
+          <a:ext cx="0" cy="0"/>
+          <a:chOff x="0" y="0"/>
+          <a:chExt cx="0" cy="0"/>
+        </a:xfrm>
+      </p:grpSpPr>
+      <p:sp>
+        <p:nvSpPr>
+          <p:cNvPr id="2" name="Shape 0"/>
+          <p:cNvSpPr/>
+          <p:nvPr/>
+        </p:nvSpPr>
+        <p:spPr>
+          <a:xfrm>
+            <a:off x="0" y="0"/>
+            <a:ext cx="9144000" cy="685800"/>
+          </a:xfrm>
+          <a:prstGeom prst="rect">
+            <a:avLst/>
+          </a:prstGeom>
+          <a:solidFill>
+            <a:srgbClr val="08312A"/>
+          </a:solidFill>
+          <a:ln/>
+        </p:spPr>
+        <p:txBody>
+          <a:bodyPr/>
+          <a:lstStyle/>
+          <a:p>
+            <a:endParaRPr lang="zh-CN" altLang="en-US"/>
+          </a:p>
+        </p:txBody>
+      </p:sp>
+      <p:sp>
+        <p:nvSpPr>
+          <p:cNvPr id="3" name="Shape 1"/>
+          <p:cNvSpPr/>
+          <p:nvPr/>
+        </p:nvSpPr>
+        <p:spPr>
+          <a:xfrm>
+            <a:off x="0" y="0"/>
+            <a:ext cx="9144000" cy="73152"/>
+          </a:xfrm>
+          <a:prstGeom prst="rect">
+            <a:avLst/>
+          </a:prstGeom>
+          <a:solidFill>
+            <a:srgbClr val="00E47C"/>
+          </a:solidFill>
+          <a:ln/>
+        </p:spPr>
+        <p:txBody>
+          <a:bodyPr/>
+          <a:lstStyle/>
+          <a:p>
+            <a:endParaRPr lang="zh-CN" altLang="en-US"/>
+          </a:p>
+        </p:txBody>
+      </p:sp>
+      <p:sp>
+        <p:nvSpPr>
+          <p:cNvPr id="4" name="Text 2"/>
+          <p:cNvSpPr/>
+          <p:nvPr/>
+        </p:nvSpPr>
+        <p:spPr>
+          <a:xfrm>
+            <a:off x="365760" y="0"/>
+            <a:ext cx="8412480" cy="685800"/>
+          </a:xfrm>
+          <a:prstGeom prst="rect">
+            <a:avLst/>
+          </a:prstGeom>
+          <a:noFill/>
+          <a:ln/>
+        </p:spPr>
+        <p:txBody>
+          <a:bodyPr wrap="square" lIns="0" tIns="0" rIns="0" bIns="0" rtlCol="0" anchor="ctr"/>
+          <a:lstStyle/>
+          <a:p>
+            <a:pPr marL="0" indent="0">
+              <a:buNone/>
+            </a:pPr>
+            <a:r>
+              <a:rPr lang="en-US" sz="1700" b="1" dirty="0">
+                <a:solidFill>
+                  <a:srgbClr val="FFFFFF"/>
+                </a:solidFill>
+                <a:latin typeface="Arial" pitchFamily="34" charset="0"/>
+                <a:ea typeface="Arial" pitchFamily="34" charset="-122"/>
+                <a:cs typeface="Arial" pitchFamily="34" charset="-120"/>
+              </a:rPr>
+              <a:t>BI vs 竞品：关键维度对比 | BI vs Competitors — 5-Dimension Comparison</a:t>
+            </a:r>
+            <a:endParaRPr lang="en-US" sz="1700" dirty="0"/>
+          </a:p>
+        </p:txBody>
+      </p:sp>
+      <p:sp>
+        <p:nvSpPr>
+          <p:cNvPr id="5" name="Shape 3"/>
+          <p:cNvSpPr/>
+          <p:nvPr/>
+        </p:nvSpPr>
+        <p:spPr>
+          <a:xfrm>
+            <a:off x="365760" y="804672"/>
+            <a:ext cx="1463040" cy="502920"/>
+          </a:xfrm>
+          <a:prstGeom prst="rect">
+            <a:avLst/>
+          </a:prstGeom>
+          <a:solidFill>
+            <a:srgbClr val="08312A"/>
+          </a:solidFill>
+          <a:ln/>
+        </p:spPr>
+        <p:txBody>
+          <a:bodyPr/>
+          <a:lstStyle/>
+          <a:p>
+            <a:endParaRPr lang="zh-CN" altLang="en-US"/>
+          </a:p>
+        </p:txBody>
+      </p:sp>
+      <p:sp>
+        <p:nvSpPr>
+          <p:cNvPr id="6" name="Text 4"/>
+          <p:cNvSpPr/>
+          <p:nvPr/>
+        </p:nvSpPr>
+        <p:spPr>
+          <a:xfrm>
+            <a:off x="365760" y="804672"/>
+            <a:ext cx="1463040" cy="502920"/>
+          </a:xfrm>
+          <a:prstGeom prst="rect">
+            <a:avLst/>
+          </a:prstGeom>
+          <a:noFill/>
+          <a:ln/>
+        </p:spPr>
+        <p:txBody>
+          <a:bodyPr wrap="square" lIns="0" tIns="0" rIns="0" bIns="0" rtlCol="0" anchor="ctr"/>
+          <a:lstStyle/>
+          <a:p>
+            <a:pPr marL="0" indent="0" algn="ctr">
+              <a:buNone/>
+            </a:pPr>
+            <a:r>
+              <a:rPr lang="en-US" sz="900" b="1" dirty="0">
+                <a:solidFill>
+                  <a:srgbClr val="FFFFFF"/>
+                </a:solidFill>
+                <a:latin typeface="Arial" pitchFamily="34" charset="0"/>
+                <a:ea typeface="Arial" pitchFamily="34" charset="-122"/>
+                <a:cs typeface="Arial" pitchFamily="34" charset="-120"/>
+              </a:rPr>
+              <a:t>维度 Dimension</a:t>
+            </a:r>
+            <a:endParaRPr lang="en-US" sz="900" dirty="0"/>
+          </a:p>
+        </p:txBody>
+      </p:sp>
+      <p:sp>
+        <p:nvSpPr>
+          <p:cNvPr id="7" name="Shape 5"/>
+          <p:cNvSpPr/>
+          <p:nvPr/>
+        </p:nvSpPr>
+        <p:spPr>
+          <a:xfrm>
+            <a:off x="1828800" y="804672"/>
+            <a:ext cx="1828800" cy="502920"/>
+          </a:xfrm>
+          <a:prstGeom prst="rect">
+            <a:avLst/>
+          </a:prstGeom>
+          <a:solidFill>
+            <a:srgbClr val="08312A"/>
+          </a:solidFill>
+          <a:ln/>
+        </p:spPr>
+        <p:txBody>
+          <a:bodyPr/>
+          <a:lstStyle/>
+          <a:p>
+            <a:endParaRPr lang="zh-CN" altLang="en-US"/>
+          </a:p>
+        </p:txBody>
+      </p:sp>
+      <p:sp>
+        <p:nvSpPr>
+          <p:cNvPr id="8" name="Text 6"/>
+          <p:cNvSpPr/>
+          <p:nvPr/>
+        </p:nvSpPr>
+        <p:spPr>
+          <a:xfrm>
+            <a:off x="1828800" y="804672"/>
+            <a:ext cx="1828800" cy="502920"/>
+          </a:xfrm>
+          <a:prstGeom prst="rect">
+            <a:avLst/>
+          </a:prstGeom>
+          <a:noFill/>
+          <a:ln/>
+        </p:spPr>
+        <p:txBody>
+          <a:bodyPr wrap="square" lIns="0" tIns="0" rIns="0" bIns="0" rtlCol="0" anchor="ctr"/>
+          <a:lstStyle/>
+          <a:p>
+            <a:pPr marL="0" indent="0" algn="ctr">
+              <a:buNone/>
+            </a:pPr>
+            <a:r>
+              <a:rPr lang="en-US" sz="900" b="1" dirty="0">
+                <a:solidFill>
+                  <a:srgbClr val="FFFFFF"/>
+                </a:solidFill>
+                <a:latin typeface="Arial" pitchFamily="34" charset="0"/>
+                <a:ea typeface="Arial" pitchFamily="34" charset="-122"/>
+                <a:cs typeface="Arial" pitchFamily="34" charset="-120"/>
+              </a:rPr>
+              <a:t>BI Boehringer</a:t>
+            </a:r>
+            <a:endParaRPr lang="en-US" sz="900" dirty="0"/>
+          </a:p>
+        </p:txBody>
+      </p:sp>
+      <p:sp>
+        <p:nvSpPr>
+          <p:cNvPr id="9" name="Shape 7"/>
+          <p:cNvSpPr/>
+          <p:nvPr/>
+        </p:nvSpPr>
+        <p:spPr>
+          <a:xfrm>
+            <a:off x="3657600" y="804672"/>
+            <a:ext cx="1737360" cy="502920"/>
+          </a:xfrm>
+          <a:prstGeom prst="rect">
+            <a:avLst/>
+          </a:prstGeom>
+          <a:solidFill>
+            <a:srgbClr val="08312A"/>
+          </a:solidFill>
+          <a:ln/>
+        </p:spPr>
+        <p:txBody>
+          <a:bodyPr/>
+          <a:lstStyle/>
+          <a:p>
+            <a:endParaRPr lang="zh-CN" altLang="en-US"/>
+          </a:p>
+        </p:txBody>
+      </p:sp>
+      <p:sp>
+        <p:nvSpPr>
+          <p:cNvPr id="10" name="Text 8"/>
+          <p:cNvSpPr/>
+          <p:nvPr/>
+        </p:nvSpPr>
+        <p:spPr>
+          <a:xfrm>
+            <a:off x="3657600" y="804672"/>
+            <a:ext cx="1737360" cy="502920"/>
+          </a:xfrm>
+          <a:prstGeom prst="rect">
+            <a:avLst/>
+          </a:prstGeom>
+          <a:noFill/>
+          <a:ln/>
+        </p:spPr>
+        <p:txBody>
+          <a:bodyPr wrap="square" lIns="0" tIns="0" rIns="0" bIns="0" rtlCol="0" anchor="ctr"/>
+          <a:lstStyle/>
+          <a:p>
+            <a:pPr marL="0" indent="0" algn="ctr">
+              <a:buNone/>
+            </a:pPr>
+            <a:r>
+              <a:rPr lang="en-US" sz="900" b="1" dirty="0">
+                <a:solidFill>
+                  <a:srgbClr val="FFFFFF"/>
+                </a:solidFill>
+                <a:latin typeface="Arial" pitchFamily="34" charset="0"/>
+                <a:ea typeface="Arial" pitchFamily="34" charset="-122"/>
+                <a:cs typeface="Arial" pitchFamily="34" charset="-120"/>
+              </a:rPr>
+              <a:t>Zoetis 硕腾</a:t>
+            </a:r>
+            <a:endParaRPr lang="en-US" sz="900" dirty="0"/>
+          </a:p>
+        </p:txBody>
+      </p:sp>
+      <p:sp>
+        <p:nvSpPr>
+          <p:cNvPr id="11" name="Shape 9"/>
+          <p:cNvSpPr/>
+          <p:nvPr/>
+        </p:nvSpPr>
+        <p:spPr>
+          <a:xfrm>
+            <a:off x="5394960" y="804672"/>
+            <a:ext cx="1600200" cy="502920"/>
+          </a:xfrm>
+          <a:prstGeom prst="rect">
+            <a:avLst/>
+          </a:prstGeom>
+          <a:solidFill>
+            <a:srgbClr val="08312A"/>
+          </a:solidFill>
+          <a:ln/>
+        </p:spPr>
+        <p:txBody>
+          <a:bodyPr/>
+          <a:lstStyle/>
+          <a:p>
+            <a:endParaRPr lang="zh-CN" altLang="en-US"/>
+          </a:p>
+        </p:txBody>
+      </p:sp>
+      <p:sp>
+        <p:nvSpPr>
+          <p:cNvPr id="12" name="Text 10"/>
+          <p:cNvSpPr/>
+          <p:nvPr/>
+        </p:nvSpPr>
+        <p:spPr>
+          <a:xfrm>
+            <a:off x="5394960" y="804672"/>
+            <a:ext cx="1600200" cy="502920"/>
+          </a:xfrm>
+          <a:prstGeom prst="rect">
+            <a:avLst/>
+          </a:prstGeom>
+          <a:noFill/>
+          <a:ln/>
+        </p:spPr>
+        <p:txBody>
+          <a:bodyPr wrap="square" lIns="0" tIns="0" rIns="0" bIns="0" rtlCol="0" anchor="ctr"/>
+          <a:lstStyle/>
+          <a:p>
+            <a:pPr marL="0" indent="0" algn="ctr">
+              <a:buNone/>
+            </a:pPr>
+            <a:r>
+              <a:rPr lang="en-US" sz="900" b="1" dirty="0">
+                <a:solidFill>
+                  <a:srgbClr val="FFFFFF"/>
+                </a:solidFill>
+                <a:latin typeface="Arial" pitchFamily="34" charset="0"/>
+                <a:ea typeface="Arial" pitchFamily="34" charset="-122"/>
+                <a:cs typeface="Arial" pitchFamily="34" charset="-120"/>
+              </a:rPr>
+              <a:t>Elanco 礼蓝</a:t>
+            </a:r>
+            <a:endParaRPr lang="en-US" sz="900" dirty="0"/>
+          </a:p>
+        </p:txBody>
+      </p:sp>
+      <p:sp>
+        <p:nvSpPr>
+          <p:cNvPr id="13" name="Shape 11"/>
+          <p:cNvSpPr/>
+          <p:nvPr/>
+        </p:nvSpPr>
+        <p:spPr>
+          <a:xfrm>
+            <a:off x="6995160" y="804672"/>
+            <a:ext cx="1600200" cy="502920"/>
+          </a:xfrm>
+          <a:prstGeom prst="rect">
+            <a:avLst/>
+          </a:prstGeom>
+          <a:solidFill>
+            <a:srgbClr val="08312A"/>
+          </a:solidFill>
+          <a:ln/>
+        </p:spPr>
+        <p:txBody>
+          <a:bodyPr/>
+          <a:lstStyle/>
+          <a:p>
+            <a:endParaRPr lang="zh-CN" altLang="en-US"/>
+          </a:p>
+        </p:txBody>
+      </p:sp>
+      <p:sp>
+        <p:nvSpPr>
+          <p:cNvPr id="14" name="Text 12"/>
+          <p:cNvSpPr/>
+          <p:nvPr/>
+        </p:nvSpPr>
+        <p:spPr>
+          <a:xfrm>
+            <a:off x="6995160" y="804672"/>
+            <a:ext cx="1600200" cy="502920"/>
+          </a:xfrm>
+          <a:prstGeom prst="rect">
+            <a:avLst/>
+          </a:prstGeom>
+          <a:noFill/>
+          <a:ln/>
+        </p:spPr>
+        <p:txBody>
+          <a:bodyPr wrap="square" lIns="0" tIns="0" rIns="0" bIns="0" rtlCol="0" anchor="ctr"/>
+          <a:lstStyle/>
+          <a:p>
+            <a:pPr marL="0" indent="0" algn="ctr">
+              <a:buNone/>
+            </a:pPr>
+            <a:r>
+              <a:rPr lang="en-US" sz="900" b="1" dirty="0">
+                <a:solidFill>
+                  <a:srgbClr val="FFFFFF"/>
+                </a:solidFill>
+                <a:latin typeface="Arial" pitchFamily="34" charset="0"/>
+                <a:ea typeface="Arial" pitchFamily="34" charset="-122"/>
+                <a:cs typeface="Arial" pitchFamily="34" charset="-120"/>
+              </a:rPr>
+              <a:t>Haizhou 海正</a:t>
+            </a:r>
+            <a:endParaRPr lang="en-US" sz="900" dirty="0"/>
+          </a:p>
+        </p:txBody>
+      </p:sp>
+      <p:sp>
+        <p:nvSpPr>
+          <p:cNvPr id="15" name="Shape 13"/>
+          <p:cNvSpPr/>
+          <p:nvPr/>
+        </p:nvSpPr>
+        <p:spPr>
+          <a:xfrm>
+            <a:off x="365760" y="1307592"/>
+            <a:ext cx="1463040" cy="621792"/>
+          </a:xfrm>
+          <a:prstGeom prst="rect">
+            <a:avLst/>
+          </a:prstGeom>
+          <a:solidFill>
+            <a:srgbClr val="F5FBF7"/>
+          </a:solidFill>
+          <a:ln w="6350">
+            <a:solidFill>
+              <a:srgbClr val="DDDDDD"/>
+            </a:solidFill>
+            <a:prstDash val="solid"/>
+          </a:ln>
+        </p:spPr>
+        <p:txBody>
+          <a:bodyPr/>
+          <a:lstStyle/>
+          <a:p>
+            <a:endParaRPr lang="zh-CN" altLang="en-US"/>
+          </a:p>
+        </p:txBody>
+      </p:sp>
+      <p:sp>
+        <p:nvSpPr>
+          <p:cNvPr id="16" name="Text 14"/>
+          <p:cNvSpPr/>
+          <p:nvPr/>
+        </p:nvSpPr>
+        <p:spPr>
+          <a:xfrm>
+            <a:off x="411480" y="1307592"/>
+            <a:ext cx="1371600" cy="621792"/>
+          </a:xfrm>
+          <a:prstGeom prst="rect">
+            <a:avLst/>
+          </a:prstGeom>
+          <a:noFill/>
+          <a:ln/>
+        </p:spPr>
+        <p:txBody>
+          <a:bodyPr wrap="square" lIns="0" tIns="0" rIns="0" bIns="0" rtlCol="0" anchor="ctr"/>
+          <a:lstStyle/>
+          <a:p>
+            <a:pPr marL="0" indent="0" algn="ctr">
+              <a:buNone/>
+            </a:pPr>
+            <a:r>
+              <a:rPr lang="en-US" sz="800" dirty="0">
+                <a:solidFill>
+                  <a:srgbClr val="2E2D2C"/>
+                </a:solidFill>
+                <a:latin typeface="Arial" pitchFamily="34" charset="0"/>
+                <a:ea typeface="Arial" pitchFamily="34" charset="-122"/>
+                <a:cs typeface="Arial" pitchFamily="34" charset="-120"/>
+              </a:rPr>
+              <a:t>核心产品</a:t>
+            </a:r>
+            <a:endParaRPr lang="en-US" sz="800" dirty="0"/>
+          </a:p>
+          <a:p>
+            <a:pPr marL="0" indent="0" algn="ctr">
+              <a:buNone/>
+            </a:pPr>
+            <a:r>
+              <a:rPr lang="en-US" sz="800" dirty="0">
+                <a:solidFill>
+                  <a:srgbClr val="2E2D2C"/>
+                </a:solidFill>
+                <a:latin typeface="Arial" pitchFamily="34" charset="0"/>
+                <a:ea typeface="Arial" pitchFamily="34" charset="-122"/>
+                <a:cs typeface="Arial" pitchFamily="34" charset="-120"/>
+              </a:rPr>
+              <a:t>Core Products</a:t>
+            </a:r>
+            <a:endParaRPr lang="en-US" sz="800" dirty="0"/>
+          </a:p>
+        </p:txBody>
+      </p:sp>
+      <p:sp>
+        <p:nvSpPr>
+          <p:cNvPr id="17" name="Shape 15"/>
+          <p:cNvSpPr/>
+          <p:nvPr/>
+        </p:nvSpPr>
+        <p:spPr>
+          <a:xfrm>
+            <a:off x="1828800" y="1307592"/>
+            <a:ext cx="1828800" cy="621792"/>
+          </a:xfrm>
+          <a:prstGeom prst="rect">
+            <a:avLst/>
+          </a:prstGeom>
+          <a:solidFill>
+            <a:srgbClr val="E8FFF2"/>
+          </a:solidFill>
+          <a:ln w="6350">
+            <a:solidFill>
+              <a:srgbClr val="DDDDDD"/>
+            </a:solidFill>
+            <a:prstDash val="solid"/>
+          </a:ln>
+        </p:spPr>
+        <p:txBody>
+          <a:bodyPr/>
+          <a:lstStyle/>
+          <a:p>
+            <a:endParaRPr lang="zh-CN" altLang="en-US"/>
+          </a:p>
+        </p:txBody>
+      </p:sp>
+      <p:sp>
+        <p:nvSpPr>
+          <p:cNvPr id="18" name="Text 16"/>
+          <p:cNvSpPr/>
+          <p:nvPr/>
+        </p:nvSpPr>
+        <p:spPr>
+          <a:xfrm>
+            <a:off x="1874520" y="1307592"/>
+            <a:ext cx="1737360" cy="621792"/>
+          </a:xfrm>
+          <a:prstGeom prst="rect">
+            <a:avLst/>
+          </a:prstGeom>
+          <a:noFill/>
+          <a:ln/>
+        </p:spPr>
+        <p:txBody>
+          <a:bodyPr wrap="square" lIns="0" tIns="0" rIns="0" bIns="0" rtlCol="0" anchor="ctr"/>
+          <a:lstStyle/>
+          <a:p>
+            <a:pPr marL="0" indent="0" algn="ctr">
+              <a:buNone/>
+            </a:pPr>
+            <a:r>
+              <a:rPr lang="en-US" sz="800" dirty="0">
+                <a:solidFill>
+                  <a:srgbClr val="08312A"/>
+                </a:solidFill>
+                <a:latin typeface="Arial" pitchFamily="34" charset="0"/>
+                <a:ea typeface="Arial" pitchFamily="34" charset="-122"/>
+                <a:cs typeface="Arial" pitchFamily="34" charset="-120"/>
+              </a:rPr>
+              <a:t>超可信、NexGard COMBO</a:t>
+            </a:r>
+            <a:endParaRPr lang="en-US" sz="800" dirty="0"/>
+          </a:p>
+          <a:p>
+            <a:pPr marL="0" indent="0" algn="ctr">
+              <a:buNone/>
+            </a:pPr>
+            <a:r>
+              <a:rPr lang="en-US" sz="800" dirty="0">
+                <a:solidFill>
+                  <a:srgbClr val="08312A"/>
+                </a:solidFill>
+                <a:latin typeface="Arial" pitchFamily="34" charset="0"/>
+                <a:ea typeface="Arial" pitchFamily="34" charset="-122"/>
+                <a:cs typeface="Arial" pitchFamily="34" charset="-120"/>
+              </a:rPr>
+              <a:t>（驱虫+抗寄生虫）</a:t>
+            </a:r>
+            <a:endParaRPr lang="en-US" sz="800" dirty="0"/>
+          </a:p>
+        </p:txBody>
+      </p:sp>
+      <p:sp>
+        <p:nvSpPr>
+          <p:cNvPr id="19" name="Shape 17"/>
+          <p:cNvSpPr/>
+          <p:nvPr/>
+        </p:nvSpPr>
+        <p:spPr>
+          <a:xfrm>
+            <a:off x="3657600" y="1307592"/>
+            <a:ext cx="1737360" cy="621792"/>
+          </a:xfrm>
+          <a:prstGeom prst="rect">
+            <a:avLst/>
+          </a:prstGeom>
+          <a:solidFill>
+            <a:srgbClr val="F5FBF7"/>
+          </a:solidFill>
+          <a:ln w="6350">
+            <a:solidFill>
+              <a:srgbClr val="DDDDDD"/>
+            </a:solidFill>
+            <a:prstDash val="solid"/>
+          </a:ln>
+        </p:spPr>
+        <p:txBody>
+          <a:bodyPr/>
+          <a:lstStyle/>
+          <a:p>
+            <a:endParaRPr lang="zh-CN" altLang="en-US"/>
+          </a:p>
+        </p:txBody>
+      </p:sp>
+      <p:sp>
+        <p:nvSpPr>
+          <p:cNvPr id="20" name="Text 18"/>
+          <p:cNvSpPr/>
+          <p:nvPr/>
+        </p:nvSpPr>
+        <p:spPr>
+          <a:xfrm>
+            <a:off x="3703320" y="1307592"/>
+            <a:ext cx="1645920" cy="621792"/>
+          </a:xfrm>
+          <a:prstGeom prst="rect">
+            <a:avLst/>
+          </a:prstGeom>
+          <a:noFill/>
+          <a:ln/>
+        </p:spPr>
+        <p:txBody>
+          <a:bodyPr wrap="square" lIns="0" tIns="0" rIns="0" bIns="0" rtlCol="0" anchor="ctr"/>
+          <a:lstStyle/>
+          <a:p>
+            <a:pPr marL="0" indent="0" algn="ctr">
+              <a:buNone/>
+            </a:pPr>
+            <a:r>
+              <a:rPr lang="en-US" sz="800" dirty="0">
+                <a:solidFill>
+                  <a:srgbClr val="2E2D2C"/>
+                </a:solidFill>
+                <a:latin typeface="Arial" pitchFamily="34" charset="0"/>
+                <a:ea typeface="Arial" pitchFamily="34" charset="-122"/>
+                <a:cs typeface="Arial" pitchFamily="34" charset="-120"/>
+              </a:rPr>
+              <a:t>驱虫药、疫苗</a:t>
+            </a:r>
+            <a:endParaRPr lang="en-US" sz="800" dirty="0"/>
+          </a:p>
+          <a:p>
+            <a:pPr marL="0" indent="0" algn="ctr">
+              <a:buNone/>
+            </a:pPr>
+            <a:r>
+              <a:rPr lang="en-US" sz="800" dirty="0">
+                <a:solidFill>
+                  <a:srgbClr val="2E2D2C"/>
+                </a:solidFill>
+                <a:latin typeface="Arial" pitchFamily="34" charset="0"/>
+                <a:ea typeface="Arial" pitchFamily="34" charset="-122"/>
+                <a:cs typeface="Arial" pitchFamily="34" charset="-120"/>
+              </a:rPr>
+              <a:t>高价值处方药</a:t>
+            </a:r>
+            <a:endParaRPr lang="en-US" sz="800" dirty="0"/>
+          </a:p>
+        </p:txBody>
+      </p:sp>
+      <p:sp>
+        <p:nvSpPr>
+          <p:cNvPr id="21" name="Shape 19"/>
+          <p:cNvSpPr/>
+          <p:nvPr/>
+        </p:nvSpPr>
+        <p:spPr>
+          <a:xfrm>
+            <a:off x="5394960" y="1307592"/>
+            <a:ext cx="1600200" cy="621792"/>
+          </a:xfrm>
+          <a:prstGeom prst="rect">
+            <a:avLst/>
+          </a:prstGeom>
+          <a:solidFill>
+            <a:srgbClr val="F5FBF7"/>
+          </a:solidFill>
+          <a:ln w="6350">
+            <a:solidFill>
+              <a:srgbClr val="DDDDDD"/>
+            </a:solidFill>
+            <a:prstDash val="solid"/>
+          </a:ln>
+        </p:spPr>
+        <p:txBody>
+          <a:bodyPr/>
+          <a:lstStyle/>
+          <a:p>
+            <a:endParaRPr lang="zh-CN" altLang="en-US"/>
+          </a:p>
+        </p:txBody>
+      </p:sp>
+      <p:sp>
+        <p:nvSpPr>
+          <p:cNvPr id="22" name="Text 20"/>
+          <p:cNvSpPr/>
+          <p:nvPr/>
+        </p:nvSpPr>
+        <p:spPr>
+          <a:xfrm>
+            <a:off x="5440680" y="1307592"/>
+            <a:ext cx="1508760" cy="621792"/>
+          </a:xfrm>
+          <a:prstGeom prst="rect">
+            <a:avLst/>
+          </a:prstGeom>
+          <a:noFill/>
+          <a:ln/>
+        </p:spPr>
+        <p:txBody>
+          <a:bodyPr wrap="square" lIns="0" tIns="0" rIns="0" bIns="0" rtlCol="0" anchor="ctr"/>
+          <a:lstStyle/>
+          <a:p>
+            <a:pPr marL="0" indent="0" algn="ctr">
+              <a:buNone/>
+            </a:pPr>
+            <a:r>
+              <a:rPr lang="en-US" sz="800" dirty="0">
+                <a:solidFill>
+                  <a:srgbClr val="2E2D2C"/>
+                </a:solidFill>
+                <a:latin typeface="Arial" pitchFamily="34" charset="0"/>
+                <a:ea typeface="Arial" pitchFamily="34" charset="-122"/>
+                <a:cs typeface="Arial" pitchFamily="34" charset="-120"/>
+              </a:rPr>
+              <a:t>Zenrelia、Credelio Quattro</a:t>
+            </a:r>
+            <a:endParaRPr lang="en-US" sz="800" dirty="0"/>
+          </a:p>
+          <a:p>
+            <a:pPr marL="0" indent="0" algn="ctr">
+              <a:buNone/>
+            </a:pPr>
+            <a:r>
+              <a:rPr lang="en-US" sz="800" dirty="0">
+                <a:solidFill>
+                  <a:srgbClr val="2E2D2C"/>
+                </a:solidFill>
+                <a:latin typeface="Arial" pitchFamily="34" charset="0"/>
+                <a:ea typeface="Arial" pitchFamily="34" charset="-122"/>
+                <a:cs typeface="Arial" pitchFamily="34" charset="-120"/>
+              </a:rPr>
+              <a:t>（创新驱虫）</a:t>
+            </a:r>
+            <a:endParaRPr lang="en-US" sz="800" dirty="0"/>
+          </a:p>
+        </p:txBody>
+      </p:sp>
+      <p:sp>
+        <p:nvSpPr>
+          <p:cNvPr id="23" name="Shape 21"/>
+          <p:cNvSpPr/>
+          <p:nvPr/>
+        </p:nvSpPr>
+        <p:spPr>
+          <a:xfrm>
+            <a:off x="6995160" y="1307592"/>
+            <a:ext cx="1600200" cy="621792"/>
+          </a:xfrm>
+          <a:prstGeom prst="rect">
+            <a:avLst/>
+          </a:prstGeom>
+          <a:solidFill>
+            <a:srgbClr val="F5FBF7"/>
+          </a:solidFill>
+          <a:ln w="6350">
+            <a:solidFill>
+              <a:srgbClr val="DDDDDD"/>
+            </a:solidFill>
+            <a:prstDash val="solid"/>
+          </a:ln>
+        </p:spPr>
+        <p:txBody>
+          <a:bodyPr/>
+          <a:lstStyle/>
+          <a:p>
+            <a:endParaRPr lang="zh-CN" altLang="en-US"/>
+          </a:p>
+        </p:txBody>
+      </p:sp>
+      <p:sp>
+        <p:nvSpPr>
+          <p:cNvPr id="24" name="Text 22"/>
+          <p:cNvSpPr/>
+          <p:nvPr/>
+        </p:nvSpPr>
+        <p:spPr>
+          <a:xfrm>
+            <a:off x="7040880" y="1307592"/>
+            <a:ext cx="1508760" cy="621792"/>
+          </a:xfrm>
+          <a:prstGeom prst="rect">
+            <a:avLst/>
+          </a:prstGeom>
+          <a:noFill/>
+          <a:ln/>
+        </p:spPr>
+        <p:txBody>
+          <a:bodyPr wrap="square" lIns="0" tIns="0" rIns="0" bIns="0" rtlCol="0" anchor="ctr"/>
+          <a:lstStyle/>
+          <a:p>
+            <a:pPr marL="0" indent="0" algn="ctr">
+              <a:buNone/>
+            </a:pPr>
+            <a:r>
+              <a:rPr lang="en-US" sz="800" dirty="0">
+                <a:solidFill>
+                  <a:srgbClr val="2E2D2C"/>
+                </a:solidFill>
+                <a:latin typeface="Arial" pitchFamily="34" charset="0"/>
+                <a:ea typeface="Arial" pitchFamily="34" charset="-122"/>
+                <a:cs typeface="Arial" pitchFamily="34" charset="-120"/>
+              </a:rPr>
+              <a:t>海乐妙（猫驱虫第一）</a:t>
+            </a:r>
+            <a:endParaRPr lang="en-US" sz="800" dirty="0"/>
+          </a:p>
+          <a:p>
+            <a:pPr marL="0" indent="0" algn="ctr">
+              <a:buNone/>
+            </a:pPr>
+            <a:r>
+              <a:rPr lang="en-US" sz="800" dirty="0">
+                <a:solidFill>
+                  <a:srgbClr val="2E2D2C"/>
+                </a:solidFill>
+                <a:latin typeface="Arial" pitchFamily="34" charset="0"/>
+                <a:ea typeface="Arial" pitchFamily="34" charset="-122"/>
+                <a:cs typeface="Arial" pitchFamily="34" charset="-120"/>
+              </a:rPr>
+              <a:t>海妙哆（国产猫三联）</a:t>
+            </a:r>
+            <a:endParaRPr lang="en-US" sz="800" dirty="0"/>
+          </a:p>
+        </p:txBody>
+      </p:sp>
+      <p:sp>
+        <p:nvSpPr>
+          <p:cNvPr id="25" name="Shape 23"/>
+          <p:cNvSpPr/>
+          <p:nvPr/>
+        </p:nvSpPr>
+        <p:spPr>
+          <a:xfrm>
+            <a:off x="365760" y="1929384"/>
+            <a:ext cx="1463040" cy="621792"/>
+          </a:xfrm>
+          <a:prstGeom prst="rect">
+            <a:avLst/>
+          </a:prstGeom>
+          <a:solidFill>
+            <a:srgbClr val="FFFFFF"/>
+          </a:solidFill>
+          <a:ln w="6350">
+            <a:solidFill>
+              <a:srgbClr val="DDDDDD"/>
+            </a:solidFill>
+            <a:prstDash val="solid"/>
+          </a:ln>
+        </p:spPr>
+        <p:txBody>
+          <a:bodyPr/>
+          <a:lstStyle/>
+          <a:p>
+            <a:endParaRPr lang="zh-CN" altLang="en-US"/>
+          </a:p>
+        </p:txBody>
+      </p:sp>
+      <p:sp>
+        <p:nvSpPr>
+          <p:cNvPr id="26" name="Text 24"/>
+          <p:cNvSpPr/>
+          <p:nvPr/>
+        </p:nvSpPr>
+        <p:spPr>
+          <a:xfrm>
+            <a:off x="411480" y="1929384"/>
+            <a:ext cx="1371600" cy="621792"/>
+          </a:xfrm>
+          <a:prstGeom prst="rect">
+            <a:avLst/>
+          </a:prstGeom>
+          <a:noFill/>
+          <a:ln/>
+        </p:spPr>
+        <p:txBody>
+          <a:bodyPr wrap="square" lIns="0" tIns="0" rIns="0" bIns="0" rtlCol="0" anchor="ctr"/>
+          <a:lstStyle/>
+          <a:p>
+            <a:pPr marL="0" indent="0" algn="ctr">
+              <a:buNone/>
+            </a:pPr>
+            <a:r>
+              <a:rPr lang="en-US" sz="800" dirty="0">
+                <a:solidFill>
+                  <a:srgbClr val="2E2D2C"/>
+                </a:solidFill>
+                <a:latin typeface="Arial" pitchFamily="34" charset="0"/>
+                <a:ea typeface="Arial" pitchFamily="34" charset="-122"/>
+                <a:cs typeface="Arial" pitchFamily="34" charset="-120"/>
+              </a:rPr>
+              <a:t>技术优势</a:t>
+            </a:r>
+            <a:endParaRPr lang="en-US" sz="800" dirty="0"/>
+          </a:p>
+          <a:p>
+            <a:pPr marL="0" indent="0" algn="ctr">
+              <a:buNone/>
+            </a:pPr>
+            <a:r>
+              <a:rPr lang="en-US" sz="800" dirty="0">
+                <a:solidFill>
+                  <a:srgbClr val="2E2D2C"/>
+                </a:solidFill>
+                <a:latin typeface="Arial" pitchFamily="34" charset="0"/>
+                <a:ea typeface="Arial" pitchFamily="34" charset="-122"/>
+                <a:cs typeface="Arial" pitchFamily="34" charset="-120"/>
+              </a:rPr>
+              <a:t>Tech Edge</a:t>
+            </a:r>
+            <a:endParaRPr lang="en-US" sz="800" dirty="0"/>
+          </a:p>
+        </p:txBody>
+      </p:sp>
+      <p:sp>
+        <p:nvSpPr>
+          <p:cNvPr id="27" name="Shape 25"/>
+          <p:cNvSpPr/>
+          <p:nvPr/>
+        </p:nvSpPr>
+        <p:spPr>
+          <a:xfrm>
+            <a:off x="1828800" y="1929384"/>
+            <a:ext cx="1828800" cy="621792"/>
+          </a:xfrm>
+          <a:prstGeom prst="rect">
+            <a:avLst/>
+          </a:prstGeom>
+          <a:solidFill>
+            <a:srgbClr val="E8FFF2"/>
+          </a:solidFill>
+          <a:ln w="6350">
+            <a:solidFill>
+              <a:srgbClr val="DDDDDD"/>
+            </a:solidFill>
+            <a:prstDash val="solid"/>
+          </a:ln>
+        </p:spPr>
+        <p:txBody>
+          <a:bodyPr/>
+          <a:lstStyle/>
+          <a:p>
+            <a:endParaRPr lang="zh-CN" altLang="en-US"/>
+          </a:p>
+        </p:txBody>
+      </p:sp>
+      <p:sp>
+        <p:nvSpPr>
+          <p:cNvPr id="28" name="Text 26"/>
+          <p:cNvSpPr/>
+          <p:nvPr/>
+        </p:nvSpPr>
+        <p:spPr>
+          <a:xfrm>
+            <a:off x="1874520" y="1929384"/>
+            <a:ext cx="1737360" cy="621792"/>
+          </a:xfrm>
+          <a:prstGeom prst="rect">
+            <a:avLst/>
+          </a:prstGeom>
+          <a:noFill/>
+          <a:ln/>
+        </p:spPr>
+        <p:txBody>
+          <a:bodyPr wrap="square" lIns="0" tIns="0" rIns="0" bIns="0" rtlCol="0" anchor="ctr"/>
+          <a:lstStyle/>
+          <a:p>
+            <a:pPr marL="0" indent="0" algn="ctr">
+              <a:buNone/>
+            </a:pPr>
+            <a:r>
+              <a:rPr lang="en-US" sz="800" dirty="0">
+                <a:solidFill>
+                  <a:srgbClr val="08312A"/>
+                </a:solidFill>
+                <a:latin typeface="Arial" pitchFamily="34" charset="0"/>
+                <a:ea typeface="Arial" pitchFamily="34" charset="-122"/>
+                <a:cs typeface="Arial" pitchFamily="34" charset="-120"/>
+              </a:rPr>
+              <a:t>异恶唑啉类创新药</a:t>
+            </a:r>
+            <a:endParaRPr lang="en-US" sz="800" dirty="0"/>
+          </a:p>
+          <a:p>
+            <a:pPr marL="0" indent="0" algn="ctr">
+              <a:buNone/>
+            </a:pPr>
+            <a:r>
+              <a:rPr lang="en-US" sz="800" dirty="0">
+                <a:solidFill>
+                  <a:srgbClr val="08312A"/>
+                </a:solidFill>
+                <a:latin typeface="Arial" pitchFamily="34" charset="0"/>
+                <a:ea typeface="Arial" pitchFamily="34" charset="-122"/>
+                <a:cs typeface="Arial" pitchFamily="34" charset="-120"/>
+              </a:rPr>
+              <a:t>猫糖尿病口服在研</a:t>
+            </a:r>
+            <a:endParaRPr lang="en-US" sz="800" dirty="0"/>
+          </a:p>
+        </p:txBody>
+      </p:sp>
+      <p:sp>
+        <p:nvSpPr>
+          <p:cNvPr id="29" name="Shape 27"/>
+          <p:cNvSpPr/>
+          <p:nvPr/>
+        </p:nvSpPr>
+        <p:spPr>
+          <a:xfrm>
+            <a:off x="3657600" y="1929384"/>
+            <a:ext cx="1737360" cy="621792"/>
+          </a:xfrm>
+          <a:prstGeom prst="rect">
+            <a:avLst/>
+          </a:prstGeom>
+          <a:solidFill>
+            <a:srgbClr val="FFFFFF"/>
+          </a:solidFill>
+          <a:ln w="6350">
+            <a:solidFill>
+              <a:srgbClr val="DDDDDD"/>
+            </a:solidFill>
+            <a:prstDash val="solid"/>
+          </a:ln>
+        </p:spPr>
+        <p:txBody>
+          <a:bodyPr/>
+          <a:lstStyle/>
+          <a:p>
+            <a:endParaRPr lang="zh-CN" altLang="en-US"/>
+          </a:p>
+        </p:txBody>
+      </p:sp>
+      <p:sp>
+        <p:nvSpPr>
+          <p:cNvPr id="30" name="Text 28"/>
+          <p:cNvSpPr/>
+          <p:nvPr/>
+        </p:nvSpPr>
+        <p:spPr>
+          <a:xfrm>
+            <a:off x="3703320" y="1929384"/>
+            <a:ext cx="1645920" cy="621792"/>
+          </a:xfrm>
+          <a:prstGeom prst="rect">
+            <a:avLst/>
+          </a:prstGeom>
+          <a:noFill/>
+          <a:ln/>
+        </p:spPr>
+        <p:txBody>
+          <a:bodyPr wrap="square" lIns="0" tIns="0" rIns="0" bIns="0" rtlCol="0" anchor="ctr"/>
+          <a:lstStyle/>
+          <a:p>
+            <a:pPr marL="0" indent="0" algn="ctr">
+              <a:buNone/>
+            </a:pPr>
+            <a:r>
+              <a:rPr lang="en-US" sz="800" dirty="0">
+                <a:solidFill>
+                  <a:srgbClr val="2E2D2C"/>
+                </a:solidFill>
+                <a:latin typeface="Arial" pitchFamily="34" charset="0"/>
+                <a:ea typeface="Arial" pitchFamily="34" charset="-122"/>
+                <a:cs typeface="Arial" pitchFamily="34" charset="-120"/>
+              </a:rPr>
+              <a:t>手术机器人Ottava</a:t>
+            </a:r>
+            <a:endParaRPr lang="en-US" sz="800" dirty="0"/>
+          </a:p>
+          <a:p>
+            <a:pPr marL="0" indent="0" algn="ctr">
+              <a:buNone/>
+            </a:pPr>
+            <a:r>
+              <a:rPr lang="en-US" sz="800" dirty="0">
+                <a:solidFill>
+                  <a:srgbClr val="2E2D2C"/>
+                </a:solidFill>
+                <a:latin typeface="Arial" pitchFamily="34" charset="0"/>
+                <a:ea typeface="Arial" pitchFamily="34" charset="-122"/>
+                <a:cs typeface="Arial" pitchFamily="34" charset="-120"/>
+              </a:rPr>
+              <a:t>慢性病五大领域</a:t>
+            </a:r>
+            <a:endParaRPr lang="en-US" sz="800" dirty="0"/>
+          </a:p>
+        </p:txBody>
+      </p:sp>
+      <p:sp>
+        <p:nvSpPr>
+          <p:cNvPr id="31" name="Shape 29"/>
+          <p:cNvSpPr/>
+          <p:nvPr/>
+        </p:nvSpPr>
+        <p:spPr>
+          <a:xfrm>
+            <a:off x="5394960" y="1929384"/>
+            <a:ext cx="1600200" cy="621792"/>
+          </a:xfrm>
+          <a:prstGeom prst="rect">
+            <a:avLst/>
+          </a:prstGeom>
+          <a:solidFill>
+            <a:srgbClr val="FFFFFF"/>
+          </a:solidFill>
+          <a:ln w="6350">
+            <a:solidFill>
+              <a:srgbClr val="DDDDDD"/>
+            </a:solidFill>
+            <a:prstDash val="solid"/>
+          </a:ln>
+        </p:spPr>
+        <p:txBody>
+          <a:bodyPr/>
+          <a:lstStyle/>
+          <a:p>
+            <a:endParaRPr lang="zh-CN" altLang="en-US"/>
+          </a:p>
+        </p:txBody>
+      </p:sp>
+      <p:sp>
+        <p:nvSpPr>
+          <p:cNvPr id="32" name="Text 30"/>
+          <p:cNvSpPr/>
+          <p:nvPr/>
+        </p:nvSpPr>
+        <p:spPr>
+          <a:xfrm>
+            <a:off x="5440680" y="1929384"/>
+            <a:ext cx="1508760" cy="621792"/>
+          </a:xfrm>
+          <a:prstGeom prst="rect">
+            <a:avLst/>
+          </a:prstGeom>
+          <a:noFill/>
+          <a:ln/>
+        </p:spPr>
+        <p:txBody>
+          <a:bodyPr wrap="square" lIns="0" tIns="0" rIns="0" bIns="0" rtlCol="0" anchor="ctr"/>
+          <a:lstStyle/>
+          <a:p>
+            <a:pPr marL="0" indent="0" algn="ctr">
+              <a:buNone/>
+            </a:pPr>
+            <a:r>
+              <a:rPr lang="en-US" sz="800" dirty="0">
+                <a:solidFill>
+                  <a:srgbClr val="2E2D2C"/>
+                </a:solidFill>
+                <a:latin typeface="Arial" pitchFamily="34" charset="0"/>
+                <a:ea typeface="Arial" pitchFamily="34" charset="-122"/>
+                <a:cs typeface="Arial" pitchFamily="34" charset="-120"/>
+              </a:rPr>
+              <a:t>JAK抑制剂Zenrelia</a:t>
+            </a:r>
+            <a:endParaRPr lang="en-US" sz="800" dirty="0"/>
+          </a:p>
+          <a:p>
+            <a:pPr marL="0" indent="0" algn="ctr">
+              <a:buNone/>
+            </a:pPr>
+            <a:r>
+              <a:rPr lang="en-US" sz="800" dirty="0">
+                <a:solidFill>
+                  <a:srgbClr val="2E2D2C"/>
+                </a:solidFill>
+                <a:latin typeface="Arial" pitchFamily="34" charset="0"/>
+                <a:ea typeface="Arial" pitchFamily="34" charset="-122"/>
+                <a:cs typeface="Arial" pitchFamily="34" charset="-120"/>
+              </a:rPr>
+              <a:t>Quattro放量</a:t>
+            </a:r>
+            <a:endParaRPr lang="en-US" sz="800" dirty="0"/>
+          </a:p>
+        </p:txBody>
+      </p:sp>
+      <p:sp>
+        <p:nvSpPr>
+          <p:cNvPr id="33" name="Shape 31"/>
+          <p:cNvSpPr/>
+          <p:nvPr/>
+        </p:nvSpPr>
+        <p:spPr>
+          <a:xfrm>
+            <a:off x="6995160" y="1929384"/>
+            <a:ext cx="1600200" cy="621792"/>
+          </a:xfrm>
+          <a:prstGeom prst="rect">
+            <a:avLst/>
+          </a:prstGeom>
+          <a:solidFill>
+            <a:srgbClr val="FFFFFF"/>
+          </a:solidFill>
+          <a:ln w="6350">
+            <a:solidFill>
+              <a:srgbClr val="DDDDDD"/>
+            </a:solidFill>
+            <a:prstDash val="solid"/>
+          </a:ln>
+        </p:spPr>
+        <p:txBody>
+          <a:bodyPr/>
+          <a:lstStyle/>
+          <a:p>
+            <a:endParaRPr lang="zh-CN" altLang="en-US"/>
+          </a:p>
+        </p:txBody>
+      </p:sp>
+      <p:sp>
+        <p:nvSpPr>
+          <p:cNvPr id="34" name="Text 32"/>
+          <p:cNvSpPr/>
+          <p:nvPr/>
+        </p:nvSpPr>
+        <p:spPr>
+          <a:xfrm>
+            <a:off x="7040880" y="1929384"/>
+            <a:ext cx="1508760" cy="621792"/>
+          </a:xfrm>
+          <a:prstGeom prst="rect">
+            <a:avLst/>
+          </a:prstGeom>
+          <a:noFill/>
+          <a:ln/>
+        </p:spPr>
+        <p:txBody>
+          <a:bodyPr wrap="square" lIns="0" tIns="0" rIns="0" bIns="0" rtlCol="0" anchor="ctr"/>
+          <a:lstStyle/>
+          <a:p>
+            <a:pPr marL="0" indent="0" algn="ctr">
+              <a:buNone/>
+            </a:pPr>
+            <a:r>
+              <a:rPr lang="en-US" sz="800" dirty="0">
+                <a:solidFill>
+                  <a:srgbClr val="2E2D2C"/>
+                </a:solidFill>
+                <a:latin typeface="Arial" pitchFamily="34" charset="0"/>
+                <a:ea typeface="Arial" pitchFamily="34" charset="-122"/>
+                <a:cs typeface="Arial" pitchFamily="34" charset="-120"/>
+              </a:rPr>
+              <a:t>国产疫苗突破</a:t>
+            </a:r>
+            <a:endParaRPr lang="en-US" sz="800" dirty="0"/>
+          </a:p>
+          <a:p>
+            <a:pPr marL="0" indent="0" algn="ctr">
+              <a:buNone/>
+            </a:pPr>
+            <a:r>
+              <a:rPr lang="en-US" sz="800" dirty="0">
+                <a:solidFill>
+                  <a:srgbClr val="2E2D2C"/>
+                </a:solidFill>
+                <a:latin typeface="Arial" pitchFamily="34" charset="0"/>
+                <a:ea typeface="Arial" pitchFamily="34" charset="-122"/>
+                <a:cs typeface="Arial" pitchFamily="34" charset="-120"/>
+              </a:rPr>
+              <a:t>原料药自产 6A标准</a:t>
+            </a:r>
+            <a:endParaRPr lang="en-US" sz="800" dirty="0"/>
+          </a:p>
+        </p:txBody>
+      </p:sp>
+      <p:sp>
+        <p:nvSpPr>
+          <p:cNvPr id="35" name="Shape 33"/>
+          <p:cNvSpPr/>
+          <p:nvPr/>
+        </p:nvSpPr>
+        <p:spPr>
+          <a:xfrm>
+            <a:off x="365760" y="2551176"/>
+            <a:ext cx="1463040" cy="621792"/>
+          </a:xfrm>
+          <a:prstGeom prst="rect">
+            <a:avLst/>
+          </a:prstGeom>
+          <a:solidFill>
+            <a:srgbClr val="F5FBF7"/>
+          </a:solidFill>
+          <a:ln w="6350">
+            <a:solidFill>
+              <a:srgbClr val="DDDDDD"/>
+            </a:solidFill>
+            <a:prstDash val="solid"/>
+          </a:ln>
+        </p:spPr>
+        <p:txBody>
+          <a:bodyPr/>
+          <a:lstStyle/>
+          <a:p>
+            <a:endParaRPr lang="zh-CN" altLang="en-US"/>
+          </a:p>
+        </p:txBody>
+      </p:sp>
+      <p:sp>
+        <p:nvSpPr>
+          <p:cNvPr id="36" name="Text 34"/>
+          <p:cNvSpPr/>
+          <p:nvPr/>
+        </p:nvSpPr>
+        <p:spPr>
+          <a:xfrm>
+            <a:off x="411480" y="2551176"/>
+            <a:ext cx="1371600" cy="621792"/>
+          </a:xfrm>
+          <a:prstGeom prst="rect">
+            <a:avLst/>
+          </a:prstGeom>
+          <a:noFill/>
+          <a:ln/>
+        </p:spPr>
+        <p:txBody>
+          <a:bodyPr wrap="square" lIns="0" tIns="0" rIns="0" bIns="0" rtlCol="0" anchor="ctr"/>
+          <a:lstStyle/>
+          <a:p>
+            <a:pPr marL="0" indent="0" algn="ctr">
+              <a:buNone/>
+            </a:pPr>
+            <a:r>
+              <a:rPr lang="en-US" sz="800" dirty="0">
+                <a:solidFill>
+                  <a:srgbClr val="2E2D2C"/>
+                </a:solidFill>
+                <a:latin typeface="Arial" pitchFamily="34" charset="0"/>
+                <a:ea typeface="Arial" pitchFamily="34" charset="-122"/>
+                <a:cs typeface="Arial" pitchFamily="34" charset="-120"/>
+              </a:rPr>
+              <a:t>渠道策略</a:t>
+            </a:r>
+            <a:endParaRPr lang="en-US" sz="800" dirty="0"/>
+          </a:p>
+          <a:p>
+            <a:pPr marL="0" indent="0" algn="ctr">
+              <a:buNone/>
+            </a:pPr>
+            <a:r>
+              <a:rPr lang="en-US" sz="800" dirty="0">
+                <a:solidFill>
+                  <a:srgbClr val="2E2D2C"/>
+                </a:solidFill>
+                <a:latin typeface="Arial" pitchFamily="34" charset="0"/>
+                <a:ea typeface="Arial" pitchFamily="34" charset="-122"/>
+                <a:cs typeface="Arial" pitchFamily="34" charset="-120"/>
+              </a:rPr>
+              <a:t>Channels</a:t>
+            </a:r>
+            <a:endParaRPr lang="en-US" sz="800" dirty="0"/>
+          </a:p>
+        </p:txBody>
+      </p:sp>
+      <p:sp>
+        <p:nvSpPr>
+          <p:cNvPr id="37" name="Shape 35"/>
+          <p:cNvSpPr/>
+          <p:nvPr/>
+        </p:nvSpPr>
+        <p:spPr>
+          <a:xfrm>
+            <a:off x="1828800" y="2551176"/>
+            <a:ext cx="1828800" cy="621792"/>
+          </a:xfrm>
+          <a:prstGeom prst="rect">
+            <a:avLst/>
+          </a:prstGeom>
+          <a:solidFill>
+            <a:srgbClr val="E8FFF2"/>
+          </a:solidFill>
+          <a:ln w="6350">
+            <a:solidFill>
+              <a:srgbClr val="DDDDDD"/>
+            </a:solidFill>
+            <a:prstDash val="solid"/>
+          </a:ln>
+        </p:spPr>
+        <p:txBody>
+          <a:bodyPr/>
+          <a:lstStyle/>
+          <a:p>
+            <a:endParaRPr lang="zh-CN" altLang="en-US"/>
+          </a:p>
+        </p:txBody>
+      </p:sp>
+      <p:sp>
+        <p:nvSpPr>
+          <p:cNvPr id="38" name="Text 36"/>
+          <p:cNvSpPr/>
+          <p:nvPr/>
+        </p:nvSpPr>
+        <p:spPr>
+          <a:xfrm>
+            <a:off x="1874520" y="2551176"/>
+            <a:ext cx="1737360" cy="621792"/>
+          </a:xfrm>
+          <a:prstGeom prst="rect">
+            <a:avLst/>
+          </a:prstGeom>
+          <a:noFill/>
+          <a:ln/>
+        </p:spPr>
+        <p:txBody>
+          <a:bodyPr wrap="square" lIns="0" tIns="0" rIns="0" bIns="0" rtlCol="0" anchor="ctr"/>
+          <a:lstStyle/>
+          <a:p>
+            <a:pPr marL="0" indent="0" algn="ctr">
+              <a:buNone/>
+            </a:pPr>
+            <a:r>
+              <a:rPr lang="en-US" sz="800" dirty="0">
+                <a:solidFill>
+                  <a:srgbClr val="08312A"/>
+                </a:solidFill>
+                <a:latin typeface="Arial" pitchFamily="34" charset="0"/>
+                <a:ea typeface="Arial" pitchFamily="34" charset="-122"/>
+                <a:cs typeface="Arial" pitchFamily="34" charset="-120"/>
+              </a:rPr>
+              <a:t>宠物医院+电商</a:t>
+            </a:r>
+            <a:endParaRPr lang="en-US" sz="800" dirty="0"/>
+          </a:p>
+          <a:p>
+            <a:pPr marL="0" indent="0" algn="ctr">
+              <a:buNone/>
+            </a:pPr>
+            <a:r>
+              <a:rPr lang="en-US" sz="800" dirty="0">
+                <a:solidFill>
+                  <a:srgbClr val="08312A"/>
+                </a:solidFill>
+                <a:latin typeface="Arial" pitchFamily="34" charset="0"/>
+                <a:ea typeface="Arial" pitchFamily="34" charset="-122"/>
+                <a:cs typeface="Arial" pitchFamily="34" charset="-120"/>
+              </a:rPr>
+              <a:t>双渠道布局</a:t>
+            </a:r>
+            <a:endParaRPr lang="en-US" sz="800" dirty="0"/>
+          </a:p>
+        </p:txBody>
+      </p:sp>
+      <p:sp>
+        <p:nvSpPr>
+          <p:cNvPr id="39" name="Shape 37"/>
+          <p:cNvSpPr/>
+          <p:nvPr/>
+        </p:nvSpPr>
+        <p:spPr>
+          <a:xfrm>
+            <a:off x="3657600" y="2551176"/>
+            <a:ext cx="1737360" cy="621792"/>
+          </a:xfrm>
+          <a:prstGeom prst="rect">
+            <a:avLst/>
+          </a:prstGeom>
+          <a:solidFill>
+            <a:srgbClr val="F5FBF7"/>
+          </a:solidFill>
+          <a:ln w="6350">
+            <a:solidFill>
+              <a:srgbClr val="DDDDDD"/>
+            </a:solidFill>
+            <a:prstDash val="solid"/>
+          </a:ln>
+        </p:spPr>
+        <p:txBody>
+          <a:bodyPr/>
+          <a:lstStyle/>
+          <a:p>
+            <a:endParaRPr lang="zh-CN" altLang="en-US"/>
+          </a:p>
+        </p:txBody>
+      </p:sp>
+      <p:sp>
+        <p:nvSpPr>
+          <p:cNvPr id="40" name="Text 38"/>
+          <p:cNvSpPr/>
+          <p:nvPr/>
+        </p:nvSpPr>
+        <p:spPr>
+          <a:xfrm>
+            <a:off x="3703320" y="2551176"/>
+            <a:ext cx="1645920" cy="621792"/>
+          </a:xfrm>
+          <a:prstGeom prst="rect">
+            <a:avLst/>
+          </a:prstGeom>
+          <a:noFill/>
+          <a:ln/>
+        </p:spPr>
+        <p:txBody>
+          <a:bodyPr wrap="square" lIns="0" tIns="0" rIns="0" bIns="0" rtlCol="0" anchor="ctr"/>
+          <a:lstStyle/>
+          <a:p>
+            <a:pPr marL="0" indent="0" algn="ctr">
+              <a:buNone/>
+            </a:pPr>
+            <a:r>
+              <a:rPr lang="en-US" sz="800" dirty="0">
+                <a:solidFill>
+                  <a:srgbClr val="2E2D2C"/>
+                </a:solidFill>
+                <a:latin typeface="Arial" pitchFamily="34" charset="0"/>
+                <a:ea typeface="Arial" pitchFamily="34" charset="-122"/>
+                <a:cs typeface="Arial" pitchFamily="34" charset="-120"/>
+              </a:rPr>
+              <a:t>医院为主</a:t>
+            </a:r>
+            <a:endParaRPr lang="en-US" sz="800" dirty="0"/>
+          </a:p>
+          <a:p>
+            <a:pPr marL="0" indent="0" algn="ctr">
+              <a:buNone/>
+            </a:pPr>
+            <a:r>
+              <a:rPr lang="en-US" sz="800" dirty="0">
+                <a:solidFill>
+                  <a:srgbClr val="2E2D2C"/>
+                </a:solidFill>
+                <a:latin typeface="Arial" pitchFamily="34" charset="0"/>
+                <a:ea typeface="Arial" pitchFamily="34" charset="-122"/>
+                <a:cs typeface="Arial" pitchFamily="34" charset="-120"/>
+              </a:rPr>
+              <a:t>京东健康合作</a:t>
+            </a:r>
+            <a:endParaRPr lang="en-US" sz="800" dirty="0"/>
+          </a:p>
+        </p:txBody>
+      </p:sp>
+      <p:sp>
+        <p:nvSpPr>
+          <p:cNvPr id="41" name="Shape 39"/>
+          <p:cNvSpPr/>
+          <p:nvPr/>
+        </p:nvSpPr>
+        <p:spPr>
+          <a:xfrm>
+            <a:off x="5394960" y="2551176"/>
+            <a:ext cx="1600200" cy="621792"/>
+          </a:xfrm>
+          <a:prstGeom prst="rect">
+            <a:avLst/>
+          </a:prstGeom>
+          <a:solidFill>
+            <a:srgbClr val="F5FBF7"/>
+          </a:solidFill>
+          <a:ln w="6350">
+            <a:solidFill>
+              <a:srgbClr val="DDDDDD"/>
+            </a:solidFill>
+            <a:prstDash val="solid"/>
+          </a:ln>
+        </p:spPr>
+        <p:txBody>
+          <a:bodyPr/>
+          <a:lstStyle/>
+          <a:p>
+            <a:endParaRPr lang="zh-CN" altLang="en-US"/>
+          </a:p>
+        </p:txBody>
+      </p:sp>
+      <p:sp>
+        <p:nvSpPr>
+          <p:cNvPr id="42" name="Text 40"/>
+          <p:cNvSpPr/>
+          <p:nvPr/>
+        </p:nvSpPr>
+        <p:spPr>
+          <a:xfrm>
+            <a:off x="5440680" y="2551176"/>
+            <a:ext cx="1508760" cy="621792"/>
+          </a:xfrm>
+          <a:prstGeom prst="rect">
+            <a:avLst/>
+          </a:prstGeom>
+          <a:noFill/>
+          <a:ln/>
+        </p:spPr>
+        <p:txBody>
+          <a:bodyPr wrap="square" lIns="0" tIns="0" rIns="0" bIns="0" rtlCol="0" anchor="ctr"/>
+          <a:lstStyle/>
+          <a:p>
+            <a:pPr marL="0" indent="0" algn="ctr">
+              <a:buNone/>
+            </a:pPr>
+            <a:r>
+              <a:rPr lang="en-US" sz="800" dirty="0">
+                <a:solidFill>
+                  <a:srgbClr val="2E2D2C"/>
+                </a:solidFill>
+                <a:latin typeface="Arial" pitchFamily="34" charset="0"/>
+                <a:ea typeface="Arial" pitchFamily="34" charset="-122"/>
+                <a:cs typeface="Arial" pitchFamily="34" charset="-120"/>
+              </a:rPr>
+              <a:t>医院深耕</a:t>
+            </a:r>
+            <a:endParaRPr lang="en-US" sz="800" dirty="0"/>
+          </a:p>
+          <a:p>
+            <a:pPr marL="0" indent="0" algn="ctr">
+              <a:buNone/>
+            </a:pPr>
+            <a:r>
+              <a:rPr lang="en-US" sz="800" dirty="0">
+                <a:solidFill>
+                  <a:srgbClr val="2E2D2C"/>
+                </a:solidFill>
+                <a:latin typeface="Arial" pitchFamily="34" charset="0"/>
+                <a:ea typeface="Arial" pitchFamily="34" charset="-122"/>
+                <a:cs typeface="Arial" pitchFamily="34" charset="-120"/>
+              </a:rPr>
+              <a:t>K+N物流合作</a:t>
+            </a:r>
+            <a:endParaRPr lang="en-US" sz="800" dirty="0"/>
+          </a:p>
+        </p:txBody>
+      </p:sp>
+      <p:sp>
+        <p:nvSpPr>
+          <p:cNvPr id="43" name="Shape 41"/>
+          <p:cNvSpPr/>
+          <p:nvPr/>
+        </p:nvSpPr>
+        <p:spPr>
+          <a:xfrm>
+            <a:off x="6995160" y="2551176"/>
+            <a:ext cx="1600200" cy="621792"/>
+          </a:xfrm>
+          <a:prstGeom prst="rect">
+            <a:avLst/>
+          </a:prstGeom>
+          <a:solidFill>
+            <a:srgbClr val="F5FBF7"/>
+          </a:solidFill>
+          <a:ln w="6350">
+            <a:solidFill>
+              <a:srgbClr val="DDDDDD"/>
+            </a:solidFill>
+            <a:prstDash val="solid"/>
+          </a:ln>
+        </p:spPr>
+        <p:txBody>
+          <a:bodyPr/>
+          <a:lstStyle/>
+          <a:p>
+            <a:endParaRPr lang="zh-CN" altLang="en-US"/>
+          </a:p>
+        </p:txBody>
+      </p:sp>
+      <p:sp>
+        <p:nvSpPr>
+          <p:cNvPr id="44" name="Text 42"/>
+          <p:cNvSpPr/>
+          <p:nvPr/>
+        </p:nvSpPr>
+        <p:spPr>
+          <a:xfrm>
+            <a:off x="7040880" y="2551176"/>
+            <a:ext cx="1508760" cy="621792"/>
+          </a:xfrm>
+          <a:prstGeom prst="rect">
+            <a:avLst/>
+          </a:prstGeom>
+          <a:noFill/>
+          <a:ln/>
+        </p:spPr>
+        <p:txBody>
+          <a:bodyPr wrap="square" lIns="0" tIns="0" rIns="0" bIns="0" rtlCol="0" anchor="ctr"/>
+          <a:lstStyle/>
+          <a:p>
+            <a:pPr marL="0" indent="0" algn="ctr">
+              <a:buNone/>
+            </a:pPr>
+            <a:r>
+              <a:rPr lang="en-US" sz="800" dirty="0">
+                <a:solidFill>
+                  <a:srgbClr val="2E2D2C"/>
+                </a:solidFill>
+                <a:latin typeface="Arial" pitchFamily="34" charset="0"/>
+                <a:ea typeface="Arial" pitchFamily="34" charset="-122"/>
+                <a:cs typeface="Arial" pitchFamily="34" charset="-120"/>
+              </a:rPr>
+              <a:t>电商增速80%+</a:t>
+            </a:r>
+            <a:endParaRPr lang="en-US" sz="800" dirty="0"/>
+          </a:p>
+          <a:p>
+            <a:pPr marL="0" indent="0" algn="ctr">
+              <a:buNone/>
+            </a:pPr>
+            <a:r>
+              <a:rPr lang="en-US" sz="800" dirty="0">
+                <a:solidFill>
+                  <a:srgbClr val="2E2D2C"/>
+                </a:solidFill>
+                <a:latin typeface="Arial" pitchFamily="34" charset="0"/>
+                <a:ea typeface="Arial" pitchFamily="34" charset="-122"/>
+                <a:cs typeface="Arial" pitchFamily="34" charset="-120"/>
+              </a:rPr>
+              <a:t>医院线下布局</a:t>
+            </a:r>
+            <a:endParaRPr lang="en-US" sz="800" dirty="0"/>
+          </a:p>
+        </p:txBody>
+      </p:sp>
+      <p:sp>
+        <p:nvSpPr>
+          <p:cNvPr id="45" name="Shape 43"/>
+          <p:cNvSpPr/>
+          <p:nvPr/>
+        </p:nvSpPr>
+        <p:spPr>
+          <a:xfrm>
+            <a:off x="365760" y="3172968"/>
+            <a:ext cx="1463040" cy="621792"/>
+          </a:xfrm>
+          <a:prstGeom prst="rect">
+            <a:avLst/>
+          </a:prstGeom>
+          <a:solidFill>
+            <a:srgbClr val="FFFFFF"/>
+          </a:solidFill>
+          <a:ln w="6350">
+            <a:solidFill>
+              <a:srgbClr val="DDDDDD"/>
+            </a:solidFill>
+            <a:prstDash val="solid"/>
+          </a:ln>
+        </p:spPr>
+        <p:txBody>
+          <a:bodyPr/>
+          <a:lstStyle/>
+          <a:p>
+            <a:endParaRPr lang="zh-CN" altLang="en-US"/>
+          </a:p>
+        </p:txBody>
+      </p:sp>
+      <p:sp>
+        <p:nvSpPr>
+          <p:cNvPr id="46" name="Text 44"/>
+          <p:cNvSpPr/>
+          <p:nvPr/>
+        </p:nvSpPr>
+        <p:spPr>
+          <a:xfrm>
+            <a:off x="411480" y="3172968"/>
+            <a:ext cx="1371600" cy="621792"/>
+          </a:xfrm>
+          <a:prstGeom prst="rect">
+            <a:avLst/>
+          </a:prstGeom>
+          <a:noFill/>
+          <a:ln/>
+        </p:spPr>
+        <p:txBody>
+          <a:bodyPr wrap="square" lIns="0" tIns="0" rIns="0" bIns="0" rtlCol="0" anchor="ctr"/>
+          <a:lstStyle/>
+          <a:p>
+            <a:pPr marL="0" indent="0" algn="ctr">
+              <a:buNone/>
+            </a:pPr>
+            <a:r>
+              <a:rPr lang="en-US" sz="800" dirty="0">
+                <a:solidFill>
+                  <a:srgbClr val="2E2D2C"/>
+                </a:solidFill>
+                <a:latin typeface="Arial" pitchFamily="34" charset="0"/>
+                <a:ea typeface="Arial" pitchFamily="34" charset="-122"/>
+                <a:cs typeface="Arial" pitchFamily="34" charset="-120"/>
+              </a:rPr>
+              <a:t>市场定位</a:t>
+            </a:r>
+            <a:endParaRPr lang="en-US" sz="800" dirty="0"/>
+          </a:p>
+          <a:p>
+            <a:pPr marL="0" indent="0" algn="ctr">
+              <a:buNone/>
+            </a:pPr>
+            <a:r>
+              <a:rPr lang="en-US" sz="800" dirty="0">
+                <a:solidFill>
+                  <a:srgbClr val="2E2D2C"/>
+                </a:solidFill>
+                <a:latin typeface="Arial" pitchFamily="34" charset="0"/>
+                <a:ea typeface="Arial" pitchFamily="34" charset="-122"/>
+                <a:cs typeface="Arial" pitchFamily="34" charset="-120"/>
+              </a:rPr>
+              <a:t>Positioning</a:t>
+            </a:r>
+            <a:endParaRPr lang="en-US" sz="800" dirty="0"/>
+          </a:p>
+        </p:txBody>
+      </p:sp>
+      <p:sp>
+        <p:nvSpPr>
+          <p:cNvPr id="47" name="Shape 45"/>
+          <p:cNvSpPr/>
+          <p:nvPr/>
+        </p:nvSpPr>
+        <p:spPr>
+          <a:xfrm>
+            <a:off x="1828800" y="3172968"/>
+            <a:ext cx="1828800" cy="621792"/>
+          </a:xfrm>
+          <a:prstGeom prst="rect">
+            <a:avLst/>
+          </a:prstGeom>
+          <a:solidFill>
+            <a:srgbClr val="E8FFF2"/>
+          </a:solidFill>
+          <a:ln w="6350">
+            <a:solidFill>
+              <a:srgbClr val="DDDDDD"/>
+            </a:solidFill>
+            <a:prstDash val="solid"/>
+          </a:ln>
+        </p:spPr>
+        <p:txBody>
+          <a:bodyPr/>
+          <a:lstStyle/>
+          <a:p>
+            <a:endParaRPr lang="zh-CN" altLang="en-US"/>
+          </a:p>
+        </p:txBody>
+      </p:sp>
+      <p:sp>
+        <p:nvSpPr>
+          <p:cNvPr id="48" name="Text 46"/>
+          <p:cNvSpPr/>
+          <p:nvPr/>
+        </p:nvSpPr>
+        <p:spPr>
+          <a:xfrm>
+            <a:off x="1874520" y="3172968"/>
+            <a:ext cx="1737360" cy="621792"/>
+          </a:xfrm>
+          <a:prstGeom prst="rect">
+            <a:avLst/>
+          </a:prstGeom>
+          <a:noFill/>
+          <a:ln/>
+        </p:spPr>
+        <p:txBody>
+          <a:bodyPr wrap="square" lIns="0" tIns="0" rIns="0" bIns="0" rtlCol="0" anchor="ctr"/>
+          <a:lstStyle/>
+          <a:p>
+            <a:pPr marL="0" indent="0" algn="ctr">
+              <a:buNone/>
+            </a:pPr>
+            <a:r>
+              <a:rPr lang="en-US" sz="800" dirty="0">
+                <a:solidFill>
+                  <a:srgbClr val="08312A"/>
+                </a:solidFill>
+                <a:latin typeface="Arial" pitchFamily="34" charset="0"/>
+                <a:ea typeface="Arial" pitchFamily="34" charset="-122"/>
+                <a:cs typeface="Arial" pitchFamily="34" charset="-120"/>
+              </a:rPr>
+              <a:t>高端驱虫/抗寄生虫</a:t>
+            </a:r>
+            <a:endParaRPr lang="en-US" sz="800" dirty="0"/>
+          </a:p>
+          <a:p>
+            <a:pPr marL="0" indent="0" algn="ctr">
+              <a:buNone/>
+            </a:pPr>
+            <a:r>
+              <a:rPr lang="en-US" sz="800" dirty="0">
+                <a:solidFill>
+                  <a:srgbClr val="08312A"/>
+                </a:solidFill>
+                <a:latin typeface="Arial" pitchFamily="34" charset="0"/>
+                <a:ea typeface="Arial" pitchFamily="34" charset="-122"/>
+                <a:cs typeface="Arial" pitchFamily="34" charset="-120"/>
+              </a:rPr>
+              <a:t>预防性用药</a:t>
+            </a:r>
+            <a:endParaRPr lang="en-US" sz="800" dirty="0"/>
+          </a:p>
+        </p:txBody>
+      </p:sp>
+      <p:sp>
+        <p:nvSpPr>
+          <p:cNvPr id="49" name="Shape 47"/>
+          <p:cNvSpPr/>
+          <p:nvPr/>
+        </p:nvSpPr>
+        <p:spPr>
+          <a:xfrm>
+            <a:off x="3657600" y="3172968"/>
+            <a:ext cx="1737360" cy="621792"/>
+          </a:xfrm>
+          <a:prstGeom prst="rect">
+            <a:avLst/>
+          </a:prstGeom>
+          <a:solidFill>
+            <a:srgbClr val="FFFFFF"/>
+          </a:solidFill>
+          <a:ln w="6350">
+            <a:solidFill>
+              <a:srgbClr val="DDDDDD"/>
+            </a:solidFill>
+            <a:prstDash val="solid"/>
+          </a:ln>
+        </p:spPr>
+        <p:txBody>
+          <a:bodyPr/>
+          <a:lstStyle/>
+          <a:p>
+            <a:endParaRPr lang="zh-CN" altLang="en-US"/>
+          </a:p>
+        </p:txBody>
+      </p:sp>
+      <p:sp>
+        <p:nvSpPr>
+          <p:cNvPr id="50" name="Text 48"/>
+          <p:cNvSpPr/>
+          <p:nvPr/>
+        </p:nvSpPr>
+        <p:spPr>
+          <a:xfrm>
+            <a:off x="3703320" y="3172968"/>
+            <a:ext cx="1645920" cy="621792"/>
+          </a:xfrm>
+          <a:prstGeom prst="rect">
+            <a:avLst/>
+          </a:prstGeom>
+          <a:noFill/>
+          <a:ln/>
+        </p:spPr>
+        <p:txBody>
+          <a:bodyPr wrap="square" lIns="0" tIns="0" rIns="0" bIns="0" rtlCol="0" anchor="ctr"/>
+          <a:lstStyle/>
+          <a:p>
+            <a:pPr marL="0" indent="0" algn="ctr">
+              <a:buNone/>
+            </a:pPr>
+            <a:r>
+              <a:rPr lang="en-US" sz="800" dirty="0">
+                <a:solidFill>
+                  <a:srgbClr val="2E2D2C"/>
+                </a:solidFill>
+                <a:latin typeface="Arial" pitchFamily="34" charset="0"/>
+                <a:ea typeface="Arial" pitchFamily="34" charset="-122"/>
+                <a:cs typeface="Arial" pitchFamily="34" charset="-120"/>
+              </a:rPr>
+              <a:t>高价值处方药</a:t>
+            </a:r>
+            <a:endParaRPr lang="en-US" sz="800" dirty="0"/>
+          </a:p>
+          <a:p>
+            <a:pPr marL="0" indent="0" algn="ctr">
+              <a:buNone/>
+            </a:pPr>
+            <a:r>
+              <a:rPr lang="en-US" sz="800" dirty="0">
+                <a:solidFill>
+                  <a:srgbClr val="2E2D2C"/>
+                </a:solidFill>
+                <a:latin typeface="Arial" pitchFamily="34" charset="0"/>
+                <a:ea typeface="Arial" pitchFamily="34" charset="-122"/>
+                <a:cs typeface="Arial" pitchFamily="34" charset="-120"/>
+              </a:rPr>
+              <a:t>慢性病长期管理</a:t>
+            </a:r>
+            <a:endParaRPr lang="en-US" sz="800" dirty="0"/>
+          </a:p>
+        </p:txBody>
+      </p:sp>
+      <p:sp>
+        <p:nvSpPr>
+          <p:cNvPr id="51" name="Shape 49"/>
+          <p:cNvSpPr/>
+          <p:nvPr/>
+        </p:nvSpPr>
+        <p:spPr>
+          <a:xfrm>
+            <a:off x="5394960" y="3172968"/>
+            <a:ext cx="1600200" cy="621792"/>
+          </a:xfrm>
+          <a:prstGeom prst="rect">
+            <a:avLst/>
+          </a:prstGeom>
+          <a:solidFill>
+            <a:srgbClr val="FFFFFF"/>
+          </a:solidFill>
+          <a:ln w="6350">
+            <a:solidFill>
+              <a:srgbClr val="DDDDDD"/>
+            </a:solidFill>
+            <a:prstDash val="solid"/>
+          </a:ln>
+        </p:spPr>
+        <p:txBody>
+          <a:bodyPr/>
+          <a:lstStyle/>
+          <a:p>
+            <a:endParaRPr lang="zh-CN" altLang="en-US"/>
+          </a:p>
+        </p:txBody>
+      </p:sp>
+      <p:sp>
+        <p:nvSpPr>
+          <p:cNvPr id="52" name="Text 50"/>
+          <p:cNvSpPr/>
+          <p:nvPr/>
+        </p:nvSpPr>
+        <p:spPr>
+          <a:xfrm>
+            <a:off x="5440680" y="3172968"/>
+            <a:ext cx="1508760" cy="621792"/>
+          </a:xfrm>
+          <a:prstGeom prst="rect">
+            <a:avLst/>
+          </a:prstGeom>
+          <a:noFill/>
+          <a:ln/>
+        </p:spPr>
+        <p:txBody>
+          <a:bodyPr wrap="square" lIns="0" tIns="0" rIns="0" bIns="0" rtlCol="0" anchor="ctr"/>
+          <a:lstStyle/>
+          <a:p>
+            <a:pPr marL="0" indent="0" algn="ctr">
+              <a:buNone/>
+            </a:pPr>
+            <a:r>
+              <a:rPr lang="en-US" sz="800" dirty="0">
+                <a:solidFill>
+                  <a:srgbClr val="2E2D2C"/>
+                </a:solidFill>
+                <a:latin typeface="Arial" pitchFamily="34" charset="0"/>
+                <a:ea typeface="Arial" pitchFamily="34" charset="-122"/>
+                <a:cs typeface="Arial" pitchFamily="34" charset="-120"/>
+              </a:rPr>
+              <a:t>预防+治疗</a:t>
+            </a:r>
+            <a:endParaRPr lang="en-US" sz="800" dirty="0"/>
+          </a:p>
+          <a:p>
+            <a:pPr marL="0" indent="0" algn="ctr">
+              <a:buNone/>
+            </a:pPr>
+            <a:r>
+              <a:rPr lang="en-US" sz="800" dirty="0">
+                <a:solidFill>
+                  <a:srgbClr val="2E2D2C"/>
+                </a:solidFill>
+                <a:latin typeface="Arial" pitchFamily="34" charset="0"/>
+                <a:ea typeface="Arial" pitchFamily="34" charset="-122"/>
+                <a:cs typeface="Arial" pitchFamily="34" charset="-120"/>
+              </a:rPr>
+              <a:t>精准干预</a:t>
+            </a:r>
+            <a:endParaRPr lang="en-US" sz="800" dirty="0"/>
+          </a:p>
+        </p:txBody>
+      </p:sp>
+      <p:sp>
+        <p:nvSpPr>
+          <p:cNvPr id="53" name="Shape 51"/>
+          <p:cNvSpPr/>
+          <p:nvPr/>
+        </p:nvSpPr>
+        <p:spPr>
+          <a:xfrm>
+            <a:off x="6995160" y="3172968"/>
+            <a:ext cx="1600200" cy="621792"/>
+          </a:xfrm>
+          <a:prstGeom prst="rect">
+            <a:avLst/>
+          </a:prstGeom>
+          <a:solidFill>
+            <a:srgbClr val="FFFFFF"/>
+          </a:solidFill>
+          <a:ln w="6350">
+            <a:solidFill>
+              <a:srgbClr val="DDDDDD"/>
+            </a:solidFill>
+            <a:prstDash val="solid"/>
+          </a:ln>
+        </p:spPr>
+        <p:txBody>
+          <a:bodyPr/>
+          <a:lstStyle/>
+          <a:p>
+            <a:endParaRPr lang="zh-CN" altLang="en-US"/>
+          </a:p>
+        </p:txBody>
+      </p:sp>
+      <p:sp>
+        <p:nvSpPr>
+          <p:cNvPr id="54" name="Text 52"/>
+          <p:cNvSpPr/>
+          <p:nvPr/>
+        </p:nvSpPr>
+        <p:spPr>
+          <a:xfrm>
+            <a:off x="7040880" y="3172968"/>
+            <a:ext cx="1508760" cy="621792"/>
+          </a:xfrm>
+          <a:prstGeom prst="rect">
+            <a:avLst/>
+          </a:prstGeom>
+          <a:noFill/>
+          <a:ln/>
+        </p:spPr>
+        <p:txBody>
+          <a:bodyPr wrap="square" lIns="0" tIns="0" rIns="0" bIns="0" rtlCol="0" anchor="ctr"/>
+          <a:lstStyle/>
+          <a:p>
+            <a:pPr marL="0" indent="0" algn="ctr">
+              <a:buNone/>
+            </a:pPr>
+            <a:r>
+              <a:rPr lang="en-US" sz="800" dirty="0">
+                <a:solidFill>
+                  <a:srgbClr val="2E2D2C"/>
+                </a:solidFill>
+                <a:latin typeface="Arial" pitchFamily="34" charset="0"/>
+                <a:ea typeface="Arial" pitchFamily="34" charset="-122"/>
+                <a:cs typeface="Arial" pitchFamily="34" charset="-120"/>
+              </a:rPr>
+              <a:t>性价比+国产</a:t>
+            </a:r>
+            <a:endParaRPr lang="en-US" sz="800" dirty="0"/>
+          </a:p>
+          <a:p>
+            <a:pPr marL="0" indent="0" algn="ctr">
+              <a:buNone/>
+            </a:pPr>
+            <a:r>
+              <a:rPr lang="en-US" sz="800" dirty="0">
+                <a:solidFill>
+                  <a:srgbClr val="2E2D2C"/>
+                </a:solidFill>
+                <a:latin typeface="Arial" pitchFamily="34" charset="0"/>
+                <a:ea typeface="Arial" pitchFamily="34" charset="-122"/>
+                <a:cs typeface="Arial" pitchFamily="34" charset="-120"/>
+              </a:rPr>
+              <a:t>进口替代</a:t>
+            </a:r>
+            <a:endParaRPr lang="en-US" sz="800" dirty="0"/>
+          </a:p>
+        </p:txBody>
+      </p:sp>
+      <p:sp>
+        <p:nvSpPr>
+          <p:cNvPr id="55" name="Shape 53"/>
+          <p:cNvSpPr/>
+          <p:nvPr/>
+        </p:nvSpPr>
+        <p:spPr>
+          <a:xfrm>
+            <a:off x="365760" y="3794760"/>
+            <a:ext cx="1463040" cy="621792"/>
+          </a:xfrm>
+          <a:prstGeom prst="rect">
+            <a:avLst/>
+          </a:prstGeom>
+          <a:solidFill>
+            <a:srgbClr val="F5FBF7"/>
+          </a:solidFill>
+          <a:ln w="6350">
+            <a:solidFill>
+              <a:srgbClr val="DDDDDD"/>
+            </a:solidFill>
+            <a:prstDash val="solid"/>
+          </a:ln>
+        </p:spPr>
+        <p:txBody>
+          <a:bodyPr/>
+          <a:lstStyle/>
+          <a:p>
+            <a:endParaRPr lang="zh-CN" altLang="en-US"/>
+          </a:p>
+        </p:txBody>
+      </p:sp>
+      <p:sp>
+        <p:nvSpPr>
+          <p:cNvPr id="56" name="Text 54"/>
+          <p:cNvSpPr/>
+          <p:nvPr/>
+        </p:nvSpPr>
+        <p:spPr>
+          <a:xfrm>
+            <a:off x="411480" y="3794760"/>
+            <a:ext cx="1371600" cy="621792"/>
+          </a:xfrm>
+          <a:prstGeom prst="rect">
+            <a:avLst/>
+          </a:prstGeom>
+          <a:noFill/>
+          <a:ln/>
+        </p:spPr>
+        <p:txBody>
+          <a:bodyPr wrap="square" lIns="0" tIns="0" rIns="0" bIns="0" rtlCol="0" anchor="ctr"/>
+          <a:lstStyle/>
+          <a:p>
+            <a:pPr marL="0" indent="0" algn="ctr">
+              <a:buNone/>
+            </a:pPr>
+            <a:r>
+              <a:rPr lang="en-US" sz="800" dirty="0">
+                <a:solidFill>
+                  <a:srgbClr val="2E2D2C"/>
+                </a:solidFill>
+                <a:latin typeface="Arial" pitchFamily="34" charset="0"/>
+                <a:ea typeface="Arial" pitchFamily="34" charset="-122"/>
+                <a:cs typeface="Arial" pitchFamily="34" charset="-120"/>
+              </a:rPr>
+              <a:t>主要挑战</a:t>
+            </a:r>
+            <a:endParaRPr lang="en-US" sz="800" dirty="0"/>
+          </a:p>
+          <a:p>
+            <a:pPr marL="0" indent="0" algn="ctr">
+              <a:buNone/>
+            </a:pPr>
+            <a:r>
+              <a:rPr lang="en-US" sz="800" dirty="0">
+                <a:solidFill>
+                  <a:srgbClr val="2E2D2C"/>
+                </a:solidFill>
+                <a:latin typeface="Arial" pitchFamily="34" charset="0"/>
+                <a:ea typeface="Arial" pitchFamily="34" charset="-122"/>
+                <a:cs typeface="Arial" pitchFamily="34" charset="-120"/>
+              </a:rPr>
+              <a:t>Challenges</a:t>
+            </a:r>
+            <a:endParaRPr lang="en-US" sz="800" dirty="0"/>
+          </a:p>
+        </p:txBody>
+      </p:sp>
+      <p:sp>
+        <p:nvSpPr>
+          <p:cNvPr id="57" name="Shape 55"/>
+          <p:cNvSpPr/>
+          <p:nvPr/>
+        </p:nvSpPr>
+        <p:spPr>
+          <a:xfrm>
+            <a:off x="1828800" y="3794760"/>
+            <a:ext cx="1828800" cy="621792"/>
+          </a:xfrm>
+          <a:prstGeom prst="rect">
+            <a:avLst/>
+          </a:prstGeom>
+          <a:solidFill>
+            <a:srgbClr val="E8FFF2"/>
+          </a:solidFill>
+          <a:ln w="6350">
+            <a:solidFill>
+              <a:srgbClr val="DDDDDD"/>
+            </a:solidFill>
+            <a:prstDash val="solid"/>
+          </a:ln>
+        </p:spPr>
+        <p:txBody>
+          <a:bodyPr/>
+          <a:lstStyle/>
+          <a:p>
+            <a:endParaRPr lang="zh-CN" altLang="en-US"/>
+          </a:p>
+        </p:txBody>
+      </p:sp>
+      <p:sp>
+        <p:nvSpPr>
+          <p:cNvPr id="58" name="Text 56"/>
+          <p:cNvSpPr/>
+          <p:nvPr/>
+        </p:nvSpPr>
+        <p:spPr>
+          <a:xfrm>
+            <a:off x="1874520" y="3794760"/>
+            <a:ext cx="1737360" cy="621792"/>
+          </a:xfrm>
+          <a:prstGeom prst="rect">
+            <a:avLst/>
+          </a:prstGeom>
+          <a:noFill/>
+          <a:ln/>
+        </p:spPr>
+        <p:txBody>
+          <a:bodyPr wrap="square" lIns="0" tIns="0" rIns="0" bIns="0" rtlCol="0" anchor="ctr"/>
+          <a:lstStyle/>
+          <a:p>
+            <a:pPr marL="0" indent="0" algn="ctr">
+              <a:buNone/>
+            </a:pPr>
+            <a:r>
+              <a:rPr lang="en-US" sz="800" dirty="0">
+                <a:solidFill>
+                  <a:srgbClr val="08312A"/>
+                </a:solidFill>
+                <a:latin typeface="Arial" pitchFamily="34" charset="0"/>
+                <a:ea typeface="Arial" pitchFamily="34" charset="-122"/>
+                <a:cs typeface="Arial" pitchFamily="34" charset="-120"/>
+              </a:rPr>
+              <a:t>国产品性价比竞争</a:t>
+            </a:r>
+            <a:endParaRPr lang="en-US" sz="800" dirty="0"/>
+          </a:p>
+          <a:p>
+            <a:pPr marL="0" indent="0" algn="ctr">
+              <a:buNone/>
+            </a:pPr>
+            <a:r>
+              <a:rPr lang="en-US" sz="800" dirty="0">
+                <a:solidFill>
+                  <a:srgbClr val="08312A"/>
+                </a:solidFill>
+                <a:latin typeface="Arial" pitchFamily="34" charset="0"/>
+                <a:ea typeface="Arial" pitchFamily="34" charset="-122"/>
+                <a:cs typeface="Arial" pitchFamily="34" charset="-120"/>
+              </a:rPr>
+              <a:t>新品上市速度</a:t>
+            </a:r>
+            <a:endParaRPr lang="en-US" sz="800" dirty="0"/>
+          </a:p>
+        </p:txBody>
+      </p:sp>
+      <p:sp>
+        <p:nvSpPr>
+          <p:cNvPr id="59" name="Shape 57"/>
+          <p:cNvSpPr/>
+          <p:nvPr/>
+        </p:nvSpPr>
+        <p:spPr>
+          <a:xfrm>
+            <a:off x="3657600" y="3794760"/>
+            <a:ext cx="1737360" cy="621792"/>
+          </a:xfrm>
+          <a:prstGeom prst="rect">
+            <a:avLst/>
+          </a:prstGeom>
+          <a:solidFill>
+            <a:srgbClr val="F5FBF7"/>
+          </a:solidFill>
+          <a:ln w="6350">
+            <a:solidFill>
+              <a:srgbClr val="DDDDDD"/>
+            </a:solidFill>
+            <a:prstDash val="solid"/>
+          </a:ln>
+        </p:spPr>
+        <p:txBody>
+          <a:bodyPr/>
+          <a:lstStyle/>
+          <a:p>
+            <a:endParaRPr lang="zh-CN" altLang="en-US"/>
+          </a:p>
+        </p:txBody>
+      </p:sp>
+      <p:sp>
+        <p:nvSpPr>
+          <p:cNvPr id="60" name="Text 58"/>
+          <p:cNvSpPr/>
+          <p:nvPr/>
+        </p:nvSpPr>
+        <p:spPr>
+          <a:xfrm>
+            <a:off x="3703320" y="3794760"/>
+            <a:ext cx="1645920" cy="621792"/>
+          </a:xfrm>
+          <a:prstGeom prst="rect">
+            <a:avLst/>
+          </a:prstGeom>
+          <a:noFill/>
+          <a:ln/>
+        </p:spPr>
+        <p:txBody>
+          <a:bodyPr wrap="square" lIns="0" tIns="0" rIns="0" bIns="0" rtlCol="0" anchor="ctr"/>
+          <a:lstStyle/>
+          <a:p>
+            <a:pPr marL="0" indent="0" algn="ctr">
+              <a:buNone/>
+            </a:pPr>
+            <a:r>
+              <a:rPr lang="en-US" sz="800" dirty="0">
+                <a:solidFill>
+                  <a:srgbClr val="2E2D2C"/>
+                </a:solidFill>
+                <a:latin typeface="Arial" pitchFamily="34" charset="0"/>
+                <a:ea typeface="Arial" pitchFamily="34" charset="-122"/>
+                <a:cs typeface="Arial" pitchFamily="34" charset="-120"/>
+              </a:rPr>
+              <a:t>增速放缓-11%</a:t>
+            </a:r>
+            <a:endParaRPr lang="en-US" sz="800" dirty="0"/>
+          </a:p>
+          <a:p>
+            <a:pPr marL="0" indent="0" algn="ctr">
+              <a:buNone/>
+            </a:pPr>
+            <a:r>
+              <a:rPr lang="en-US" sz="800" dirty="0">
+                <a:solidFill>
+                  <a:srgbClr val="2E2D2C"/>
+                </a:solidFill>
+                <a:latin typeface="Arial" pitchFamily="34" charset="0"/>
+                <a:ea typeface="Arial" pitchFamily="34" charset="-122"/>
+                <a:cs typeface="Arial" pitchFamily="34" charset="-120"/>
+              </a:rPr>
+              <a:t>市场竞争加剧</a:t>
+            </a:r>
+            <a:endParaRPr lang="en-US" sz="800" dirty="0"/>
+          </a:p>
+        </p:txBody>
+      </p:sp>
+      <p:sp>
+        <p:nvSpPr>
+          <p:cNvPr id="61" name="Shape 59"/>
+          <p:cNvSpPr/>
+          <p:nvPr/>
+        </p:nvSpPr>
+        <p:spPr>
+          <a:xfrm>
+            <a:off x="5394960" y="3794760"/>
+            <a:ext cx="1600200" cy="621792"/>
+          </a:xfrm>
+          <a:prstGeom prst="rect">
+            <a:avLst/>
+          </a:prstGeom>
+          <a:solidFill>
+            <a:srgbClr val="F5FBF7"/>
+          </a:solidFill>
+          <a:ln w="6350">
+            <a:solidFill>
+              <a:srgbClr val="DDDDDD"/>
+            </a:solidFill>
+            <a:prstDash val="solid"/>
+          </a:ln>
+        </p:spPr>
+        <p:txBody>
+          <a:bodyPr/>
+          <a:lstStyle/>
+          <a:p>
+            <a:endParaRPr lang="zh-CN" altLang="en-US"/>
+          </a:p>
+        </p:txBody>
+      </p:sp>
+      <p:sp>
+        <p:nvSpPr>
+          <p:cNvPr id="62" name="Text 60"/>
+          <p:cNvSpPr/>
+          <p:nvPr/>
+        </p:nvSpPr>
+        <p:spPr>
+          <a:xfrm>
+            <a:off x="5440680" y="3794760"/>
+            <a:ext cx="1508760" cy="621792"/>
+          </a:xfrm>
+          <a:prstGeom prst="rect">
+            <a:avLst/>
+          </a:prstGeom>
+          <a:noFill/>
+          <a:ln/>
+        </p:spPr>
+        <p:txBody>
+          <a:bodyPr wrap="square" lIns="0" tIns="0" rIns="0" bIns="0" rtlCol="0" anchor="ctr"/>
+          <a:lstStyle/>
+          <a:p>
+            <a:pPr marL="0" indent="0" algn="ctr">
+              <a:buNone/>
+            </a:pPr>
+            <a:r>
+              <a:rPr lang="en-US" sz="800" dirty="0">
+                <a:solidFill>
+                  <a:srgbClr val="2E2D2C"/>
+                </a:solidFill>
+                <a:latin typeface="Arial" pitchFamily="34" charset="0"/>
+                <a:ea typeface="Arial" pitchFamily="34" charset="-122"/>
+                <a:cs typeface="Arial" pitchFamily="34" charset="-120"/>
+              </a:rPr>
+              <a:t>净负债33亿美元</a:t>
+            </a:r>
+            <a:endParaRPr lang="en-US" sz="800" dirty="0"/>
+          </a:p>
+          <a:p>
+            <a:pPr marL="0" indent="0" algn="ctr">
+              <a:buNone/>
+            </a:pPr>
+            <a:r>
+              <a:rPr lang="en-US" sz="800" dirty="0">
+                <a:solidFill>
+                  <a:srgbClr val="2E2D2C"/>
+                </a:solidFill>
+                <a:latin typeface="Arial" pitchFamily="34" charset="0"/>
+                <a:ea typeface="Arial" pitchFamily="34" charset="-122"/>
+                <a:cs typeface="Arial" pitchFamily="34" charset="-120"/>
+              </a:rPr>
+              <a:t>新兴市场压力</a:t>
+            </a:r>
+            <a:endParaRPr lang="en-US" sz="800" dirty="0"/>
+          </a:p>
+        </p:txBody>
+      </p:sp>
+      <p:sp>
+        <p:nvSpPr>
+          <p:cNvPr id="63" name="Shape 61"/>
+          <p:cNvSpPr/>
+          <p:nvPr/>
+        </p:nvSpPr>
+        <p:spPr>
+          <a:xfrm>
+            <a:off x="6995160" y="3794760"/>
+            <a:ext cx="1600200" cy="621792"/>
+          </a:xfrm>
+          <a:prstGeom prst="rect">
+            <a:avLst/>
+          </a:prstGeom>
+          <a:solidFill>
+            <a:srgbClr val="F5FBF7"/>
+          </a:solidFill>
+          <a:ln w="6350">
+            <a:solidFill>
+              <a:srgbClr val="DDDDDD"/>
+            </a:solidFill>
+            <a:prstDash val="solid"/>
+          </a:ln>
+        </p:spPr>
+        <p:txBody>
+          <a:bodyPr/>
+          <a:lstStyle/>
+          <a:p>
+            <a:endParaRPr lang="zh-CN" altLang="en-US"/>
+          </a:p>
+        </p:txBody>
+      </p:sp>
+      <p:sp>
+        <p:nvSpPr>
+          <p:cNvPr id="64" name="Text 62"/>
+          <p:cNvSpPr/>
+          <p:nvPr/>
+        </p:nvSpPr>
+        <p:spPr>
+          <a:xfrm>
+            <a:off x="7040880" y="3794760"/>
+            <a:ext cx="1508760" cy="621792"/>
+          </a:xfrm>
+          <a:prstGeom prst="rect">
+            <a:avLst/>
+          </a:prstGeom>
+          <a:noFill/>
+          <a:ln/>
+        </p:spPr>
+        <p:txBody>
+          <a:bodyPr wrap="square" lIns="0" tIns="0" rIns="0" bIns="0" rtlCol="0" anchor="ctr"/>
+          <a:lstStyle/>
+          <a:p>
+            <a:pPr marL="0" indent="0" algn="ctr">
+              <a:buNone/>
+            </a:pPr>
+            <a:r>
+              <a:rPr lang="en-US" sz="800" dirty="0">
+                <a:solidFill>
+                  <a:srgbClr val="2E2D2C"/>
+                </a:solidFill>
+                <a:latin typeface="Arial" pitchFamily="34" charset="0"/>
+                <a:ea typeface="Arial" pitchFamily="34" charset="-122"/>
+                <a:cs typeface="Arial" pitchFamily="34" charset="-120"/>
+              </a:rPr>
+              <a:t>高端突破</a:t>
+            </a:r>
+            <a:endParaRPr lang="en-US" sz="800" dirty="0"/>
+          </a:p>
+          <a:p>
+            <a:pPr marL="0" indent="0" algn="ctr">
+              <a:buNone/>
+            </a:pPr>
+            <a:r>
+              <a:rPr lang="en-US" sz="800" dirty="0">
+                <a:solidFill>
+                  <a:srgbClr val="2E2D2C"/>
+                </a:solidFill>
+                <a:latin typeface="Arial" pitchFamily="34" charset="0"/>
+                <a:ea typeface="Arial" pitchFamily="34" charset="-122"/>
+                <a:cs typeface="Arial" pitchFamily="34" charset="-120"/>
+              </a:rPr>
+              <a:t>国际化经验</a:t>
+            </a:r>
+            <a:endParaRPr lang="en-US" sz="800" dirty="0"/>
+          </a:p>
+        </p:txBody>
+      </p:sp>
+      <p:sp>
+        <p:nvSpPr>
+          <p:cNvPr id="65" name="Shape 63"/>
+          <p:cNvSpPr/>
+          <p:nvPr/>
+        </p:nvSpPr>
+        <p:spPr>
+          <a:xfrm>
+            <a:off x="365760" y="1307592"/>
+            <a:ext cx="1463040" cy="3108960"/>
+          </a:xfrm>
+          <a:prstGeom prst="rect">
+            <a:avLst/>
+          </a:prstGeom>
+          <a:solidFill>
+            <a:srgbClr val="00E47C"/>
+          </a:solidFill>
+          <a:ln/>
+        </p:spPr>
+        <p:txBody>
+          <a:bodyPr/>
+          <a:lstStyle/>
+          <a:p>
+            <a:endParaRPr lang="zh-CN" altLang="en-US"/>
+          </a:p>
+        </p:txBody>
+      </p:sp>
+      <p:sp>
+        <p:nvSpPr>
+          <p:cNvPr id="66" name="Text 64"/>
+          <p:cNvSpPr/>
+          <p:nvPr/>
+        </p:nvSpPr>
+        <p:spPr>
+          <a:xfrm>
+            <a:off x="365760" y="1307592"/>
+            <a:ext cx="1463040" cy="3108960"/>
+          </a:xfrm>
+          <a:prstGeom prst="rect">
+            <a:avLst/>
+          </a:prstGeom>
+          <a:noFill/>
+          <a:ln/>
+        </p:spPr>
+        <p:txBody>
+          <a:bodyPr wrap="square" lIns="0" tIns="0" rIns="0" bIns="0" rtlCol="0" anchor="ctr"/>
+          <a:lstStyle/>
+          <a:p>
+            <a:pPr marL="0" indent="0" algn="ctr">
+              <a:buNone/>
+            </a:pPr>
+            <a:r>
+              <a:rPr lang="en-US" sz="1100" b="1" dirty="0">
+                <a:solidFill>
+                  <a:srgbClr val="08312A"/>
+                </a:solidFill>
+                <a:latin typeface="Arial" pitchFamily="34" charset="0"/>
+                <a:ea typeface="Arial" pitchFamily="34" charset="-122"/>
+                <a:cs typeface="Arial" pitchFamily="34" charset="-120"/>
+              </a:rPr>
+              <a:t>BI</a:t>
+            </a:r>
+            <a:endParaRPr lang="en-US" sz="1100" dirty="0"/>
+          </a:p>
+          <a:p>
+            <a:pPr marL="0" indent="0" algn="ctr">
+              <a:buNone/>
+            </a:pPr>
+            <a:r>
+              <a:rPr lang="en-US" sz="1100" b="1" dirty="0">
+                <a:solidFill>
+                  <a:srgbClr val="08312A"/>
+                </a:solidFill>
+                <a:latin typeface="Arial" pitchFamily="34" charset="0"/>
+                <a:ea typeface="Arial" pitchFamily="34" charset="-122"/>
+                <a:cs typeface="Arial" pitchFamily="34" charset="-120"/>
+              </a:rPr>
+              <a:t>优势</a:t>
+            </a:r>
+            <a:endParaRPr lang="en-US" sz="1100" dirty="0"/>
+          </a:p>
+          <a:p>
+            <a:pPr marL="0" indent="0" algn="ctr">
+              <a:buNone/>
+            </a:pPr>
+            <a:r>
+              <a:rPr lang="en-US" sz="1100" b="1" dirty="0">
+                <a:solidFill>
+                  <a:srgbClr val="08312A"/>
+                </a:solidFill>
+                <a:latin typeface="Arial" pitchFamily="34" charset="0"/>
+                <a:ea typeface="Arial" pitchFamily="34" charset="-122"/>
+                <a:cs typeface="Arial" pitchFamily="34" charset="-120"/>
+              </a:rPr>
+              <a:t>BI Edge</a:t>
+            </a:r>
+            <a:endParaRPr lang="en-US" sz="1100" dirty="0"/>
+          </a:p>
+        </p:txBody>
+      </p:sp>
+    </p:spTree>
+  </p:cSld>
+  <p:clrMapOvr>
+    <a:masterClrMapping/>
+  </p:clrMapOvr>
+</p:sld>
+</file>
+
+<file path=ppt/slides/slide11.xml><?xml version="1.0" encoding="utf-8"?>
+<p:sld xmlns:a="http://schemas.openxmlformats.org/drawingml/2006/main" xmlns:r="http://schemas.openxmlformats.org/officeDocument/2006/relationships" xmlns:p="http://schemas.openxmlformats.org/presentationml/2006/main">
   <p:cSld name="Slide 11">
     <p:bg>
       <p:bgPr>
@@ -3102,7 +6028,1176 @@
 </p:sld>
 </file>
 
-<file path=ppt/slides/slide11.xml><?xml version="1.0" encoding="utf-8"?>
+<file path=ppt/slides/slide12.xml><?xml version="1.0" encoding="utf-8"?>
+<p:sld xmlns:a="http://schemas.openxmlformats.org/drawingml/2006/main" xmlns:r="http://schemas.openxmlformats.org/officeDocument/2006/relationships" xmlns:p="http://schemas.openxmlformats.org/presentationml/2006/main">
+  <p:cSld>
+    <p:spTree>
+      <p:nvGrpSpPr>
+        <p:cNvPr id="1" name=""/>
+        <p:cNvGrpSpPr/>
+        <p:nvPr/>
+      </p:nvGrpSpPr>
+      <p:grpSpPr>
+        <a:xfrm>
+          <a:off x="0" y="0"/>
+          <a:ext cx="0" cy="0"/>
+          <a:chOff x="0" y="0"/>
+          <a:chExt cx="0" cy="0"/>
+        </a:xfrm>
+      </p:grpSpPr>
+      <p:sp>
+        <p:nvSpPr>
+          <p:cNvPr id="2" name="Shape 0"/>
+          <p:cNvSpPr/>
+          <p:nvPr/>
+        </p:nvSpPr>
+        <p:spPr>
+          <a:xfrm>
+            <a:off x="0" y="0"/>
+            <a:ext cx="9144000" cy="685800"/>
+          </a:xfrm>
+          <a:prstGeom prst="rect">
+            <a:avLst/>
+          </a:prstGeom>
+          <a:solidFill>
+            <a:srgbClr val="08312A"/>
+          </a:solidFill>
+          <a:ln/>
+        </p:spPr>
+      </p:sp>
+      <p:sp>
+        <p:nvSpPr>
+          <p:cNvPr id="3" name="Shape 1"/>
+          <p:cNvSpPr/>
+          <p:nvPr/>
+        </p:nvSpPr>
+        <p:spPr>
+          <a:xfrm>
+            <a:off x="0" y="0"/>
+            <a:ext cx="9144000" cy="73152"/>
+          </a:xfrm>
+          <a:prstGeom prst="rect">
+            <a:avLst/>
+          </a:prstGeom>
+          <a:solidFill>
+            <a:srgbClr val="00E47C"/>
+          </a:solidFill>
+          <a:ln/>
+        </p:spPr>
+      </p:sp>
+      <p:sp>
+        <p:nvSpPr>
+          <p:cNvPr id="4" name="Text 2"/>
+          <p:cNvSpPr/>
+          <p:nvPr/>
+        </p:nvSpPr>
+        <p:spPr>
+          <a:xfrm>
+            <a:off x="365760" y="0"/>
+            <a:ext cx="8412480" cy="685800"/>
+          </a:xfrm>
+          <a:prstGeom prst="rect">
+            <a:avLst/>
+          </a:prstGeom>
+          <a:noFill/>
+          <a:ln/>
+        </p:spPr>
+        <p:txBody>
+          <a:bodyPr wrap="square" lIns="0" tIns="0" rIns="0" bIns="0" rtlCol="0" anchor="ctr"/>
+          <a:lstStyle/>
+          <a:p>
+            <a:pPr marL="0" indent="0">
+              <a:buNone/>
+            </a:pPr>
+            <a:r>
+              <a:rPr lang="en-US" sz="2000" b="1" dirty="0">
+                <a:solidFill>
+                  <a:srgbClr val="FFFFFF"/>
+                </a:solidFill>
+                <a:latin typeface="Arial" pitchFamily="34" charset="0"/>
+                <a:ea typeface="Arial" pitchFamily="34" charset="-122"/>
+                <a:cs typeface="Arial" pitchFamily="34" charset="-120"/>
+              </a:rPr>
+              <a:t>微信小程序机会 | WeChat Mini Program Opportunities</a:t>
+            </a:r>
+            <a:endParaRPr lang="en-US" sz="2000" dirty="0"/>
+          </a:p>
+        </p:txBody>
+      </p:sp>
+      <p:sp>
+        <p:nvSpPr>
+          <p:cNvPr id="5" name="Shape 3"/>
+          <p:cNvSpPr/>
+          <p:nvPr/>
+        </p:nvSpPr>
+        <p:spPr>
+          <a:xfrm>
+            <a:off x="365760" y="777240"/>
+            <a:ext cx="2286000" cy="36576"/>
+          </a:xfrm>
+          <a:prstGeom prst="rect">
+            <a:avLst/>
+          </a:prstGeom>
+          <a:solidFill>
+            <a:srgbClr val="00E47C"/>
+          </a:solidFill>
+          <a:ln/>
+        </p:spPr>
+      </p:sp>
+      <p:sp>
+        <p:nvSpPr>
+          <p:cNvPr id="6" name="Text 4"/>
+          <p:cNvSpPr/>
+          <p:nvPr/>
+        </p:nvSpPr>
+        <p:spPr>
+          <a:xfrm>
+            <a:off x="365760" y="841248"/>
+            <a:ext cx="8229600" cy="274320"/>
+          </a:xfrm>
+          <a:prstGeom prst="rect">
+            <a:avLst/>
+          </a:prstGeom>
+          <a:noFill/>
+          <a:ln/>
+        </p:spPr>
+        <p:txBody>
+          <a:bodyPr wrap="square" lIns="0" tIns="0" rIns="0" bIns="0" rtlCol="0" anchor="ctr"/>
+          <a:lstStyle/>
+          <a:p>
+            <a:pPr marL="0" indent="0">
+              <a:buNone/>
+            </a:pPr>
+            <a:r>
+              <a:rPr lang="en-US" sz="1100" dirty="0">
+                <a:solidFill>
+                  <a:srgbClr val="898885"/>
+                </a:solidFill>
+                <a:latin typeface="Arial" pitchFamily="34" charset="0"/>
+                <a:ea typeface="Arial" pitchFamily="34" charset="-122"/>
+                <a:cs typeface="Arial" pitchFamily="34" charset="-120"/>
+              </a:rPr>
+              <a:t>建立用户黏性 · 获取一手机主数据 · 打造服务闭环</a:t>
+            </a:r>
+            <a:endParaRPr lang="en-US" sz="1100" dirty="0"/>
+          </a:p>
+        </p:txBody>
+      </p:sp>
+      <p:sp>
+        <p:nvSpPr>
+          <p:cNvPr id="7" name="Shape 5"/>
+          <p:cNvSpPr/>
+          <p:nvPr/>
+        </p:nvSpPr>
+        <p:spPr>
+          <a:xfrm>
+            <a:off x="365760" y="1234440"/>
+            <a:ext cx="2743200" cy="3017520"/>
+          </a:xfrm>
+          <a:prstGeom prst="rect">
+            <a:avLst/>
+          </a:prstGeom>
+          <a:solidFill>
+            <a:srgbClr val="FFFFFF"/>
+          </a:solidFill>
+          <a:ln/>
+          <a:effectLst>
+            <a:outerShdw blurRad="76200" dist="25400" dir="8100000" algn="bl" rotWithShape="0">
+              <a:srgbClr val="000000">
+                <a:alpha val="10000"/>
+              </a:srgbClr>
+            </a:outerShdw>
+          </a:effectLst>
+        </p:spPr>
+      </p:sp>
+      <p:sp>
+        <p:nvSpPr>
+          <p:cNvPr id="8" name="Shape 6"/>
+          <p:cNvSpPr/>
+          <p:nvPr/>
+        </p:nvSpPr>
+        <p:spPr>
+          <a:xfrm>
+            <a:off x="365760" y="1234440"/>
+            <a:ext cx="2743200" cy="91440"/>
+          </a:xfrm>
+          <a:prstGeom prst="rect">
+            <a:avLst/>
+          </a:prstGeom>
+          <a:solidFill>
+            <a:srgbClr val="00E47C"/>
+          </a:solidFill>
+          <a:ln/>
+        </p:spPr>
+      </p:sp>
+      <p:sp>
+        <p:nvSpPr>
+          <p:cNvPr id="9" name="Text 7"/>
+          <p:cNvSpPr/>
+          <p:nvPr/>
+        </p:nvSpPr>
+        <p:spPr>
+          <a:xfrm>
+            <a:off x="502920" y="1371600"/>
+            <a:ext cx="457200" cy="457200"/>
+          </a:xfrm>
+          <a:prstGeom prst="rect">
+            <a:avLst/>
+          </a:prstGeom>
+          <a:noFill/>
+          <a:ln/>
+        </p:spPr>
+        <p:txBody>
+          <a:bodyPr wrap="square" lIns="0" tIns="0" rIns="0" bIns="0" rtlCol="0" anchor="ctr"/>
+          <a:lstStyle/>
+          <a:p>
+            <a:pPr marL="0" indent="0" algn="l">
+              <a:buNone/>
+            </a:pPr>
+            <a:r>
+              <a:rPr lang="en-US" sz="2200" dirty="0">
+                <a:solidFill>
+                  <a:srgbClr val="000000"/>
+                </a:solidFill>
+              </a:rPr>
+              <a:t>🔔</a:t>
+            </a:r>
+            <a:endParaRPr lang="en-US" sz="2200" dirty="0"/>
+          </a:p>
+        </p:txBody>
+      </p:sp>
+      <p:sp>
+        <p:nvSpPr>
+          <p:cNvPr id="10" name="Text 8"/>
+          <p:cNvSpPr/>
+          <p:nvPr/>
+        </p:nvSpPr>
+        <p:spPr>
+          <a:xfrm>
+            <a:off x="914400" y="1371600"/>
+            <a:ext cx="2057400" cy="274320"/>
+          </a:xfrm>
+          <a:prstGeom prst="rect">
+            <a:avLst/>
+          </a:prstGeom>
+          <a:noFill/>
+          <a:ln/>
+        </p:spPr>
+        <p:txBody>
+          <a:bodyPr wrap="square" lIns="0" tIns="0" rIns="0" bIns="0" rtlCol="0" anchor="ctr"/>
+          <a:lstStyle/>
+          <a:p>
+            <a:pPr marL="0" indent="0">
+              <a:buNone/>
+            </a:pPr>
+            <a:r>
+              <a:rPr lang="en-US" sz="1200" b="1" dirty="0">
+                <a:solidFill>
+                  <a:srgbClr val="08312A"/>
+                </a:solidFill>
+                <a:latin typeface="Arial" pitchFamily="34" charset="0"/>
+                <a:ea typeface="Arial" pitchFamily="34" charset="-122"/>
+                <a:cs typeface="Arial" pitchFamily="34" charset="-120"/>
+              </a:rPr>
+              <a:t>宠物驱虫提醒</a:t>
+            </a:r>
+            <a:endParaRPr lang="en-US" sz="1200" dirty="0"/>
+          </a:p>
+        </p:txBody>
+      </p:sp>
+      <p:sp>
+        <p:nvSpPr>
+          <p:cNvPr id="11" name="Text 9"/>
+          <p:cNvSpPr/>
+          <p:nvPr/>
+        </p:nvSpPr>
+        <p:spPr>
+          <a:xfrm>
+            <a:off x="914400" y="1627632"/>
+            <a:ext cx="2057400" cy="201168"/>
+          </a:xfrm>
+          <a:prstGeom prst="rect">
+            <a:avLst/>
+          </a:prstGeom>
+          <a:noFill/>
+          <a:ln/>
+        </p:spPr>
+        <p:txBody>
+          <a:bodyPr wrap="square" lIns="0" tIns="0" rIns="0" bIns="0" rtlCol="0" anchor="ctr"/>
+          <a:lstStyle/>
+          <a:p>
+            <a:pPr marL="0" indent="0">
+              <a:buNone/>
+            </a:pPr>
+            <a:r>
+              <a:rPr lang="en-US" sz="800" i="1" dirty="0">
+                <a:solidFill>
+                  <a:srgbClr val="898885"/>
+                </a:solidFill>
+                <a:latin typeface="Arial" pitchFamily="34" charset="0"/>
+                <a:ea typeface="Arial" pitchFamily="34" charset="-122"/>
+                <a:cs typeface="Arial" pitchFamily="34" charset="-120"/>
+              </a:rPr>
+              <a:t>Deworming Reminder Tool</a:t>
+            </a:r>
+            <a:endParaRPr lang="en-US" sz="800" dirty="0"/>
+          </a:p>
+        </p:txBody>
+      </p:sp>
+      <p:sp>
+        <p:nvSpPr>
+          <p:cNvPr id="12" name="Shape 10"/>
+          <p:cNvSpPr/>
+          <p:nvPr/>
+        </p:nvSpPr>
+        <p:spPr>
+          <a:xfrm>
+            <a:off x="502920" y="1901952"/>
+            <a:ext cx="2468880" cy="18288"/>
+          </a:xfrm>
+          <a:prstGeom prst="rect">
+            <a:avLst/>
+          </a:prstGeom>
+          <a:solidFill>
+            <a:srgbClr val="DDDDDD"/>
+          </a:solidFill>
+          <a:ln/>
+        </p:spPr>
+      </p:sp>
+      <p:sp>
+        <p:nvSpPr>
+          <p:cNvPr id="13" name="Text 11"/>
+          <p:cNvSpPr/>
+          <p:nvPr/>
+        </p:nvSpPr>
+        <p:spPr>
+          <a:xfrm>
+            <a:off x="502920" y="1965960"/>
+            <a:ext cx="2468880" cy="2148840"/>
+          </a:xfrm>
+          <a:prstGeom prst="rect">
+            <a:avLst/>
+          </a:prstGeom>
+          <a:noFill/>
+          <a:ln/>
+        </p:spPr>
+        <p:txBody>
+          <a:bodyPr wrap="square" lIns="0" tIns="0" rIns="0" bIns="0" rtlCol="0" anchor="ctr"/>
+          <a:lstStyle/>
+          <a:p>
+            <a:pPr marL="342900" indent="-342900">
+              <a:spcAft>
+                <a:spcPts val="400"/>
+              </a:spcAft>
+              <a:buSzPct val="100000"/>
+              <a:buChar char="•"/>
+            </a:pPr>
+            <a:r>
+              <a:rPr lang="en-US" sz="950" dirty="0">
+                <a:solidFill>
+                  <a:srgbClr val="2E2D2C"/>
+                </a:solidFill>
+                <a:latin typeface="Arial" pitchFamily="34" charset="0"/>
+                <a:ea typeface="Arial" pitchFamily="34" charset="-122"/>
+                <a:cs typeface="Arial" pitchFamily="34" charset="-120"/>
+              </a:rPr>
+              <a:t>蚊子/蜱虫季节主动推送提醒</a:t>
+            </a:r>
+            <a:endParaRPr lang="en-US" sz="950" dirty="0"/>
+          </a:p>
+          <a:p>
+            <a:pPr marL="342900" indent="-342900">
+              <a:spcAft>
+                <a:spcPts val="400"/>
+              </a:spcAft>
+              <a:buSzPct val="100000"/>
+              <a:buChar char="•"/>
+            </a:pPr>
+            <a:r>
+              <a:rPr lang="en-US" sz="950" dirty="0">
+                <a:solidFill>
+                  <a:srgbClr val="2E2D2C"/>
+                </a:solidFill>
+                <a:latin typeface="Arial" pitchFamily="34" charset="0"/>
+                <a:ea typeface="Arial" pitchFamily="34" charset="-122"/>
+                <a:cs typeface="Arial" pitchFamily="34" charset="-120"/>
+              </a:rPr>
+              <a:t>用药周期提醒（每月/每3月）</a:t>
+            </a:r>
+            <a:endParaRPr lang="en-US" sz="950" dirty="0"/>
+          </a:p>
+          <a:p>
+            <a:pPr marL="342900" indent="-342900">
+              <a:spcAft>
+                <a:spcPts val="400"/>
+              </a:spcAft>
+              <a:buSzPct val="100000"/>
+              <a:buChar char="•"/>
+            </a:pPr>
+            <a:r>
+              <a:rPr lang="en-US" sz="950" dirty="0">
+                <a:solidFill>
+                  <a:srgbClr val="2E2D2C"/>
+                </a:solidFill>
+                <a:latin typeface="Arial" pitchFamily="34" charset="0"/>
+                <a:ea typeface="Arial" pitchFamily="34" charset="-122"/>
+                <a:cs typeface="Arial" pitchFamily="34" charset="-120"/>
+              </a:rPr>
+              <a:t>复购提醒 + 京东/天猫直达购买</a:t>
+            </a:r>
+            <a:endParaRPr lang="en-US" sz="950" dirty="0"/>
+          </a:p>
+          <a:p>
+            <a:pPr marL="342900" indent="-342900">
+              <a:spcAft>
+                <a:spcPts val="400"/>
+              </a:spcAft>
+              <a:buSzPct val="100000"/>
+              <a:buChar char="•"/>
+            </a:pPr>
+            <a:r>
+              <a:rPr lang="en-US" sz="950" dirty="0">
+                <a:solidFill>
+                  <a:srgbClr val="2E2D2C"/>
+                </a:solidFill>
+                <a:latin typeface="Arial" pitchFamily="34" charset="0"/>
+                <a:ea typeface="Arial" pitchFamily="34" charset="-122"/>
+                <a:cs typeface="Arial" pitchFamily="34" charset="-120"/>
+              </a:rPr>
+              <a:t>疫苗+驱虫联合提醒</a:t>
+            </a:r>
+            <a:endParaRPr lang="en-US" sz="950" dirty="0"/>
+          </a:p>
+        </p:txBody>
+      </p:sp>
+      <p:sp>
+        <p:nvSpPr>
+          <p:cNvPr id="14" name="Shape 12"/>
+          <p:cNvSpPr/>
+          <p:nvPr/>
+        </p:nvSpPr>
+        <p:spPr>
+          <a:xfrm>
+            <a:off x="3246120" y="1234440"/>
+            <a:ext cx="2743200" cy="3017520"/>
+          </a:xfrm>
+          <a:prstGeom prst="rect">
+            <a:avLst/>
+          </a:prstGeom>
+          <a:solidFill>
+            <a:srgbClr val="FFFFFF"/>
+          </a:solidFill>
+          <a:ln/>
+          <a:effectLst>
+            <a:outerShdw blurRad="76200" dist="25400" dir="8100000" algn="bl" rotWithShape="0">
+              <a:srgbClr val="000000">
+                <a:alpha val="10000"/>
+              </a:srgbClr>
+            </a:outerShdw>
+          </a:effectLst>
+        </p:spPr>
+      </p:sp>
+      <p:sp>
+        <p:nvSpPr>
+          <p:cNvPr id="15" name="Shape 13"/>
+          <p:cNvSpPr/>
+          <p:nvPr/>
+        </p:nvSpPr>
+        <p:spPr>
+          <a:xfrm>
+            <a:off x="3246120" y="1234440"/>
+            <a:ext cx="2743200" cy="91440"/>
+          </a:xfrm>
+          <a:prstGeom prst="rect">
+            <a:avLst/>
+          </a:prstGeom>
+          <a:solidFill>
+            <a:srgbClr val="A3E5EE"/>
+          </a:solidFill>
+          <a:ln/>
+        </p:spPr>
+      </p:sp>
+      <p:sp>
+        <p:nvSpPr>
+          <p:cNvPr id="16" name="Text 14"/>
+          <p:cNvSpPr/>
+          <p:nvPr/>
+        </p:nvSpPr>
+        <p:spPr>
+          <a:xfrm>
+            <a:off x="3383280" y="1371600"/>
+            <a:ext cx="457200" cy="457200"/>
+          </a:xfrm>
+          <a:prstGeom prst="rect">
+            <a:avLst/>
+          </a:prstGeom>
+          <a:noFill/>
+          <a:ln/>
+        </p:spPr>
+        <p:txBody>
+          <a:bodyPr wrap="square" lIns="0" tIns="0" rIns="0" bIns="0" rtlCol="0" anchor="ctr"/>
+          <a:lstStyle/>
+          <a:p>
+            <a:pPr marL="0" indent="0" algn="l">
+              <a:buNone/>
+            </a:pPr>
+            <a:r>
+              <a:rPr lang="en-US" sz="2200" dirty="0">
+                <a:solidFill>
+                  <a:srgbClr val="000000"/>
+                </a:solidFill>
+              </a:rPr>
+              <a:t>❓</a:t>
+            </a:r>
+            <a:endParaRPr lang="en-US" sz="2200" dirty="0"/>
+          </a:p>
+        </p:txBody>
+      </p:sp>
+      <p:sp>
+        <p:nvSpPr>
+          <p:cNvPr id="17" name="Text 15"/>
+          <p:cNvSpPr/>
+          <p:nvPr/>
+        </p:nvSpPr>
+        <p:spPr>
+          <a:xfrm>
+            <a:off x="3794760" y="1371600"/>
+            <a:ext cx="2057400" cy="274320"/>
+          </a:xfrm>
+          <a:prstGeom prst="rect">
+            <a:avLst/>
+          </a:prstGeom>
+          <a:noFill/>
+          <a:ln/>
+        </p:spPr>
+        <p:txBody>
+          <a:bodyPr wrap="square" lIns="0" tIns="0" rIns="0" bIns="0" rtlCol="0" anchor="ctr"/>
+          <a:lstStyle/>
+          <a:p>
+            <a:pPr marL="0" indent="0">
+              <a:buNone/>
+            </a:pPr>
+            <a:r>
+              <a:rPr lang="en-US" sz="1200" b="1" dirty="0">
+                <a:solidFill>
+                  <a:srgbClr val="08312A"/>
+                </a:solidFill>
+                <a:latin typeface="Arial" pitchFamily="34" charset="0"/>
+                <a:ea typeface="Arial" pitchFamily="34" charset="-122"/>
+                <a:cs typeface="Arial" pitchFamily="34" charset="-120"/>
+              </a:rPr>
+              <a:t>驱虫知识问答</a:t>
+            </a:r>
+            <a:endParaRPr lang="en-US" sz="1200" dirty="0"/>
+          </a:p>
+        </p:txBody>
+      </p:sp>
+      <p:sp>
+        <p:nvSpPr>
+          <p:cNvPr id="18" name="Text 16"/>
+          <p:cNvSpPr/>
+          <p:nvPr/>
+        </p:nvSpPr>
+        <p:spPr>
+          <a:xfrm>
+            <a:off x="3794760" y="1627632"/>
+            <a:ext cx="2057400" cy="201168"/>
+          </a:xfrm>
+          <a:prstGeom prst="rect">
+            <a:avLst/>
+          </a:prstGeom>
+          <a:noFill/>
+          <a:ln/>
+        </p:spPr>
+        <p:txBody>
+          <a:bodyPr wrap="square" lIns="0" tIns="0" rIns="0" bIns="0" rtlCol="0" anchor="ctr"/>
+          <a:lstStyle/>
+          <a:p>
+            <a:pPr marL="0" indent="0">
+              <a:buNone/>
+            </a:pPr>
+            <a:r>
+              <a:rPr lang="en-US" sz="800" i="1" dirty="0">
+                <a:solidFill>
+                  <a:srgbClr val="898885"/>
+                </a:solidFill>
+                <a:latin typeface="Arial" pitchFamily="34" charset="0"/>
+                <a:ea typeface="Arial" pitchFamily="34" charset="-122"/>
+                <a:cs typeface="Arial" pitchFamily="34" charset="-120"/>
+              </a:rPr>
+              <a:t>Parasite Q&amp;A Mini Program</a:t>
+            </a:r>
+            <a:endParaRPr lang="en-US" sz="800" dirty="0"/>
+          </a:p>
+        </p:txBody>
+      </p:sp>
+      <p:sp>
+        <p:nvSpPr>
+          <p:cNvPr id="19" name="Shape 17"/>
+          <p:cNvSpPr/>
+          <p:nvPr/>
+        </p:nvSpPr>
+        <p:spPr>
+          <a:xfrm>
+            <a:off x="3383280" y="1901952"/>
+            <a:ext cx="2468880" cy="18288"/>
+          </a:xfrm>
+          <a:prstGeom prst="rect">
+            <a:avLst/>
+          </a:prstGeom>
+          <a:solidFill>
+            <a:srgbClr val="DDDDDD"/>
+          </a:solidFill>
+          <a:ln/>
+        </p:spPr>
+      </p:sp>
+      <p:sp>
+        <p:nvSpPr>
+          <p:cNvPr id="20" name="Text 18"/>
+          <p:cNvSpPr/>
+          <p:nvPr/>
+        </p:nvSpPr>
+        <p:spPr>
+          <a:xfrm>
+            <a:off x="3383280" y="1965960"/>
+            <a:ext cx="2468880" cy="2148840"/>
+          </a:xfrm>
+          <a:prstGeom prst="rect">
+            <a:avLst/>
+          </a:prstGeom>
+          <a:noFill/>
+          <a:ln/>
+        </p:spPr>
+        <p:txBody>
+          <a:bodyPr wrap="square" lIns="0" tIns="0" rIns="0" bIns="0" rtlCol="0" anchor="ctr"/>
+          <a:lstStyle/>
+          <a:p>
+            <a:pPr marL="342900" indent="-342900">
+              <a:spcAft>
+                <a:spcPts val="400"/>
+              </a:spcAft>
+              <a:buSzPct val="100000"/>
+              <a:buChar char="•"/>
+            </a:pPr>
+            <a:r>
+              <a:rPr lang="en-US" sz="950" dirty="0">
+                <a:solidFill>
+                  <a:srgbClr val="2E2D2C"/>
+                </a:solidFill>
+                <a:latin typeface="Arial" pitchFamily="34" charset="0"/>
+                <a:ea typeface="Arial" pitchFamily="34" charset="-122"/>
+                <a:cs typeface="Arial" pitchFamily="34" charset="-120"/>
+              </a:rPr>
+              <a:t>AI宠物医生常见问答</a:t>
+            </a:r>
+            <a:endParaRPr lang="en-US" sz="950" dirty="0"/>
+          </a:p>
+          <a:p>
+            <a:pPr marL="342900" indent="-342900">
+              <a:spcAft>
+                <a:spcPts val="400"/>
+              </a:spcAft>
+              <a:buSzPct val="100000"/>
+              <a:buChar char="•"/>
+            </a:pPr>
+            <a:r>
+              <a:rPr lang="en-US" sz="950" dirty="0">
+                <a:solidFill>
+                  <a:srgbClr val="2E2D2C"/>
+                </a:solidFill>
+                <a:latin typeface="Arial" pitchFamily="34" charset="0"/>
+                <a:ea typeface="Arial" pitchFamily="34" charset="-122"/>
+                <a:cs typeface="Arial" pitchFamily="34" charset="-120"/>
+              </a:rPr>
+              <a:t>寄生虫百科（图鉴+危害）</a:t>
+            </a:r>
+            <a:endParaRPr lang="en-US" sz="950" dirty="0"/>
+          </a:p>
+          <a:p>
+            <a:pPr marL="342900" indent="-342900">
+              <a:spcAft>
+                <a:spcPts val="400"/>
+              </a:spcAft>
+              <a:buSzPct val="100000"/>
+              <a:buChar char="•"/>
+            </a:pPr>
+            <a:r>
+              <a:rPr lang="en-US" sz="950" dirty="0">
+                <a:solidFill>
+                  <a:srgbClr val="2E2D2C"/>
+                </a:solidFill>
+                <a:latin typeface="Arial" pitchFamily="34" charset="0"/>
+                <a:ea typeface="Arial" pitchFamily="34" charset="-122"/>
+                <a:cs typeface="Arial" pitchFamily="34" charset="-120"/>
+              </a:rPr>
+              <a:t>产品对比一键查询</a:t>
+            </a:r>
+            <a:endParaRPr lang="en-US" sz="950" dirty="0"/>
+          </a:p>
+          <a:p>
+            <a:pPr marL="342900" indent="-342900">
+              <a:spcAft>
+                <a:spcPts val="400"/>
+              </a:spcAft>
+              <a:buSzPct val="100000"/>
+              <a:buChar char="•"/>
+            </a:pPr>
+            <a:r>
+              <a:rPr lang="en-US" sz="950" dirty="0">
+                <a:solidFill>
+                  <a:srgbClr val="2E2D2C"/>
+                </a:solidFill>
+                <a:latin typeface="Arial" pitchFamily="34" charset="0"/>
+                <a:ea typeface="Arial" pitchFamily="34" charset="-122"/>
+                <a:cs typeface="Arial" pitchFamily="34" charset="-120"/>
+              </a:rPr>
+              <a:t>症状自检引导就医</a:t>
+            </a:r>
+            <a:endParaRPr lang="en-US" sz="950" dirty="0"/>
+          </a:p>
+        </p:txBody>
+      </p:sp>
+      <p:sp>
+        <p:nvSpPr>
+          <p:cNvPr id="21" name="Shape 19"/>
+          <p:cNvSpPr/>
+          <p:nvPr/>
+        </p:nvSpPr>
+        <p:spPr>
+          <a:xfrm>
+            <a:off x="6126480" y="1234440"/>
+            <a:ext cx="2743200" cy="3017520"/>
+          </a:xfrm>
+          <a:prstGeom prst="rect">
+            <a:avLst/>
+          </a:prstGeom>
+          <a:solidFill>
+            <a:srgbClr val="FFFFFF"/>
+          </a:solidFill>
+          <a:ln/>
+          <a:effectLst>
+            <a:outerShdw blurRad="76200" dist="25400" dir="8100000" algn="bl" rotWithShape="0">
+              <a:srgbClr val="000000">
+                <a:alpha val="10000"/>
+              </a:srgbClr>
+            </a:outerShdw>
+          </a:effectLst>
+        </p:spPr>
+      </p:sp>
+      <p:sp>
+        <p:nvSpPr>
+          <p:cNvPr id="22" name="Shape 20"/>
+          <p:cNvSpPr/>
+          <p:nvPr/>
+        </p:nvSpPr>
+        <p:spPr>
+          <a:xfrm>
+            <a:off x="6126480" y="1234440"/>
+            <a:ext cx="2743200" cy="91440"/>
+          </a:xfrm>
+          <a:prstGeom prst="rect">
+            <a:avLst/>
+          </a:prstGeom>
+          <a:solidFill>
+            <a:srgbClr val="F58A68"/>
+          </a:solidFill>
+          <a:ln/>
+        </p:spPr>
+      </p:sp>
+      <p:sp>
+        <p:nvSpPr>
+          <p:cNvPr id="23" name="Text 21"/>
+          <p:cNvSpPr/>
+          <p:nvPr/>
+        </p:nvSpPr>
+        <p:spPr>
+          <a:xfrm>
+            <a:off x="6263640" y="1371600"/>
+            <a:ext cx="457200" cy="457200"/>
+          </a:xfrm>
+          <a:prstGeom prst="rect">
+            <a:avLst/>
+          </a:prstGeom>
+          <a:noFill/>
+          <a:ln/>
+        </p:spPr>
+        <p:txBody>
+          <a:bodyPr wrap="square" lIns="0" tIns="0" rIns="0" bIns="0" rtlCol="0" anchor="ctr"/>
+          <a:lstStyle/>
+          <a:p>
+            <a:pPr marL="0" indent="0" algn="l">
+              <a:buNone/>
+            </a:pPr>
+            <a:r>
+              <a:rPr lang="en-US" sz="2200" dirty="0">
+                <a:solidFill>
+                  <a:srgbClr val="000000"/>
+                </a:solidFill>
+              </a:rPr>
+              <a:t>📊</a:t>
+            </a:r>
+            <a:endParaRPr lang="en-US" sz="2200" dirty="0"/>
+          </a:p>
+        </p:txBody>
+      </p:sp>
+      <p:sp>
+        <p:nvSpPr>
+          <p:cNvPr id="24" name="Text 22"/>
+          <p:cNvSpPr/>
+          <p:nvPr/>
+        </p:nvSpPr>
+        <p:spPr>
+          <a:xfrm>
+            <a:off x="6675120" y="1371600"/>
+            <a:ext cx="2057400" cy="274320"/>
+          </a:xfrm>
+          <a:prstGeom prst="rect">
+            <a:avLst/>
+          </a:prstGeom>
+          <a:noFill/>
+          <a:ln/>
+        </p:spPr>
+        <p:txBody>
+          <a:bodyPr wrap="square" lIns="0" tIns="0" rIns="0" bIns="0" rtlCol="0" anchor="ctr"/>
+          <a:lstStyle/>
+          <a:p>
+            <a:pPr marL="0" indent="0">
+              <a:buNone/>
+            </a:pPr>
+            <a:r>
+              <a:rPr lang="en-US" sz="1200" b="1" dirty="0">
+                <a:solidFill>
+                  <a:srgbClr val="08312A"/>
+                </a:solidFill>
+                <a:latin typeface="Arial" pitchFamily="34" charset="0"/>
+                <a:ea typeface="Arial" pitchFamily="34" charset="-122"/>
+                <a:cs typeface="Arial" pitchFamily="34" charset="-120"/>
+              </a:rPr>
+              <a:t>宠物健康档案</a:t>
+            </a:r>
+            <a:endParaRPr lang="en-US" sz="1200" dirty="0"/>
+          </a:p>
+        </p:txBody>
+      </p:sp>
+      <p:sp>
+        <p:nvSpPr>
+          <p:cNvPr id="25" name="Text 23"/>
+          <p:cNvSpPr/>
+          <p:nvPr/>
+        </p:nvSpPr>
+        <p:spPr>
+          <a:xfrm>
+            <a:off x="6675120" y="1627632"/>
+            <a:ext cx="2057400" cy="201168"/>
+          </a:xfrm>
+          <a:prstGeom prst="rect">
+            <a:avLst/>
+          </a:prstGeom>
+          <a:noFill/>
+          <a:ln/>
+        </p:spPr>
+        <p:txBody>
+          <a:bodyPr wrap="square" lIns="0" tIns="0" rIns="0" bIns="0" rtlCol="0" anchor="ctr"/>
+          <a:lstStyle/>
+          <a:p>
+            <a:pPr marL="0" indent="0">
+              <a:buNone/>
+            </a:pPr>
+            <a:r>
+              <a:rPr lang="en-US" sz="800" i="1" dirty="0">
+                <a:solidFill>
+                  <a:srgbClr val="898885"/>
+                </a:solidFill>
+                <a:latin typeface="Arial" pitchFamily="34" charset="0"/>
+                <a:ea typeface="Arial" pitchFamily="34" charset="-122"/>
+                <a:cs typeface="Arial" pitchFamily="34" charset="-120"/>
+              </a:rPr>
+              <a:t>Pet Health Profile</a:t>
+            </a:r>
+            <a:endParaRPr lang="en-US" sz="800" dirty="0"/>
+          </a:p>
+        </p:txBody>
+      </p:sp>
+      <p:sp>
+        <p:nvSpPr>
+          <p:cNvPr id="26" name="Shape 24"/>
+          <p:cNvSpPr/>
+          <p:nvPr/>
+        </p:nvSpPr>
+        <p:spPr>
+          <a:xfrm>
+            <a:off x="6263640" y="1901952"/>
+            <a:ext cx="2468880" cy="18288"/>
+          </a:xfrm>
+          <a:prstGeom prst="rect">
+            <a:avLst/>
+          </a:prstGeom>
+          <a:solidFill>
+            <a:srgbClr val="DDDDDD"/>
+          </a:solidFill>
+          <a:ln/>
+        </p:spPr>
+      </p:sp>
+      <p:sp>
+        <p:nvSpPr>
+          <p:cNvPr id="27" name="Text 25"/>
+          <p:cNvSpPr/>
+          <p:nvPr/>
+        </p:nvSpPr>
+        <p:spPr>
+          <a:xfrm>
+            <a:off x="6263640" y="1965960"/>
+            <a:ext cx="2468880" cy="2148840"/>
+          </a:xfrm>
+          <a:prstGeom prst="rect">
+            <a:avLst/>
+          </a:prstGeom>
+          <a:noFill/>
+          <a:ln/>
+        </p:spPr>
+        <p:txBody>
+          <a:bodyPr wrap="square" lIns="0" tIns="0" rIns="0" bIns="0" rtlCol="0" anchor="ctr"/>
+          <a:lstStyle/>
+          <a:p>
+            <a:pPr marL="342900" indent="-342900">
+              <a:spcAft>
+                <a:spcPts val="400"/>
+              </a:spcAft>
+              <a:buSzPct val="100000"/>
+              <a:buChar char="•"/>
+            </a:pPr>
+            <a:r>
+              <a:rPr lang="en-US" sz="950" dirty="0">
+                <a:solidFill>
+                  <a:srgbClr val="2E2D2C"/>
+                </a:solidFill>
+                <a:latin typeface="Arial" pitchFamily="34" charset="0"/>
+                <a:ea typeface="Arial" pitchFamily="34" charset="-122"/>
+                <a:cs typeface="Arial" pitchFamily="34" charset="-120"/>
+              </a:rPr>
+              <a:t>宠物基本信息录入</a:t>
+            </a:r>
+            <a:endParaRPr lang="en-US" sz="950" dirty="0"/>
+          </a:p>
+          <a:p>
+            <a:pPr marL="342900" indent="-342900">
+              <a:spcAft>
+                <a:spcPts val="400"/>
+              </a:spcAft>
+              <a:buSzPct val="100000"/>
+              <a:buChar char="•"/>
+            </a:pPr>
+            <a:r>
+              <a:rPr lang="en-US" sz="950" dirty="0">
+                <a:solidFill>
+                  <a:srgbClr val="2E2D2C"/>
+                </a:solidFill>
+                <a:latin typeface="Arial" pitchFamily="34" charset="0"/>
+                <a:ea typeface="Arial" pitchFamily="34" charset="-122"/>
+                <a:cs typeface="Arial" pitchFamily="34" charset="-120"/>
+              </a:rPr>
+              <a:t>用药记录历史追踪</a:t>
+            </a:r>
+            <a:endParaRPr lang="en-US" sz="950" dirty="0"/>
+          </a:p>
+          <a:p>
+            <a:pPr marL="342900" indent="-342900">
+              <a:spcAft>
+                <a:spcPts val="400"/>
+              </a:spcAft>
+              <a:buSzPct val="100000"/>
+              <a:buChar char="•"/>
+            </a:pPr>
+            <a:r>
+              <a:rPr lang="en-US" sz="950" dirty="0">
+                <a:solidFill>
+                  <a:srgbClr val="2E2D2C"/>
+                </a:solidFill>
+                <a:latin typeface="Arial" pitchFamily="34" charset="0"/>
+                <a:ea typeface="Arial" pitchFamily="34" charset="-122"/>
+                <a:cs typeface="Arial" pitchFamily="34" charset="-120"/>
+              </a:rPr>
+              <a:t>一键预约宠物医院</a:t>
+            </a:r>
+            <a:endParaRPr lang="en-US" sz="950" dirty="0"/>
+          </a:p>
+          <a:p>
+            <a:pPr marL="342900" indent="-342900">
+              <a:spcAft>
+                <a:spcPts val="400"/>
+              </a:spcAft>
+              <a:buSzPct val="100000"/>
+              <a:buChar char="•"/>
+            </a:pPr>
+            <a:r>
+              <a:rPr lang="en-US" sz="950" dirty="0">
+                <a:solidFill>
+                  <a:srgbClr val="2E2D2C"/>
+                </a:solidFill>
+                <a:latin typeface="Arial" pitchFamily="34" charset="0"/>
+                <a:ea typeface="Arial" pitchFamily="34" charset="-122"/>
+                <a:cs typeface="Arial" pitchFamily="34" charset="-120"/>
+              </a:rPr>
+              <a:t>获取用户画像数据</a:t>
+            </a:r>
+            <a:endParaRPr lang="en-US" sz="950" dirty="0"/>
+          </a:p>
+        </p:txBody>
+      </p:sp>
+      <p:sp>
+        <p:nvSpPr>
+          <p:cNvPr id="28" name="Shape 26"/>
+          <p:cNvSpPr/>
+          <p:nvPr/>
+        </p:nvSpPr>
+        <p:spPr>
+          <a:xfrm>
+            <a:off x="365760" y="4370832"/>
+            <a:ext cx="8412480" cy="594360"/>
+          </a:xfrm>
+          <a:prstGeom prst="rect">
+            <a:avLst/>
+          </a:prstGeom>
+          <a:solidFill>
+            <a:srgbClr val="08312A"/>
+          </a:solidFill>
+          <a:ln/>
+          <a:effectLst>
+            <a:outerShdw blurRad="76200" dist="25400" dir="8100000" algn="bl" rotWithShape="0">
+              <a:srgbClr val="000000">
+                <a:alpha val="10000"/>
+              </a:srgbClr>
+            </a:outerShdw>
+          </a:effectLst>
+        </p:spPr>
+      </p:sp>
+      <p:sp>
+        <p:nvSpPr>
+          <p:cNvPr id="29" name="Shape 27"/>
+          <p:cNvSpPr/>
+          <p:nvPr/>
+        </p:nvSpPr>
+        <p:spPr>
+          <a:xfrm>
+            <a:off x="365760" y="4370832"/>
+            <a:ext cx="73152" cy="594360"/>
+          </a:xfrm>
+          <a:prstGeom prst="rect">
+            <a:avLst/>
+          </a:prstGeom>
+          <a:solidFill>
+            <a:srgbClr val="00E47C"/>
+          </a:solidFill>
+          <a:ln/>
+        </p:spPr>
+      </p:sp>
+      <p:sp>
+        <p:nvSpPr>
+          <p:cNvPr id="30" name="Text 28"/>
+          <p:cNvSpPr/>
+          <p:nvPr/>
+        </p:nvSpPr>
+        <p:spPr>
+          <a:xfrm>
+            <a:off x="548640" y="4370832"/>
+            <a:ext cx="8046720" cy="594360"/>
+          </a:xfrm>
+          <a:prstGeom prst="rect">
+            <a:avLst/>
+          </a:prstGeom>
+          <a:noFill/>
+          <a:ln/>
+        </p:spPr>
+        <p:txBody>
+          <a:bodyPr wrap="square" lIns="0" tIns="0" rIns="0" bIns="0" rtlCol="0" anchor="ctr"/>
+          <a:lstStyle/>
+          <a:p>
+            <a:pPr marL="0" indent="0">
+              <a:buNone/>
+            </a:pPr>
+            <a:r>
+              <a:rPr lang="en-US" sz="1050" dirty="0">
+                <a:solidFill>
+                  <a:srgbClr val="FFFFFF"/>
+                </a:solidFill>
+                <a:latin typeface="Arial" pitchFamily="34" charset="0"/>
+                <a:ea typeface="Arial" pitchFamily="34" charset="-122"/>
+                <a:cs typeface="Arial" pitchFamily="34" charset="-120"/>
+              </a:rPr>
+              <a:t>💡 核心价值：三大小程序形成「提醒—科普—档案」服务闭环，竞品微信生态几乎空白，BI可率先建立宠物主人数据资产</a:t>
+            </a:r>
+            <a:endParaRPr lang="en-US" sz="1050" dirty="0"/>
+          </a:p>
+        </p:txBody>
+      </p:sp>
+      <p:sp>
+        <p:nvSpPr>
+          <p:cNvPr id="31" name="Shape 29"/>
+          <p:cNvSpPr/>
+          <p:nvPr/>
+        </p:nvSpPr>
+        <p:spPr>
+          <a:xfrm>
+            <a:off x="0" y="4800600"/>
+            <a:ext cx="9144000" cy="342900"/>
+          </a:xfrm>
+          <a:prstGeom prst="rect">
+            <a:avLst/>
+          </a:prstGeom>
+          <a:solidFill>
+            <a:srgbClr val="08312A"/>
+          </a:solidFill>
+          <a:ln/>
+        </p:spPr>
+      </p:sp>
+      <p:sp>
+        <p:nvSpPr>
+          <p:cNvPr id="32" name="Text 30"/>
+          <p:cNvSpPr/>
+          <p:nvPr/>
+        </p:nvSpPr>
+        <p:spPr>
+          <a:xfrm>
+            <a:off x="365760" y="4800600"/>
+            <a:ext cx="8412480" cy="342900"/>
+          </a:xfrm>
+          <a:prstGeom prst="rect">
+            <a:avLst/>
+          </a:prstGeom>
+          <a:noFill/>
+          <a:ln/>
+        </p:spPr>
+        <p:txBody>
+          <a:bodyPr wrap="square" lIns="0" tIns="0" rIns="0" bIns="0" rtlCol="0" anchor="ctr"/>
+          <a:lstStyle/>
+          <a:p>
+            <a:pPr marL="0" indent="0">
+              <a:buNone/>
+            </a:pPr>
+            <a:r>
+              <a:rPr lang="en-US" sz="800" dirty="0">
+                <a:solidFill>
+                  <a:srgbClr val="898885"/>
+                </a:solidFill>
+                <a:latin typeface="Arial" pitchFamily="34" charset="0"/>
+                <a:ea typeface="Arial" pitchFamily="34" charset="-122"/>
+                <a:cs typeface="Arial" pitchFamily="34" charset="-120"/>
+              </a:rPr>
+              <a:t>INTERNAL USE ONLY  |  勃林格殷格翰中国宠物团队</a:t>
+            </a:r>
+            <a:endParaRPr lang="en-US" sz="800" dirty="0"/>
+          </a:p>
+        </p:txBody>
+      </p:sp>
+    </p:spTree>
+  </p:cSld>
+  <p:clrMapOvr>
+    <a:masterClrMapping/>
+  </p:clrMapOvr>
+</p:sld>
+</file>
+
+<file path=ppt/slides/slide13.xml><?xml version="1.0" encoding="utf-8"?>
 <p:sld xmlns:a="http://schemas.openxmlformats.org/drawingml/2006/main" xmlns:r="http://schemas.openxmlformats.org/officeDocument/2006/relationships" xmlns:p="http://schemas.openxmlformats.org/presentationml/2006/main">
   <p:cSld name="Slide 12">
     <p:bg>
@@ -6413,6 +10508,1535 @@
 
 <file path=ppt/slides/slide3.xml><?xml version="1.0" encoding="utf-8"?>
 <p:sld xmlns:a="http://schemas.openxmlformats.org/drawingml/2006/main" xmlns:r="http://schemas.openxmlformats.org/officeDocument/2006/relationships" xmlns:p="http://schemas.openxmlformats.org/presentationml/2006/main">
+  <p:cSld>
+    <p:spTree>
+      <p:nvGrpSpPr>
+        <p:cNvPr id="1" name=""/>
+        <p:cNvGrpSpPr/>
+        <p:nvPr/>
+      </p:nvGrpSpPr>
+      <p:grpSpPr>
+        <a:xfrm>
+          <a:off x="0" y="0"/>
+          <a:ext cx="0" cy="0"/>
+          <a:chOff x="0" y="0"/>
+          <a:chExt cx="0" cy="0"/>
+        </a:xfrm>
+      </p:grpSpPr>
+      <p:sp>
+        <p:nvSpPr>
+          <p:cNvPr id="2" name="Shape 0"/>
+          <p:cNvSpPr/>
+          <p:nvPr/>
+        </p:nvSpPr>
+        <p:spPr>
+          <a:xfrm>
+            <a:off x="0" y="0"/>
+            <a:ext cx="9144000" cy="685800"/>
+          </a:xfrm>
+          <a:prstGeom prst="rect">
+            <a:avLst/>
+          </a:prstGeom>
+          <a:solidFill>
+            <a:srgbClr val="08312A"/>
+          </a:solidFill>
+          <a:ln/>
+        </p:spPr>
+      </p:sp>
+      <p:sp>
+        <p:nvSpPr>
+          <p:cNvPr id="3" name="Shape 1"/>
+          <p:cNvSpPr/>
+          <p:nvPr/>
+        </p:nvSpPr>
+        <p:spPr>
+          <a:xfrm>
+            <a:off x="0" y="0"/>
+            <a:ext cx="9144000" cy="73152"/>
+          </a:xfrm>
+          <a:prstGeom prst="rect">
+            <a:avLst/>
+          </a:prstGeom>
+          <a:solidFill>
+            <a:srgbClr val="00E47C"/>
+          </a:solidFill>
+          <a:ln/>
+        </p:spPr>
+      </p:sp>
+      <p:sp>
+        <p:nvSpPr>
+          <p:cNvPr id="4" name="Text 2"/>
+          <p:cNvSpPr/>
+          <p:nvPr/>
+        </p:nvSpPr>
+        <p:spPr>
+          <a:xfrm>
+            <a:off x="365760" y="0"/>
+            <a:ext cx="8412480" cy="685800"/>
+          </a:xfrm>
+          <a:prstGeom prst="rect">
+            <a:avLst/>
+          </a:prstGeom>
+          <a:noFill/>
+          <a:ln/>
+        </p:spPr>
+        <p:txBody>
+          <a:bodyPr wrap="square" lIns="0" tIns="0" rIns="0" bIns="0" rtlCol="0" anchor="ctr"/>
+          <a:lstStyle/>
+          <a:p>
+            <a:pPr marL="0" indent="0">
+              <a:buNone/>
+            </a:pPr>
+            <a:r>
+              <a:rPr lang="en-US" sz="1600" b="1" dirty="0">
+                <a:solidFill>
+                  <a:srgbClr val="FFFFFF"/>
+                </a:solidFill>
+                <a:latin typeface="Arial" pitchFamily="34" charset="0"/>
+                <a:ea typeface="Arial" pitchFamily="34" charset="-122"/>
+                <a:cs typeface="Arial" pitchFamily="34" charset="-120"/>
+              </a:rPr>
+              <a:t>竞品分析：硕腾 Zoetis 驱虫药 | Zoetis Dewormer Portfolio ⭐ W21更新</a:t>
+            </a:r>
+            <a:endParaRPr lang="en-US" sz="1600" dirty="0"/>
+          </a:p>
+        </p:txBody>
+      </p:sp>
+      <p:sp>
+        <p:nvSpPr>
+          <p:cNvPr id="5" name="Shape 3"/>
+          <p:cNvSpPr/>
+          <p:nvPr/>
+        </p:nvSpPr>
+        <p:spPr>
+          <a:xfrm>
+            <a:off x="365760" y="804672"/>
+            <a:ext cx="8412480" cy="438912"/>
+          </a:xfrm>
+          <a:prstGeom prst="rect">
+            <a:avLst/>
+          </a:prstGeom>
+          <a:solidFill>
+            <a:srgbClr val="FFEEEE"/>
+          </a:solidFill>
+          <a:ln/>
+          <a:effectLst>
+            <a:outerShdw blurRad="63500" dist="25400" dir="8100000" algn="bl" rotWithShape="0">
+              <a:srgbClr val="000000">
+                <a:alpha val="10000"/>
+              </a:srgbClr>
+            </a:outerShdw>
+          </a:effectLst>
+        </p:spPr>
+      </p:sp>
+      <p:sp>
+        <p:nvSpPr>
+          <p:cNvPr id="6" name="Shape 4"/>
+          <p:cNvSpPr/>
+          <p:nvPr/>
+        </p:nvSpPr>
+        <p:spPr>
+          <a:xfrm>
+            <a:off x="365760" y="804672"/>
+            <a:ext cx="73152" cy="438912"/>
+          </a:xfrm>
+          <a:prstGeom prst="rect">
+            <a:avLst/>
+          </a:prstGeom>
+          <a:solidFill>
+            <a:srgbClr val="CC0000"/>
+          </a:solidFill>
+          <a:ln/>
+        </p:spPr>
+      </p:sp>
+      <p:sp>
+        <p:nvSpPr>
+          <p:cNvPr id="7" name="Text 5"/>
+          <p:cNvSpPr/>
+          <p:nvPr/>
+        </p:nvSpPr>
+        <p:spPr>
+          <a:xfrm>
+            <a:off x="548640" y="804672"/>
+            <a:ext cx="8046720" cy="438912"/>
+          </a:xfrm>
+          <a:prstGeom prst="rect">
+            <a:avLst/>
+          </a:prstGeom>
+          <a:noFill/>
+          <a:ln/>
+        </p:spPr>
+        <p:txBody>
+          <a:bodyPr wrap="square" lIns="0" tIns="0" rIns="0" bIns="0" rtlCol="0" anchor="ctr"/>
+          <a:lstStyle/>
+          <a:p>
+            <a:pPr marL="0" indent="0">
+              <a:buNone/>
+            </a:pPr>
+            <a:r>
+              <a:rPr lang="en-US" sz="1000" b="1" dirty="0">
+                <a:solidFill>
+                  <a:srgbClr val="CC0000"/>
+                </a:solidFill>
+                <a:latin typeface="Arial" pitchFamily="34" charset="0"/>
+                <a:ea typeface="Arial" pitchFamily="34" charset="-122"/>
+                <a:cs typeface="Arial" pitchFamily="34" charset="-120"/>
+              </a:rPr>
+              <a:t>🚨 W21重大事件：5月7日 Zoetis下调2026年利润预测（宠物主削减开支、减少就诊），股价当日暴跌约21%</a:t>
+            </a:r>
+            <a:endParaRPr lang="en-US" sz="1000" dirty="0"/>
+          </a:p>
+        </p:txBody>
+      </p:sp>
+      <p:sp>
+        <p:nvSpPr>
+          <p:cNvPr id="8" name="Shape 6"/>
+          <p:cNvSpPr/>
+          <p:nvPr/>
+        </p:nvSpPr>
+        <p:spPr>
+          <a:xfrm>
+            <a:off x="365760" y="1371600"/>
+            <a:ext cx="2651760" cy="777240"/>
+          </a:xfrm>
+          <a:prstGeom prst="rect">
+            <a:avLst/>
+          </a:prstGeom>
+          <a:solidFill>
+            <a:srgbClr val="08312A"/>
+          </a:solidFill>
+          <a:ln/>
+          <a:effectLst>
+            <a:outerShdw blurRad="63500" dist="25400" dir="8100000" algn="bl" rotWithShape="0">
+              <a:srgbClr val="000000">
+                <a:alpha val="10000"/>
+              </a:srgbClr>
+            </a:outerShdw>
+          </a:effectLst>
+        </p:spPr>
+      </p:sp>
+      <p:sp>
+        <p:nvSpPr>
+          <p:cNvPr id="9" name="Text 7"/>
+          <p:cNvSpPr/>
+          <p:nvPr/>
+        </p:nvSpPr>
+        <p:spPr>
+          <a:xfrm>
+            <a:off x="502920" y="1408176"/>
+            <a:ext cx="2377440" cy="347472"/>
+          </a:xfrm>
+          <a:prstGeom prst="rect">
+            <a:avLst/>
+          </a:prstGeom>
+          <a:noFill/>
+          <a:ln/>
+        </p:spPr>
+        <p:txBody>
+          <a:bodyPr wrap="square" lIns="0" tIns="0" rIns="0" bIns="0" rtlCol="0" anchor="ctr"/>
+          <a:lstStyle/>
+          <a:p>
+            <a:pPr marL="0" indent="0">
+              <a:buNone/>
+            </a:pPr>
+            <a:r>
+              <a:rPr lang="en-US" sz="2000" b="1" dirty="0">
+                <a:solidFill>
+                  <a:srgbClr val="00E47C"/>
+                </a:solidFill>
+                <a:latin typeface="Arial" pitchFamily="34" charset="0"/>
+                <a:ea typeface="Arial" pitchFamily="34" charset="-122"/>
+                <a:cs typeface="Arial" pitchFamily="34" charset="-120"/>
+              </a:rPr>
+              <a:t>~5,000亿</a:t>
+            </a:r>
+            <a:endParaRPr lang="en-US" sz="2000" dirty="0"/>
+          </a:p>
+        </p:txBody>
+      </p:sp>
+      <p:sp>
+        <p:nvSpPr>
+          <p:cNvPr id="10" name="Text 8"/>
+          <p:cNvSpPr/>
+          <p:nvPr/>
+        </p:nvSpPr>
+        <p:spPr>
+          <a:xfrm>
+            <a:off x="502920" y="1737360"/>
+            <a:ext cx="2377440" cy="347472"/>
+          </a:xfrm>
+          <a:prstGeom prst="rect">
+            <a:avLst/>
+          </a:prstGeom>
+          <a:noFill/>
+          <a:ln/>
+        </p:spPr>
+        <p:txBody>
+          <a:bodyPr wrap="square" lIns="0" tIns="0" rIns="0" bIns="0" rtlCol="0" anchor="ctr"/>
+          <a:lstStyle/>
+          <a:p>
+            <a:pPr marL="0" indent="0">
+              <a:buNone/>
+            </a:pPr>
+            <a:r>
+              <a:rPr lang="en-US" sz="900" dirty="0">
+                <a:solidFill>
+                  <a:srgbClr val="FFFFFF"/>
+                </a:solidFill>
+                <a:latin typeface="Arial" pitchFamily="34" charset="0"/>
+                <a:ea typeface="Arial" pitchFamily="34" charset="-122"/>
+                <a:cs typeface="Arial" pitchFamily="34" charset="-120"/>
+              </a:rPr>
+              <a:t>全球年营收</a:t>
+            </a:r>
+            <a:endParaRPr lang="en-US" sz="900" dirty="0"/>
+          </a:p>
+          <a:p>
+            <a:pPr marL="0" indent="0">
+              <a:buNone/>
+            </a:pPr>
+            <a:r>
+              <a:rPr lang="en-US" sz="900" dirty="0">
+                <a:solidFill>
+                  <a:srgbClr val="FFFFFF"/>
+                </a:solidFill>
+                <a:latin typeface="Arial" pitchFamily="34" charset="0"/>
+                <a:ea typeface="Arial" pitchFamily="34" charset="-122"/>
+                <a:cs typeface="Arial" pitchFamily="34" charset="-120"/>
+              </a:rPr>
+              <a:t>Annual Revenue</a:t>
+            </a:r>
+            <a:endParaRPr lang="en-US" sz="900" dirty="0"/>
+          </a:p>
+        </p:txBody>
+      </p:sp>
+      <p:sp>
+        <p:nvSpPr>
+          <p:cNvPr id="11" name="Shape 9"/>
+          <p:cNvSpPr/>
+          <p:nvPr/>
+        </p:nvSpPr>
+        <p:spPr>
+          <a:xfrm>
+            <a:off x="3200400" y="1371600"/>
+            <a:ext cx="2651760" cy="777240"/>
+          </a:xfrm>
+          <a:prstGeom prst="rect">
+            <a:avLst/>
+          </a:prstGeom>
+          <a:solidFill>
+            <a:srgbClr val="08312A"/>
+          </a:solidFill>
+          <a:ln/>
+          <a:effectLst>
+            <a:outerShdw blurRad="63500" dist="25400" dir="8100000" algn="bl" rotWithShape="0">
+              <a:srgbClr val="000000">
+                <a:alpha val="10000"/>
+              </a:srgbClr>
+            </a:outerShdw>
+          </a:effectLst>
+        </p:spPr>
+      </p:sp>
+      <p:sp>
+        <p:nvSpPr>
+          <p:cNvPr id="12" name="Text 10"/>
+          <p:cNvSpPr/>
+          <p:nvPr/>
+        </p:nvSpPr>
+        <p:spPr>
+          <a:xfrm>
+            <a:off x="3337560" y="1408176"/>
+            <a:ext cx="2377440" cy="347472"/>
+          </a:xfrm>
+          <a:prstGeom prst="rect">
+            <a:avLst/>
+          </a:prstGeom>
+          <a:noFill/>
+          <a:ln/>
+        </p:spPr>
+        <p:txBody>
+          <a:bodyPr wrap="square" lIns="0" tIns="0" rIns="0" bIns="0" rtlCol="0" anchor="ctr"/>
+          <a:lstStyle/>
+          <a:p>
+            <a:pPr marL="0" indent="0">
+              <a:buNone/>
+            </a:pPr>
+            <a:r>
+              <a:rPr lang="en-US" sz="2000" b="1" dirty="0">
+                <a:solidFill>
+                  <a:srgbClr val="00E47C"/>
+                </a:solidFill>
+                <a:latin typeface="Arial" pitchFamily="34" charset="0"/>
+                <a:ea typeface="Arial" pitchFamily="34" charset="-122"/>
+                <a:cs typeface="Arial" pitchFamily="34" charset="-120"/>
+              </a:rPr>
+              <a:t>3.6亿</a:t>
+            </a:r>
+            <a:endParaRPr lang="en-US" sz="2000" dirty="0"/>
+          </a:p>
+        </p:txBody>
+      </p:sp>
+      <p:sp>
+        <p:nvSpPr>
+          <p:cNvPr id="13" name="Text 11"/>
+          <p:cNvSpPr/>
+          <p:nvPr/>
+        </p:nvSpPr>
+        <p:spPr>
+          <a:xfrm>
+            <a:off x="3337560" y="1737360"/>
+            <a:ext cx="2377440" cy="347472"/>
+          </a:xfrm>
+          <a:prstGeom prst="rect">
+            <a:avLst/>
+          </a:prstGeom>
+          <a:noFill/>
+          <a:ln/>
+        </p:spPr>
+        <p:txBody>
+          <a:bodyPr wrap="square" lIns="0" tIns="0" rIns="0" bIns="0" rtlCol="0" anchor="ctr"/>
+          <a:lstStyle/>
+          <a:p>
+            <a:pPr marL="0" indent="0">
+              <a:buNone/>
+            </a:pPr>
+            <a:r>
+              <a:rPr lang="en-US" sz="900" dirty="0">
+                <a:solidFill>
+                  <a:srgbClr val="FFFFFF"/>
+                </a:solidFill>
+                <a:latin typeface="Arial" pitchFamily="34" charset="0"/>
+                <a:ea typeface="Arial" pitchFamily="34" charset="-122"/>
+                <a:cs typeface="Arial" pitchFamily="34" charset="-120"/>
+              </a:rPr>
+              <a:t>大宠爱年销(BI对比)</a:t>
+            </a:r>
+            <a:endParaRPr lang="en-US" sz="900" dirty="0"/>
+          </a:p>
+          <a:p>
+            <a:pPr marL="0" indent="0">
+              <a:buNone/>
+            </a:pPr>
+            <a:r>
+              <a:rPr lang="en-US" sz="900" dirty="0">
+                <a:solidFill>
+                  <a:srgbClr val="FFFFFF"/>
+                </a:solidFill>
+                <a:latin typeface="Arial" pitchFamily="34" charset="0"/>
+                <a:ea typeface="Arial" pitchFamily="34" charset="-122"/>
+                <a:cs typeface="Arial" pitchFamily="34" charset="-120"/>
+              </a:rPr>
+              <a:t>大宠爱 sales</a:t>
+            </a:r>
+            <a:endParaRPr lang="en-US" sz="900" dirty="0"/>
+          </a:p>
+        </p:txBody>
+      </p:sp>
+      <p:sp>
+        <p:nvSpPr>
+          <p:cNvPr id="14" name="Shape 12"/>
+          <p:cNvSpPr/>
+          <p:nvPr/>
+        </p:nvSpPr>
+        <p:spPr>
+          <a:xfrm>
+            <a:off x="6035040" y="1371600"/>
+            <a:ext cx="2651760" cy="777240"/>
+          </a:xfrm>
+          <a:prstGeom prst="rect">
+            <a:avLst/>
+          </a:prstGeom>
+          <a:solidFill>
+            <a:srgbClr val="08312A"/>
+          </a:solidFill>
+          <a:ln/>
+          <a:effectLst>
+            <a:outerShdw blurRad="63500" dist="25400" dir="8100000" algn="bl" rotWithShape="0">
+              <a:srgbClr val="000000">
+                <a:alpha val="10000"/>
+              </a:srgbClr>
+            </a:outerShdw>
+          </a:effectLst>
+        </p:spPr>
+      </p:sp>
+      <p:sp>
+        <p:nvSpPr>
+          <p:cNvPr id="15" name="Text 13"/>
+          <p:cNvSpPr/>
+          <p:nvPr/>
+        </p:nvSpPr>
+        <p:spPr>
+          <a:xfrm>
+            <a:off x="6172200" y="1408176"/>
+            <a:ext cx="2377440" cy="347472"/>
+          </a:xfrm>
+          <a:prstGeom prst="rect">
+            <a:avLst/>
+          </a:prstGeom>
+          <a:noFill/>
+          <a:ln/>
+        </p:spPr>
+        <p:txBody>
+          <a:bodyPr wrap="square" lIns="0" tIns="0" rIns="0" bIns="0" rtlCol="0" anchor="ctr"/>
+          <a:lstStyle/>
+          <a:p>
+            <a:pPr marL="0" indent="0">
+              <a:buNone/>
+            </a:pPr>
+            <a:r>
+              <a:rPr lang="en-US" sz="2000" b="1" dirty="0">
+                <a:solidFill>
+                  <a:srgbClr val="00E47C"/>
+                </a:solidFill>
+                <a:latin typeface="Arial" pitchFamily="34" charset="0"/>
+                <a:ea typeface="Arial" pitchFamily="34" charset="-122"/>
+                <a:cs typeface="Arial" pitchFamily="34" charset="-120"/>
+              </a:rPr>
+              <a:t>1.8亿</a:t>
+            </a:r>
+            <a:endParaRPr lang="en-US" sz="2000" dirty="0"/>
+          </a:p>
+        </p:txBody>
+      </p:sp>
+      <p:sp>
+        <p:nvSpPr>
+          <p:cNvPr id="16" name="Text 14"/>
+          <p:cNvSpPr/>
+          <p:nvPr/>
+        </p:nvSpPr>
+        <p:spPr>
+          <a:xfrm>
+            <a:off x="6172200" y="1737360"/>
+            <a:ext cx="2377440" cy="347472"/>
+          </a:xfrm>
+          <a:prstGeom prst="rect">
+            <a:avLst/>
+          </a:prstGeom>
+          <a:noFill/>
+          <a:ln/>
+        </p:spPr>
+        <p:txBody>
+          <a:bodyPr wrap="square" lIns="0" tIns="0" rIns="0" bIns="0" rtlCol="0" anchor="ctr"/>
+          <a:lstStyle/>
+          <a:p>
+            <a:pPr marL="0" indent="0">
+              <a:buNone/>
+            </a:pPr>
+            <a:r>
+              <a:rPr lang="en-US" sz="900" dirty="0">
+                <a:solidFill>
+                  <a:srgbClr val="FFFFFF"/>
+                </a:solidFill>
+                <a:latin typeface="Arial" pitchFamily="34" charset="0"/>
+                <a:ea typeface="Arial" pitchFamily="34" charset="-122"/>
+                <a:cs typeface="Arial" pitchFamily="34" charset="-120"/>
+              </a:rPr>
+              <a:t>妙宠爱年销(猫)</a:t>
+            </a:r>
+            <a:endParaRPr lang="en-US" sz="900" dirty="0"/>
+          </a:p>
+          <a:p>
+            <a:pPr marL="0" indent="0">
+              <a:buNone/>
+            </a:pPr>
+            <a:r>
+              <a:rPr lang="en-US" sz="900" dirty="0">
+                <a:solidFill>
+                  <a:srgbClr val="FFFFFF"/>
+                </a:solidFill>
+                <a:latin typeface="Arial" pitchFamily="34" charset="0"/>
+                <a:ea typeface="Arial" pitchFamily="34" charset="-122"/>
+                <a:cs typeface="Arial" pitchFamily="34" charset="-120"/>
+              </a:rPr>
+              <a:t>妙宠爱 sales</a:t>
+            </a:r>
+            <a:endParaRPr lang="en-US" sz="900" dirty="0"/>
+          </a:p>
+        </p:txBody>
+      </p:sp>
+      <p:sp>
+        <p:nvSpPr>
+          <p:cNvPr id="17" name="Shape 15"/>
+          <p:cNvSpPr/>
+          <p:nvPr/>
+        </p:nvSpPr>
+        <p:spPr>
+          <a:xfrm>
+            <a:off x="365760" y="2286000"/>
+            <a:ext cx="4023360" cy="384048"/>
+          </a:xfrm>
+          <a:prstGeom prst="rect">
+            <a:avLst/>
+          </a:prstGeom>
+          <a:solidFill>
+            <a:srgbClr val="F58A68"/>
+          </a:solidFill>
+          <a:ln/>
+        </p:spPr>
+      </p:sp>
+      <p:sp>
+        <p:nvSpPr>
+          <p:cNvPr id="18" name="Text 16"/>
+          <p:cNvSpPr/>
+          <p:nvPr/>
+        </p:nvSpPr>
+        <p:spPr>
+          <a:xfrm>
+            <a:off x="502920" y="2286000"/>
+            <a:ext cx="3749040" cy="384048"/>
+          </a:xfrm>
+          <a:prstGeom prst="rect">
+            <a:avLst/>
+          </a:prstGeom>
+          <a:noFill/>
+          <a:ln/>
+        </p:spPr>
+        <p:txBody>
+          <a:bodyPr wrap="square" lIns="0" tIns="0" rIns="0" bIns="0" rtlCol="0" anchor="ctr"/>
+          <a:lstStyle/>
+          <a:p>
+            <a:pPr marL="0" indent="0">
+              <a:buNone/>
+            </a:pPr>
+            <a:r>
+              <a:rPr lang="en-US" sz="1200" b="1" dirty="0">
+                <a:solidFill>
+                  <a:srgbClr val="FFFFFF"/>
+                </a:solidFill>
+                <a:latin typeface="Arial" pitchFamily="34" charset="0"/>
+                <a:ea typeface="Arial" pitchFamily="34" charset="-122"/>
+                <a:cs typeface="Arial" pitchFamily="34" charset="-120"/>
+              </a:rPr>
+              <a:t>Zoetis 驱虫药产品线 | Dewormer Products</a:t>
+            </a:r>
+            <a:endParaRPr lang="en-US" sz="1200" dirty="0"/>
+          </a:p>
+        </p:txBody>
+      </p:sp>
+      <p:sp>
+        <p:nvSpPr>
+          <p:cNvPr id="19" name="Shape 17"/>
+          <p:cNvSpPr/>
+          <p:nvPr/>
+        </p:nvSpPr>
+        <p:spPr>
+          <a:xfrm>
+            <a:off x="365760" y="2743200"/>
+            <a:ext cx="4023360" cy="594360"/>
+          </a:xfrm>
+          <a:prstGeom prst="rect">
+            <a:avLst/>
+          </a:prstGeom>
+          <a:solidFill>
+            <a:srgbClr val="FFFFFF"/>
+          </a:solidFill>
+          <a:ln/>
+          <a:effectLst>
+            <a:outerShdw blurRad="63500" dist="25400" dir="8100000" algn="bl" rotWithShape="0">
+              <a:srgbClr val="000000">
+                <a:alpha val="10000"/>
+              </a:srgbClr>
+            </a:outerShdw>
+          </a:effectLst>
+        </p:spPr>
+      </p:sp>
+      <p:sp>
+        <p:nvSpPr>
+          <p:cNvPr id="20" name="Shape 18"/>
+          <p:cNvSpPr/>
+          <p:nvPr/>
+        </p:nvSpPr>
+        <p:spPr>
+          <a:xfrm>
+            <a:off x="365760" y="2743200"/>
+            <a:ext cx="54864" cy="594360"/>
+          </a:xfrm>
+          <a:prstGeom prst="rect">
+            <a:avLst/>
+          </a:prstGeom>
+          <a:solidFill>
+            <a:srgbClr val="F58A68"/>
+          </a:solidFill>
+          <a:ln/>
+        </p:spPr>
+      </p:sp>
+      <p:sp>
+        <p:nvSpPr>
+          <p:cNvPr id="21" name="Text 19"/>
+          <p:cNvSpPr/>
+          <p:nvPr/>
+        </p:nvSpPr>
+        <p:spPr>
+          <a:xfrm>
+            <a:off x="502920" y="2788920"/>
+            <a:ext cx="1828800" cy="237744"/>
+          </a:xfrm>
+          <a:prstGeom prst="rect">
+            <a:avLst/>
+          </a:prstGeom>
+          <a:noFill/>
+          <a:ln/>
+        </p:spPr>
+        <p:txBody>
+          <a:bodyPr wrap="square" lIns="0" tIns="0" rIns="0" bIns="0" rtlCol="0" anchor="ctr"/>
+          <a:lstStyle/>
+          <a:p>
+            <a:pPr marL="0" indent="0">
+              <a:buNone/>
+            </a:pPr>
+            <a:r>
+              <a:rPr lang="en-US" sz="1100" b="1" dirty="0">
+                <a:solidFill>
+                  <a:srgbClr val="08312A"/>
+                </a:solidFill>
+                <a:latin typeface="Arial" pitchFamily="34" charset="0"/>
+                <a:ea typeface="Arial" pitchFamily="34" charset="-122"/>
+                <a:cs typeface="Arial" pitchFamily="34" charset="-120"/>
+              </a:rPr>
+              <a:t>大宠爱 Simparica</a:t>
+            </a:r>
+            <a:endParaRPr lang="en-US" sz="1100" dirty="0"/>
+          </a:p>
+        </p:txBody>
+      </p:sp>
+      <p:sp>
+        <p:nvSpPr>
+          <p:cNvPr id="22" name="Text 20"/>
+          <p:cNvSpPr/>
+          <p:nvPr/>
+        </p:nvSpPr>
+        <p:spPr>
+          <a:xfrm>
+            <a:off x="2331720" y="2807208"/>
+            <a:ext cx="1463040" cy="201168"/>
+          </a:xfrm>
+          <a:prstGeom prst="rect">
+            <a:avLst/>
+          </a:prstGeom>
+          <a:noFill/>
+          <a:ln/>
+        </p:spPr>
+        <p:txBody>
+          <a:bodyPr wrap="square" lIns="0" tIns="0" rIns="0" bIns="0" rtlCol="0" anchor="ctr"/>
+          <a:lstStyle/>
+          <a:p>
+            <a:pPr marL="0" indent="0">
+              <a:buNone/>
+            </a:pPr>
+            <a:r>
+              <a:rPr lang="en-US" sz="850" dirty="0">
+                <a:solidFill>
+                  <a:srgbClr val="898885"/>
+                </a:solidFill>
+                <a:latin typeface="Arial" pitchFamily="34" charset="0"/>
+                <a:ea typeface="Arial" pitchFamily="34" charset="-122"/>
+                <a:cs typeface="Arial" pitchFamily="34" charset="-120"/>
+              </a:rPr>
+              <a:t>犬 | 口服 | 内外同驱</a:t>
+            </a:r>
+            <a:endParaRPr lang="en-US" sz="850" dirty="0"/>
+          </a:p>
+        </p:txBody>
+      </p:sp>
+      <p:sp>
+        <p:nvSpPr>
+          <p:cNvPr id="23" name="Text 21"/>
+          <p:cNvSpPr/>
+          <p:nvPr/>
+        </p:nvSpPr>
+        <p:spPr>
+          <a:xfrm>
+            <a:off x="502920" y="3026664"/>
+            <a:ext cx="2834640" cy="201168"/>
+          </a:xfrm>
+          <a:prstGeom prst="rect">
+            <a:avLst/>
+          </a:prstGeom>
+          <a:noFill/>
+          <a:ln/>
+        </p:spPr>
+        <p:txBody>
+          <a:bodyPr wrap="square" lIns="0" tIns="0" rIns="0" bIns="0" rtlCol="0" anchor="ctr"/>
+          <a:lstStyle/>
+          <a:p>
+            <a:pPr marL="0" indent="0">
+              <a:buNone/>
+            </a:pPr>
+            <a:r>
+              <a:rPr lang="en-US" sz="900" dirty="0">
+                <a:solidFill>
+                  <a:srgbClr val="2E2D2C"/>
+                </a:solidFill>
+                <a:latin typeface="Arial" pitchFamily="34" charset="0"/>
+                <a:ea typeface="Arial" pitchFamily="34" charset="-122"/>
+                <a:cs typeface="Arial" pitchFamily="34" charset="-120"/>
+              </a:rPr>
+              <a:t>异恶唑啉类，驱杀蜱虫+跳蚤，全球热销</a:t>
+            </a:r>
+            <a:endParaRPr lang="en-US" sz="900" dirty="0"/>
+          </a:p>
+        </p:txBody>
+      </p:sp>
+      <p:sp>
+        <p:nvSpPr>
+          <p:cNvPr id="24" name="Text 22"/>
+          <p:cNvSpPr/>
+          <p:nvPr/>
+        </p:nvSpPr>
+        <p:spPr>
+          <a:xfrm>
+            <a:off x="3383280" y="2788920"/>
+            <a:ext cx="914400" cy="292608"/>
+          </a:xfrm>
+          <a:prstGeom prst="rect">
+            <a:avLst/>
+          </a:prstGeom>
+          <a:noFill/>
+          <a:ln/>
+        </p:spPr>
+        <p:txBody>
+          <a:bodyPr wrap="square" lIns="0" tIns="0" rIns="0" bIns="0" rtlCol="0" anchor="ctr"/>
+          <a:lstStyle/>
+          <a:p>
+            <a:pPr marL="0" indent="0" algn="r">
+              <a:buNone/>
+            </a:pPr>
+            <a:r>
+              <a:rPr lang="en-US" sz="1400" b="1" dirty="0">
+                <a:solidFill>
+                  <a:srgbClr val="F58A68"/>
+                </a:solidFill>
+                <a:latin typeface="Arial" pitchFamily="34" charset="0"/>
+                <a:ea typeface="Arial" pitchFamily="34" charset="-122"/>
+                <a:cs typeface="Arial" pitchFamily="34" charset="-120"/>
+              </a:rPr>
+              <a:t>3.6亿</a:t>
+            </a:r>
+            <a:endParaRPr lang="en-US" sz="1400" dirty="0"/>
+          </a:p>
+        </p:txBody>
+      </p:sp>
+      <p:sp>
+        <p:nvSpPr>
+          <p:cNvPr id="25" name="Shape 23"/>
+          <p:cNvSpPr/>
+          <p:nvPr/>
+        </p:nvSpPr>
+        <p:spPr>
+          <a:xfrm>
+            <a:off x="365760" y="3401568"/>
+            <a:ext cx="4023360" cy="594360"/>
+          </a:xfrm>
+          <a:prstGeom prst="rect">
+            <a:avLst/>
+          </a:prstGeom>
+          <a:solidFill>
+            <a:srgbClr val="FFFFFF"/>
+          </a:solidFill>
+          <a:ln/>
+          <a:effectLst>
+            <a:outerShdw blurRad="63500" dist="25400" dir="8100000" algn="bl" rotWithShape="0">
+              <a:srgbClr val="000000">
+                <a:alpha val="10000"/>
+              </a:srgbClr>
+            </a:outerShdw>
+          </a:effectLst>
+        </p:spPr>
+      </p:sp>
+      <p:sp>
+        <p:nvSpPr>
+          <p:cNvPr id="26" name="Shape 24"/>
+          <p:cNvSpPr/>
+          <p:nvPr/>
+        </p:nvSpPr>
+        <p:spPr>
+          <a:xfrm>
+            <a:off x="365760" y="3401568"/>
+            <a:ext cx="54864" cy="594360"/>
+          </a:xfrm>
+          <a:prstGeom prst="rect">
+            <a:avLst/>
+          </a:prstGeom>
+          <a:solidFill>
+            <a:srgbClr val="F58A68"/>
+          </a:solidFill>
+          <a:ln/>
+        </p:spPr>
+      </p:sp>
+      <p:sp>
+        <p:nvSpPr>
+          <p:cNvPr id="27" name="Text 25"/>
+          <p:cNvSpPr/>
+          <p:nvPr/>
+        </p:nvSpPr>
+        <p:spPr>
+          <a:xfrm>
+            <a:off x="502920" y="3447288"/>
+            <a:ext cx="1828800" cy="237744"/>
+          </a:xfrm>
+          <a:prstGeom prst="rect">
+            <a:avLst/>
+          </a:prstGeom>
+          <a:noFill/>
+          <a:ln/>
+        </p:spPr>
+        <p:txBody>
+          <a:bodyPr wrap="square" lIns="0" tIns="0" rIns="0" bIns="0" rtlCol="0" anchor="ctr"/>
+          <a:lstStyle/>
+          <a:p>
+            <a:pPr marL="0" indent="0">
+              <a:buNone/>
+            </a:pPr>
+            <a:r>
+              <a:rPr lang="en-US" sz="1100" b="1" dirty="0">
+                <a:solidFill>
+                  <a:srgbClr val="08312A"/>
+                </a:solidFill>
+                <a:latin typeface="Arial" pitchFamily="34" charset="0"/>
+                <a:ea typeface="Arial" pitchFamily="34" charset="-122"/>
+                <a:cs typeface="Arial" pitchFamily="34" charset="-120"/>
+              </a:rPr>
+              <a:t>妙宠爱 Simparica Trio</a:t>
+            </a:r>
+            <a:endParaRPr lang="en-US" sz="1100" dirty="0"/>
+          </a:p>
+        </p:txBody>
+      </p:sp>
+      <p:sp>
+        <p:nvSpPr>
+          <p:cNvPr id="28" name="Text 26"/>
+          <p:cNvSpPr/>
+          <p:nvPr/>
+        </p:nvSpPr>
+        <p:spPr>
+          <a:xfrm>
+            <a:off x="2331720" y="3465576"/>
+            <a:ext cx="1463040" cy="201168"/>
+          </a:xfrm>
+          <a:prstGeom prst="rect">
+            <a:avLst/>
+          </a:prstGeom>
+          <a:noFill/>
+          <a:ln/>
+        </p:spPr>
+        <p:txBody>
+          <a:bodyPr wrap="square" lIns="0" tIns="0" rIns="0" bIns="0" rtlCol="0" anchor="ctr"/>
+          <a:lstStyle/>
+          <a:p>
+            <a:pPr marL="0" indent="0">
+              <a:buNone/>
+            </a:pPr>
+            <a:r>
+              <a:rPr lang="en-US" sz="850" dirty="0">
+                <a:solidFill>
+                  <a:srgbClr val="898885"/>
+                </a:solidFill>
+                <a:latin typeface="Arial" pitchFamily="34" charset="0"/>
+                <a:ea typeface="Arial" pitchFamily="34" charset="-122"/>
+                <a:cs typeface="Arial" pitchFamily="34" charset="-120"/>
+              </a:rPr>
+              <a:t>猫 | 口服 | 内外同驱</a:t>
+            </a:r>
+            <a:endParaRPr lang="en-US" sz="850" dirty="0"/>
+          </a:p>
+        </p:txBody>
+      </p:sp>
+      <p:sp>
+        <p:nvSpPr>
+          <p:cNvPr id="29" name="Text 27"/>
+          <p:cNvSpPr/>
+          <p:nvPr/>
+        </p:nvSpPr>
+        <p:spPr>
+          <a:xfrm>
+            <a:off x="502920" y="3685032"/>
+            <a:ext cx="2834640" cy="201168"/>
+          </a:xfrm>
+          <a:prstGeom prst="rect">
+            <a:avLst/>
+          </a:prstGeom>
+          <a:noFill/>
+          <a:ln/>
+        </p:spPr>
+        <p:txBody>
+          <a:bodyPr wrap="square" lIns="0" tIns="0" rIns="0" bIns="0" rtlCol="0" anchor="ctr"/>
+          <a:lstStyle/>
+          <a:p>
+            <a:pPr marL="0" indent="0">
+              <a:buNone/>
+            </a:pPr>
+            <a:r>
+              <a:rPr lang="en-US" sz="900" dirty="0">
+                <a:solidFill>
+                  <a:srgbClr val="2E2D2C"/>
+                </a:solidFill>
+                <a:latin typeface="Arial" pitchFamily="34" charset="0"/>
+                <a:ea typeface="Arial" pitchFamily="34" charset="-122"/>
+                <a:cs typeface="Arial" pitchFamily="34" charset="-120"/>
+              </a:rPr>
+              <a:t>犬心保升级版，猫用唯一内外同驱口服</a:t>
+            </a:r>
+            <a:endParaRPr lang="en-US" sz="900" dirty="0"/>
+          </a:p>
+        </p:txBody>
+      </p:sp>
+      <p:sp>
+        <p:nvSpPr>
+          <p:cNvPr id="30" name="Text 28"/>
+          <p:cNvSpPr/>
+          <p:nvPr/>
+        </p:nvSpPr>
+        <p:spPr>
+          <a:xfrm>
+            <a:off x="3383280" y="3447288"/>
+            <a:ext cx="914400" cy="292608"/>
+          </a:xfrm>
+          <a:prstGeom prst="rect">
+            <a:avLst/>
+          </a:prstGeom>
+          <a:noFill/>
+          <a:ln/>
+        </p:spPr>
+        <p:txBody>
+          <a:bodyPr wrap="square" lIns="0" tIns="0" rIns="0" bIns="0" rtlCol="0" anchor="ctr"/>
+          <a:lstStyle/>
+          <a:p>
+            <a:pPr marL="0" indent="0" algn="r">
+              <a:buNone/>
+            </a:pPr>
+            <a:r>
+              <a:rPr lang="en-US" sz="1400" b="1" dirty="0">
+                <a:solidFill>
+                  <a:srgbClr val="F58A68"/>
+                </a:solidFill>
+                <a:latin typeface="Arial" pitchFamily="34" charset="0"/>
+                <a:ea typeface="Arial" pitchFamily="34" charset="-122"/>
+                <a:cs typeface="Arial" pitchFamily="34" charset="-120"/>
+              </a:rPr>
+              <a:t>1.8亿</a:t>
+            </a:r>
+            <a:endParaRPr lang="en-US" sz="1400" dirty="0"/>
+          </a:p>
+        </p:txBody>
+      </p:sp>
+      <p:sp>
+        <p:nvSpPr>
+          <p:cNvPr id="31" name="Shape 29"/>
+          <p:cNvSpPr/>
+          <p:nvPr/>
+        </p:nvSpPr>
+        <p:spPr>
+          <a:xfrm>
+            <a:off x="365760" y="4059936"/>
+            <a:ext cx="4023360" cy="594360"/>
+          </a:xfrm>
+          <a:prstGeom prst="rect">
+            <a:avLst/>
+          </a:prstGeom>
+          <a:solidFill>
+            <a:srgbClr val="FFFFFF"/>
+          </a:solidFill>
+          <a:ln/>
+          <a:effectLst>
+            <a:outerShdw blurRad="63500" dist="25400" dir="8100000" algn="bl" rotWithShape="0">
+              <a:srgbClr val="000000">
+                <a:alpha val="10000"/>
+              </a:srgbClr>
+            </a:outerShdw>
+          </a:effectLst>
+        </p:spPr>
+      </p:sp>
+      <p:sp>
+        <p:nvSpPr>
+          <p:cNvPr id="32" name="Shape 30"/>
+          <p:cNvSpPr/>
+          <p:nvPr/>
+        </p:nvSpPr>
+        <p:spPr>
+          <a:xfrm>
+            <a:off x="365760" y="4059936"/>
+            <a:ext cx="54864" cy="594360"/>
+          </a:xfrm>
+          <a:prstGeom prst="rect">
+            <a:avLst/>
+          </a:prstGeom>
+          <a:solidFill>
+            <a:srgbClr val="F58A68"/>
+          </a:solidFill>
+          <a:ln/>
+        </p:spPr>
+      </p:sp>
+      <p:sp>
+        <p:nvSpPr>
+          <p:cNvPr id="33" name="Text 31"/>
+          <p:cNvSpPr/>
+          <p:nvPr/>
+        </p:nvSpPr>
+        <p:spPr>
+          <a:xfrm>
+            <a:off x="502920" y="4105656"/>
+            <a:ext cx="1828800" cy="237744"/>
+          </a:xfrm>
+          <a:prstGeom prst="rect">
+            <a:avLst/>
+          </a:prstGeom>
+          <a:noFill/>
+          <a:ln/>
+        </p:spPr>
+        <p:txBody>
+          <a:bodyPr wrap="square" lIns="0" tIns="0" rIns="0" bIns="0" rtlCol="0" anchor="ctr"/>
+          <a:lstStyle/>
+          <a:p>
+            <a:pPr marL="0" indent="0">
+              <a:buNone/>
+            </a:pPr>
+            <a:r>
+              <a:rPr lang="en-US" sz="1100" b="1" dirty="0">
+                <a:solidFill>
+                  <a:srgbClr val="08312A"/>
+                </a:solidFill>
+                <a:latin typeface="Arial" pitchFamily="34" charset="0"/>
+                <a:ea typeface="Arial" pitchFamily="34" charset="-122"/>
+                <a:cs typeface="Arial" pitchFamily="34" charset="-120"/>
+              </a:rPr>
+              <a:t>Apoquel 奥拉替尼</a:t>
+            </a:r>
+            <a:endParaRPr lang="en-US" sz="1100" dirty="0"/>
+          </a:p>
+        </p:txBody>
+      </p:sp>
+      <p:sp>
+        <p:nvSpPr>
+          <p:cNvPr id="34" name="Text 32"/>
+          <p:cNvSpPr/>
+          <p:nvPr/>
+        </p:nvSpPr>
+        <p:spPr>
+          <a:xfrm>
+            <a:off x="2331720" y="4123944"/>
+            <a:ext cx="1463040" cy="201168"/>
+          </a:xfrm>
+          <a:prstGeom prst="rect">
+            <a:avLst/>
+          </a:prstGeom>
+          <a:noFill/>
+          <a:ln/>
+        </p:spPr>
+        <p:txBody>
+          <a:bodyPr wrap="square" lIns="0" tIns="0" rIns="0" bIns="0" rtlCol="0" anchor="ctr"/>
+          <a:lstStyle/>
+          <a:p>
+            <a:pPr marL="0" indent="0">
+              <a:buNone/>
+            </a:pPr>
+            <a:r>
+              <a:rPr lang="en-US" sz="850" dirty="0">
+                <a:solidFill>
+                  <a:srgbClr val="898885"/>
+                </a:solidFill>
+                <a:latin typeface="Arial" pitchFamily="34" charset="0"/>
+                <a:ea typeface="Arial" pitchFamily="34" charset="-122"/>
+                <a:cs typeface="Arial" pitchFamily="34" charset="-120"/>
+              </a:rPr>
+              <a:t>犬 | 口服 | 皮肤病</a:t>
+            </a:r>
+            <a:endParaRPr lang="en-US" sz="850" dirty="0"/>
+          </a:p>
+        </p:txBody>
+      </p:sp>
+      <p:sp>
+        <p:nvSpPr>
+          <p:cNvPr id="35" name="Text 33"/>
+          <p:cNvSpPr/>
+          <p:nvPr/>
+        </p:nvSpPr>
+        <p:spPr>
+          <a:xfrm>
+            <a:off x="502920" y="4343400"/>
+            <a:ext cx="2834640" cy="201168"/>
+          </a:xfrm>
+          <a:prstGeom prst="rect">
+            <a:avLst/>
+          </a:prstGeom>
+          <a:noFill/>
+          <a:ln/>
+        </p:spPr>
+        <p:txBody>
+          <a:bodyPr wrap="square" lIns="0" tIns="0" rIns="0" bIns="0" rtlCol="0" anchor="ctr"/>
+          <a:lstStyle/>
+          <a:p>
+            <a:pPr marL="0" indent="0">
+              <a:buNone/>
+            </a:pPr>
+            <a:r>
+              <a:rPr lang="en-US" sz="900" dirty="0">
+                <a:solidFill>
+                  <a:srgbClr val="2E2D2C"/>
+                </a:solidFill>
+                <a:latin typeface="Arial" pitchFamily="34" charset="0"/>
+                <a:ea typeface="Arial" pitchFamily="34" charset="-122"/>
+                <a:cs typeface="Arial" pitchFamily="34" charset="-120"/>
+              </a:rPr>
+              <a:t>特应性皮炎止痒，非驱虫但为皮肤科核心产品</a:t>
+            </a:r>
+            <a:endParaRPr lang="en-US" sz="900" dirty="0"/>
+          </a:p>
+        </p:txBody>
+      </p:sp>
+      <p:sp>
+        <p:nvSpPr>
+          <p:cNvPr id="36" name="Text 34"/>
+          <p:cNvSpPr/>
+          <p:nvPr/>
+        </p:nvSpPr>
+        <p:spPr>
+          <a:xfrm>
+            <a:off x="3383280" y="4105656"/>
+            <a:ext cx="914400" cy="292608"/>
+          </a:xfrm>
+          <a:prstGeom prst="rect">
+            <a:avLst/>
+          </a:prstGeom>
+          <a:noFill/>
+          <a:ln/>
+        </p:spPr>
+        <p:txBody>
+          <a:bodyPr wrap="square" lIns="0" tIns="0" rIns="0" bIns="0" rtlCol="0" anchor="ctr"/>
+          <a:lstStyle/>
+          <a:p>
+            <a:pPr marL="0" indent="0" algn="r">
+              <a:buNone/>
+            </a:pPr>
+            <a:r>
+              <a:rPr lang="en-US" sz="1400" b="1" dirty="0">
+                <a:solidFill>
+                  <a:srgbClr val="F58A68"/>
+                </a:solidFill>
+                <a:latin typeface="Arial" pitchFamily="34" charset="0"/>
+                <a:ea typeface="Arial" pitchFamily="34" charset="-122"/>
+                <a:cs typeface="Arial" pitchFamily="34" charset="-120"/>
+              </a:rPr>
+              <a:t>全球爆款</a:t>
+            </a:r>
+            <a:endParaRPr lang="en-US" sz="1400" dirty="0"/>
+          </a:p>
+        </p:txBody>
+      </p:sp>
+      <p:sp>
+        <p:nvSpPr>
+          <p:cNvPr id="37" name="Shape 35"/>
+          <p:cNvSpPr/>
+          <p:nvPr/>
+        </p:nvSpPr>
+        <p:spPr>
+          <a:xfrm>
+            <a:off x="4709160" y="2286000"/>
+            <a:ext cx="4023360" cy="2331720"/>
+          </a:xfrm>
+          <a:prstGeom prst="rect">
+            <a:avLst/>
+          </a:prstGeom>
+          <a:solidFill>
+            <a:srgbClr val="FFFFFF"/>
+          </a:solidFill>
+          <a:ln/>
+          <a:effectLst>
+            <a:outerShdw blurRad="63500" dist="25400" dir="8100000" algn="bl" rotWithShape="0">
+              <a:srgbClr val="000000">
+                <a:alpha val="10000"/>
+              </a:srgbClr>
+            </a:outerShdw>
+          </a:effectLst>
+        </p:spPr>
+      </p:sp>
+      <p:sp>
+        <p:nvSpPr>
+          <p:cNvPr id="38" name="Shape 36"/>
+          <p:cNvSpPr/>
+          <p:nvPr/>
+        </p:nvSpPr>
+        <p:spPr>
+          <a:xfrm>
+            <a:off x="4709160" y="2286000"/>
+            <a:ext cx="4023360" cy="384048"/>
+          </a:xfrm>
+          <a:prstGeom prst="rect">
+            <a:avLst/>
+          </a:prstGeom>
+          <a:solidFill>
+            <a:srgbClr val="CC0000"/>
+          </a:solidFill>
+          <a:ln/>
+        </p:spPr>
+      </p:sp>
+      <p:sp>
+        <p:nvSpPr>
+          <p:cNvPr id="39" name="Text 37"/>
+          <p:cNvSpPr/>
+          <p:nvPr/>
+        </p:nvSpPr>
+        <p:spPr>
+          <a:xfrm>
+            <a:off x="4846320" y="2286000"/>
+            <a:ext cx="3749040" cy="384048"/>
+          </a:xfrm>
+          <a:prstGeom prst="rect">
+            <a:avLst/>
+          </a:prstGeom>
+          <a:noFill/>
+          <a:ln/>
+        </p:spPr>
+        <p:txBody>
+          <a:bodyPr wrap="square" lIns="0" tIns="0" rIns="0" bIns="0" rtlCol="0" anchor="ctr"/>
+          <a:lstStyle/>
+          <a:p>
+            <a:pPr marL="0" indent="0">
+              <a:buNone/>
+            </a:pPr>
+            <a:r>
+              <a:rPr lang="en-US" sz="1100" b="1" dirty="0">
+                <a:solidFill>
+                  <a:srgbClr val="FFFFFF"/>
+                </a:solidFill>
+                <a:latin typeface="Arial" pitchFamily="34" charset="0"/>
+                <a:ea typeface="Arial" pitchFamily="34" charset="-122"/>
+                <a:cs typeface="Arial" pitchFamily="34" charset="-120"/>
+              </a:rPr>
+              <a:t>⚠️ 驱虫药市场挑战 | Dewormer Market Challenges</a:t>
+            </a:r>
+            <a:endParaRPr lang="en-US" sz="1100" dirty="0"/>
+          </a:p>
+        </p:txBody>
+      </p:sp>
+      <p:sp>
+        <p:nvSpPr>
+          <p:cNvPr id="40" name="Text 38"/>
+          <p:cNvSpPr/>
+          <p:nvPr/>
+        </p:nvSpPr>
+        <p:spPr>
+          <a:xfrm>
+            <a:off x="4846320" y="2743200"/>
+            <a:ext cx="3749040" cy="1783080"/>
+          </a:xfrm>
+          <a:prstGeom prst="rect">
+            <a:avLst/>
+          </a:prstGeom>
+          <a:noFill/>
+          <a:ln/>
+        </p:spPr>
+        <p:txBody>
+          <a:bodyPr wrap="square" lIns="0" tIns="0" rIns="0" bIns="0" rtlCol="0" anchor="ctr"/>
+          <a:lstStyle/>
+          <a:p>
+            <a:pPr marL="342900" indent="-342900">
+              <a:buSzPct val="100000"/>
+              <a:buChar char="•"/>
+            </a:pPr>
+            <a:r>
+              <a:rPr lang="en-US" sz="1000" dirty="0">
+                <a:solidFill>
+                  <a:srgbClr val="2E2D2C"/>
+                </a:solidFill>
+                <a:latin typeface="Arial" pitchFamily="34" charset="0"/>
+                <a:ea typeface="Arial" pitchFamily="34" charset="-122"/>
+                <a:cs typeface="Arial" pitchFamily="34" charset="-120"/>
+              </a:rPr>
+              <a:t>W21利润预警：宠物主削减开支，高端驱虫药面临降价压力</a:t>
+            </a:r>
+            <a:endParaRPr lang="en-US" sz="1000" dirty="0"/>
+          </a:p>
+          <a:p>
+            <a:pPr marL="342900" indent="-342900">
+              <a:buSzPct val="100000"/>
+              <a:buChar char="•"/>
+            </a:pPr>
+            <a:r>
+              <a:rPr lang="en-US" sz="1000" dirty="0">
+                <a:solidFill>
+                  <a:srgbClr val="2E2D2C"/>
+                </a:solidFill>
+                <a:latin typeface="Arial" pitchFamily="34" charset="0"/>
+                <a:ea typeface="Arial" pitchFamily="34" charset="-122"/>
+                <a:cs typeface="Arial" pitchFamily="34" charset="-120"/>
+              </a:rPr>
+              <a:t>中国驱虫药市场国产品牌性价比优势持续蚕食外资份额</a:t>
+            </a:r>
+            <a:endParaRPr lang="en-US" sz="1000" dirty="0"/>
+          </a:p>
+          <a:p>
+            <a:pPr marL="342900" indent="-342900">
+              <a:buSzPct val="100000"/>
+              <a:buChar char="•"/>
+            </a:pPr>
+            <a:r>
+              <a:rPr lang="en-US" sz="1000" dirty="0">
+                <a:solidFill>
+                  <a:srgbClr val="2E2D2C"/>
+                </a:solidFill>
+                <a:latin typeface="Arial" pitchFamily="34" charset="0"/>
+                <a:ea typeface="Arial" pitchFamily="34" charset="-122"/>
+                <a:cs typeface="Arial" pitchFamily="34" charset="-120"/>
+              </a:rPr>
+              <a:t>大宠爱 vs 超可信：BI超可信已率先获批治疗犬疥螨/蠕形螨，形成差异化竞争优势</a:t>
+            </a:r>
+            <a:endParaRPr lang="en-US" sz="1000" dirty="0"/>
+          </a:p>
+          <a:p>
+            <a:pPr marL="342900" indent="-342900">
+              <a:buSzPct val="100000"/>
+              <a:buChar char="•"/>
+            </a:pPr>
+            <a:r>
+              <a:rPr lang="en-US" sz="1000" dirty="0">
+                <a:solidFill>
+                  <a:srgbClr val="2E2D2C"/>
+                </a:solidFill>
+                <a:latin typeface="Arial" pitchFamily="34" charset="0"/>
+                <a:ea typeface="Arial" pitchFamily="34" charset="-122"/>
+                <a:cs typeface="Arial" pitchFamily="34" charset="-120"/>
+              </a:rPr>
+              <a:t>妙宠爱（猫） vs 博来恩：猫用口服市场教育成本高，滴剂仍为猫主流</a:t>
+            </a:r>
+            <a:endParaRPr lang="en-US" sz="1000" dirty="0"/>
+          </a:p>
+        </p:txBody>
+      </p:sp>
+      <p:sp>
+        <p:nvSpPr>
+          <p:cNvPr id="41" name="Shape 39"/>
+          <p:cNvSpPr/>
+          <p:nvPr/>
+        </p:nvSpPr>
+        <p:spPr>
+          <a:xfrm>
+            <a:off x="365760" y="4663440"/>
+            <a:ext cx="8412480" cy="438912"/>
+          </a:xfrm>
+          <a:prstGeom prst="rect">
+            <a:avLst/>
+          </a:prstGeom>
+          <a:solidFill>
+            <a:srgbClr val="08312A"/>
+          </a:solidFill>
+          <a:ln/>
+          <a:effectLst>
+            <a:outerShdw blurRad="63500" dist="25400" dir="8100000" algn="bl" rotWithShape="0">
+              <a:srgbClr val="000000">
+                <a:alpha val="10000"/>
+              </a:srgbClr>
+            </a:outerShdw>
+          </a:effectLst>
+        </p:spPr>
+      </p:sp>
+      <p:sp>
+        <p:nvSpPr>
+          <p:cNvPr id="42" name="Text 40"/>
+          <p:cNvSpPr/>
+          <p:nvPr/>
+        </p:nvSpPr>
+        <p:spPr>
+          <a:xfrm>
+            <a:off x="548640" y="4663440"/>
+            <a:ext cx="8046720" cy="438912"/>
+          </a:xfrm>
+          <a:prstGeom prst="rect">
+            <a:avLst/>
+          </a:prstGeom>
+          <a:noFill/>
+          <a:ln/>
+        </p:spPr>
+        <p:txBody>
+          <a:bodyPr wrap="square" lIns="0" tIns="0" rIns="0" bIns="0" rtlCol="0" anchor="ctr"/>
+          <a:lstStyle/>
+          <a:p>
+            <a:pPr marL="0" indent="0">
+              <a:buNone/>
+            </a:pPr>
+            <a:r>
+              <a:rPr lang="en-US" sz="1000" dirty="0">
+                <a:solidFill>
+                  <a:srgbClr val="FFFFFF"/>
+                </a:solidFill>
+                <a:latin typeface="Arial" pitchFamily="34" charset="0"/>
+                <a:ea typeface="Arial" pitchFamily="34" charset="-122"/>
+                <a:cs typeface="Arial" pitchFamily="34" charset="-120"/>
+              </a:rPr>
+              <a:t>💡 洞察：Zoetis大宠爱全球最强，但超可信已在中国获疥螨/蠕形螨治疗适应症，形成BI差异化优势。消费降级对高端口服驱虫影响最大</a:t>
+            </a:r>
+            <a:endParaRPr lang="en-US" sz="1000" dirty="0"/>
+          </a:p>
+        </p:txBody>
+      </p:sp>
+      <p:sp>
+        <p:nvSpPr>
+          <p:cNvPr id="43" name="Shape 41"/>
+          <p:cNvSpPr/>
+          <p:nvPr/>
+        </p:nvSpPr>
+        <p:spPr>
+          <a:xfrm>
+            <a:off x="0" y="4800600"/>
+            <a:ext cx="9144000" cy="342900"/>
+          </a:xfrm>
+          <a:prstGeom prst="rect">
+            <a:avLst/>
+          </a:prstGeom>
+          <a:solidFill>
+            <a:srgbClr val="08312A"/>
+          </a:solidFill>
+          <a:ln/>
+        </p:spPr>
+      </p:sp>
+      <p:sp>
+        <p:nvSpPr>
+          <p:cNvPr id="44" name="Text 42"/>
+          <p:cNvSpPr/>
+          <p:nvPr/>
+        </p:nvSpPr>
+        <p:spPr>
+          <a:xfrm>
+            <a:off x="365760" y="4800600"/>
+            <a:ext cx="8412480" cy="342900"/>
+          </a:xfrm>
+          <a:prstGeom prst="rect">
+            <a:avLst/>
+          </a:prstGeom>
+          <a:noFill/>
+          <a:ln/>
+        </p:spPr>
+        <p:txBody>
+          <a:bodyPr wrap="square" lIns="0" tIns="0" rIns="0" bIns="0" rtlCol="0" anchor="ctr"/>
+          <a:lstStyle/>
+          <a:p>
+            <a:pPr marL="0" indent="0">
+              <a:buNone/>
+            </a:pPr>
+            <a:r>
+              <a:rPr lang="en-US" sz="800" dirty="0">
+                <a:solidFill>
+                  <a:srgbClr val="898885"/>
+                </a:solidFill>
+                <a:latin typeface="Arial" pitchFamily="34" charset="0"/>
+                <a:ea typeface="Arial" pitchFamily="34" charset="-122"/>
+                <a:cs typeface="Arial" pitchFamily="34" charset="-120"/>
+              </a:rPr>
+              <a:t>数据来源：雪球网、前瞻网、Zoetis官方公告  |  Data: May 2026 (W21)</a:t>
+            </a:r>
+            <a:endParaRPr lang="en-US" sz="800" dirty="0"/>
+          </a:p>
+        </p:txBody>
+      </p:sp>
+    </p:spTree>
+  </p:cSld>
+  <p:clrMapOvr>
+    <a:masterClrMapping/>
+  </p:clrMapOvr>
+</p:sld>
+</file>
+
+<file path=ppt/slides/slide4.xml><?xml version="1.0" encoding="utf-8"?>
+<p:sld xmlns:a="http://schemas.openxmlformats.org/drawingml/2006/main" xmlns:r="http://schemas.openxmlformats.org/officeDocument/2006/relationships" xmlns:p="http://schemas.openxmlformats.org/presentationml/2006/main">
   <p:cSld name="Slide 3">
     <p:bg>
       <p:bgPr>
@@ -7807,7 +13431,7 @@
 </p:sld>
 </file>
 
-<file path=ppt/slides/slide4.xml><?xml version="1.0" encoding="utf-8"?>
+<file path=ppt/slides/slide5.xml><?xml version="1.0" encoding="utf-8"?>
 <p:sld xmlns:a="http://schemas.openxmlformats.org/drawingml/2006/main" xmlns:r="http://schemas.openxmlformats.org/officeDocument/2006/relationships" xmlns:p="http://schemas.openxmlformats.org/presentationml/2006/main">
   <p:cSld name="Slide 4">
     <p:bg>
@@ -10971,7 +16595,7 @@
 </p:sld>
 </file>
 
-<file path=ppt/slides/slide5.xml><?xml version="1.0" encoding="utf-8"?>
+<file path=ppt/slides/slide6.xml><?xml version="1.0" encoding="utf-8"?>
 <p:sld xmlns:a="http://schemas.openxmlformats.org/drawingml/2006/main" xmlns:r="http://schemas.openxmlformats.org/officeDocument/2006/relationships" xmlns:p="http://schemas.openxmlformats.org/presentationml/2006/main">
   <p:cSld name="Slide 5">
     <p:bg>
@@ -12079,7 +17703,7 @@
 </p:sld>
 </file>
 
-<file path=ppt/slides/slide6.xml><?xml version="1.0" encoding="utf-8"?>
+<file path=ppt/slides/slide7.xml><?xml version="1.0" encoding="utf-8"?>
 <p:sld xmlns:a="http://schemas.openxmlformats.org/drawingml/2006/main" xmlns:r="http://schemas.openxmlformats.org/officeDocument/2006/relationships" xmlns:p="http://schemas.openxmlformats.org/presentationml/2006/main">
   <p:cSld name="Slide 6">
     <p:bg>
@@ -13034,7 +18658,7 @@
 </p:sld>
 </file>
 
-<file path=ppt/slides/slide7.xml><?xml version="1.0" encoding="utf-8"?>
+<file path=ppt/slides/slide8.xml><?xml version="1.0" encoding="utf-8"?>
 <p:sld xmlns:a="http://schemas.openxmlformats.org/drawingml/2006/main" xmlns:r="http://schemas.openxmlformats.org/officeDocument/2006/relationships" xmlns:p="http://schemas.openxmlformats.org/presentationml/2006/main">
   <p:cSld name="Slide 7">
     <p:bg>
@@ -14299,7 +19923,7 @@
 </p:sld>
 </file>
 
-<file path=ppt/slides/slide8.xml><?xml version="1.0" encoding="utf-8"?>
+<file path=ppt/slides/slide9.xml><?xml version="1.0" encoding="utf-8"?>
 <p:sld xmlns:a="http://schemas.openxmlformats.org/drawingml/2006/main" xmlns:r="http://schemas.openxmlformats.org/officeDocument/2006/relationships" xmlns:p="http://schemas.openxmlformats.org/presentationml/2006/main">
   <p:cSld name="Slide 8">
     <p:bg>
@@ -15239,2762 +20863,6 @@
               <a:t>数据来源：前瞻网、海正动保官方信息、惠中动保电商信息  |  Data: May 2026</a:t>
             </a:r>
             <a:endParaRPr lang="en-US" sz="800" dirty="0"/>
-          </a:p>
-        </p:txBody>
-      </p:sp>
-    </p:spTree>
-  </p:cSld>
-  <p:clrMapOvr>
-    <a:masterClrMapping/>
-  </p:clrMapOvr>
-</p:sld>
-</file>
-
-<file path=ppt/slides/slide9.xml><?xml version="1.0" encoding="utf-8"?>
-<p:sld xmlns:a="http://schemas.openxmlformats.org/drawingml/2006/main" xmlns:r="http://schemas.openxmlformats.org/officeDocument/2006/relationships" xmlns:p="http://schemas.openxmlformats.org/presentationml/2006/main">
-  <p:cSld name="Slide 9">
-    <p:bg>
-      <p:bgPr>
-        <a:solidFill>
-          <a:srgbClr val="FAF9F8"/>
-        </a:solidFill>
-        <a:effectLst/>
-      </p:bgPr>
-    </p:bg>
-    <p:spTree>
-      <p:nvGrpSpPr>
-        <p:cNvPr id="1" name=""/>
-        <p:cNvGrpSpPr/>
-        <p:nvPr/>
-      </p:nvGrpSpPr>
-      <p:grpSpPr>
-        <a:xfrm>
-          <a:off x="0" y="0"/>
-          <a:ext cx="0" cy="0"/>
-          <a:chOff x="0" y="0"/>
-          <a:chExt cx="0" cy="0"/>
-        </a:xfrm>
-      </p:grpSpPr>
-      <p:sp>
-        <p:nvSpPr>
-          <p:cNvPr id="2" name="Shape 0"/>
-          <p:cNvSpPr/>
-          <p:nvPr/>
-        </p:nvSpPr>
-        <p:spPr>
-          <a:xfrm>
-            <a:off x="0" y="0"/>
-            <a:ext cx="9144000" cy="685800"/>
-          </a:xfrm>
-          <a:prstGeom prst="rect">
-            <a:avLst/>
-          </a:prstGeom>
-          <a:solidFill>
-            <a:srgbClr val="08312A"/>
-          </a:solidFill>
-          <a:ln/>
-        </p:spPr>
-        <p:txBody>
-          <a:bodyPr/>
-          <a:lstStyle/>
-          <a:p>
-            <a:endParaRPr lang="zh-CN" altLang="en-US"/>
-          </a:p>
-        </p:txBody>
-      </p:sp>
-      <p:sp>
-        <p:nvSpPr>
-          <p:cNvPr id="3" name="Shape 1"/>
-          <p:cNvSpPr/>
-          <p:nvPr/>
-        </p:nvSpPr>
-        <p:spPr>
-          <a:xfrm>
-            <a:off x="0" y="0"/>
-            <a:ext cx="9144000" cy="73152"/>
-          </a:xfrm>
-          <a:prstGeom prst="rect">
-            <a:avLst/>
-          </a:prstGeom>
-          <a:solidFill>
-            <a:srgbClr val="00E47C"/>
-          </a:solidFill>
-          <a:ln/>
-        </p:spPr>
-        <p:txBody>
-          <a:bodyPr/>
-          <a:lstStyle/>
-          <a:p>
-            <a:endParaRPr lang="zh-CN" altLang="en-US"/>
-          </a:p>
-        </p:txBody>
-      </p:sp>
-      <p:sp>
-        <p:nvSpPr>
-          <p:cNvPr id="4" name="Text 2"/>
-          <p:cNvSpPr/>
-          <p:nvPr/>
-        </p:nvSpPr>
-        <p:spPr>
-          <a:xfrm>
-            <a:off x="365760" y="0"/>
-            <a:ext cx="8412480" cy="685800"/>
-          </a:xfrm>
-          <a:prstGeom prst="rect">
-            <a:avLst/>
-          </a:prstGeom>
-          <a:noFill/>
-          <a:ln/>
-        </p:spPr>
-        <p:txBody>
-          <a:bodyPr wrap="square" lIns="0" tIns="0" rIns="0" bIns="0" rtlCol="0" anchor="ctr"/>
-          <a:lstStyle/>
-          <a:p>
-            <a:pPr marL="0" indent="0">
-              <a:buNone/>
-            </a:pPr>
-            <a:r>
-              <a:rPr lang="en-US" sz="1700" b="1" dirty="0">
-                <a:solidFill>
-                  <a:srgbClr val="FFFFFF"/>
-                </a:solidFill>
-                <a:latin typeface="Arial" pitchFamily="34" charset="0"/>
-                <a:ea typeface="Arial" pitchFamily="34" charset="-122"/>
-                <a:cs typeface="Arial" pitchFamily="34" charset="-120"/>
-              </a:rPr>
-              <a:t>BI vs 竞品：关键维度对比 | BI vs Competitors — 5-Dimension Comparison</a:t>
-            </a:r>
-            <a:endParaRPr lang="en-US" sz="1700" dirty="0"/>
-          </a:p>
-        </p:txBody>
-      </p:sp>
-      <p:sp>
-        <p:nvSpPr>
-          <p:cNvPr id="5" name="Shape 3"/>
-          <p:cNvSpPr/>
-          <p:nvPr/>
-        </p:nvSpPr>
-        <p:spPr>
-          <a:xfrm>
-            <a:off x="365760" y="804672"/>
-            <a:ext cx="1463040" cy="502920"/>
-          </a:xfrm>
-          <a:prstGeom prst="rect">
-            <a:avLst/>
-          </a:prstGeom>
-          <a:solidFill>
-            <a:srgbClr val="08312A"/>
-          </a:solidFill>
-          <a:ln/>
-        </p:spPr>
-        <p:txBody>
-          <a:bodyPr/>
-          <a:lstStyle/>
-          <a:p>
-            <a:endParaRPr lang="zh-CN" altLang="en-US"/>
-          </a:p>
-        </p:txBody>
-      </p:sp>
-      <p:sp>
-        <p:nvSpPr>
-          <p:cNvPr id="6" name="Text 4"/>
-          <p:cNvSpPr/>
-          <p:nvPr/>
-        </p:nvSpPr>
-        <p:spPr>
-          <a:xfrm>
-            <a:off x="365760" y="804672"/>
-            <a:ext cx="1463040" cy="502920"/>
-          </a:xfrm>
-          <a:prstGeom prst="rect">
-            <a:avLst/>
-          </a:prstGeom>
-          <a:noFill/>
-          <a:ln/>
-        </p:spPr>
-        <p:txBody>
-          <a:bodyPr wrap="square" lIns="0" tIns="0" rIns="0" bIns="0" rtlCol="0" anchor="ctr"/>
-          <a:lstStyle/>
-          <a:p>
-            <a:pPr marL="0" indent="0" algn="ctr">
-              <a:buNone/>
-            </a:pPr>
-            <a:r>
-              <a:rPr lang="en-US" sz="900" b="1" dirty="0">
-                <a:solidFill>
-                  <a:srgbClr val="FFFFFF"/>
-                </a:solidFill>
-                <a:latin typeface="Arial" pitchFamily="34" charset="0"/>
-                <a:ea typeface="Arial" pitchFamily="34" charset="-122"/>
-                <a:cs typeface="Arial" pitchFamily="34" charset="-120"/>
-              </a:rPr>
-              <a:t>维度 Dimension</a:t>
-            </a:r>
-            <a:endParaRPr lang="en-US" sz="900" dirty="0"/>
-          </a:p>
-        </p:txBody>
-      </p:sp>
-      <p:sp>
-        <p:nvSpPr>
-          <p:cNvPr id="7" name="Shape 5"/>
-          <p:cNvSpPr/>
-          <p:nvPr/>
-        </p:nvSpPr>
-        <p:spPr>
-          <a:xfrm>
-            <a:off x="1828800" y="804672"/>
-            <a:ext cx="1828800" cy="502920"/>
-          </a:xfrm>
-          <a:prstGeom prst="rect">
-            <a:avLst/>
-          </a:prstGeom>
-          <a:solidFill>
-            <a:srgbClr val="08312A"/>
-          </a:solidFill>
-          <a:ln/>
-        </p:spPr>
-        <p:txBody>
-          <a:bodyPr/>
-          <a:lstStyle/>
-          <a:p>
-            <a:endParaRPr lang="zh-CN" altLang="en-US"/>
-          </a:p>
-        </p:txBody>
-      </p:sp>
-      <p:sp>
-        <p:nvSpPr>
-          <p:cNvPr id="8" name="Text 6"/>
-          <p:cNvSpPr/>
-          <p:nvPr/>
-        </p:nvSpPr>
-        <p:spPr>
-          <a:xfrm>
-            <a:off x="1828800" y="804672"/>
-            <a:ext cx="1828800" cy="502920"/>
-          </a:xfrm>
-          <a:prstGeom prst="rect">
-            <a:avLst/>
-          </a:prstGeom>
-          <a:noFill/>
-          <a:ln/>
-        </p:spPr>
-        <p:txBody>
-          <a:bodyPr wrap="square" lIns="0" tIns="0" rIns="0" bIns="0" rtlCol="0" anchor="ctr"/>
-          <a:lstStyle/>
-          <a:p>
-            <a:pPr marL="0" indent="0" algn="ctr">
-              <a:buNone/>
-            </a:pPr>
-            <a:r>
-              <a:rPr lang="en-US" sz="900" b="1" dirty="0">
-                <a:solidFill>
-                  <a:srgbClr val="FFFFFF"/>
-                </a:solidFill>
-                <a:latin typeface="Arial" pitchFamily="34" charset="0"/>
-                <a:ea typeface="Arial" pitchFamily="34" charset="-122"/>
-                <a:cs typeface="Arial" pitchFamily="34" charset="-120"/>
-              </a:rPr>
-              <a:t>BI Boehringer</a:t>
-            </a:r>
-            <a:endParaRPr lang="en-US" sz="900" dirty="0"/>
-          </a:p>
-        </p:txBody>
-      </p:sp>
-      <p:sp>
-        <p:nvSpPr>
-          <p:cNvPr id="9" name="Shape 7"/>
-          <p:cNvSpPr/>
-          <p:nvPr/>
-        </p:nvSpPr>
-        <p:spPr>
-          <a:xfrm>
-            <a:off x="3657600" y="804672"/>
-            <a:ext cx="1737360" cy="502920"/>
-          </a:xfrm>
-          <a:prstGeom prst="rect">
-            <a:avLst/>
-          </a:prstGeom>
-          <a:solidFill>
-            <a:srgbClr val="08312A"/>
-          </a:solidFill>
-          <a:ln/>
-        </p:spPr>
-        <p:txBody>
-          <a:bodyPr/>
-          <a:lstStyle/>
-          <a:p>
-            <a:endParaRPr lang="zh-CN" altLang="en-US"/>
-          </a:p>
-        </p:txBody>
-      </p:sp>
-      <p:sp>
-        <p:nvSpPr>
-          <p:cNvPr id="10" name="Text 8"/>
-          <p:cNvSpPr/>
-          <p:nvPr/>
-        </p:nvSpPr>
-        <p:spPr>
-          <a:xfrm>
-            <a:off x="3657600" y="804672"/>
-            <a:ext cx="1737360" cy="502920"/>
-          </a:xfrm>
-          <a:prstGeom prst="rect">
-            <a:avLst/>
-          </a:prstGeom>
-          <a:noFill/>
-          <a:ln/>
-        </p:spPr>
-        <p:txBody>
-          <a:bodyPr wrap="square" lIns="0" tIns="0" rIns="0" bIns="0" rtlCol="0" anchor="ctr"/>
-          <a:lstStyle/>
-          <a:p>
-            <a:pPr marL="0" indent="0" algn="ctr">
-              <a:buNone/>
-            </a:pPr>
-            <a:r>
-              <a:rPr lang="en-US" sz="900" b="1" dirty="0">
-                <a:solidFill>
-                  <a:srgbClr val="FFFFFF"/>
-                </a:solidFill>
-                <a:latin typeface="Arial" pitchFamily="34" charset="0"/>
-                <a:ea typeface="Arial" pitchFamily="34" charset="-122"/>
-                <a:cs typeface="Arial" pitchFamily="34" charset="-120"/>
-              </a:rPr>
-              <a:t>Zoetis 硕腾</a:t>
-            </a:r>
-            <a:endParaRPr lang="en-US" sz="900" dirty="0"/>
-          </a:p>
-        </p:txBody>
-      </p:sp>
-      <p:sp>
-        <p:nvSpPr>
-          <p:cNvPr id="11" name="Shape 9"/>
-          <p:cNvSpPr/>
-          <p:nvPr/>
-        </p:nvSpPr>
-        <p:spPr>
-          <a:xfrm>
-            <a:off x="5394960" y="804672"/>
-            <a:ext cx="1600200" cy="502920"/>
-          </a:xfrm>
-          <a:prstGeom prst="rect">
-            <a:avLst/>
-          </a:prstGeom>
-          <a:solidFill>
-            <a:srgbClr val="08312A"/>
-          </a:solidFill>
-          <a:ln/>
-        </p:spPr>
-        <p:txBody>
-          <a:bodyPr/>
-          <a:lstStyle/>
-          <a:p>
-            <a:endParaRPr lang="zh-CN" altLang="en-US"/>
-          </a:p>
-        </p:txBody>
-      </p:sp>
-      <p:sp>
-        <p:nvSpPr>
-          <p:cNvPr id="12" name="Text 10"/>
-          <p:cNvSpPr/>
-          <p:nvPr/>
-        </p:nvSpPr>
-        <p:spPr>
-          <a:xfrm>
-            <a:off x="5394960" y="804672"/>
-            <a:ext cx="1600200" cy="502920"/>
-          </a:xfrm>
-          <a:prstGeom prst="rect">
-            <a:avLst/>
-          </a:prstGeom>
-          <a:noFill/>
-          <a:ln/>
-        </p:spPr>
-        <p:txBody>
-          <a:bodyPr wrap="square" lIns="0" tIns="0" rIns="0" bIns="0" rtlCol="0" anchor="ctr"/>
-          <a:lstStyle/>
-          <a:p>
-            <a:pPr marL="0" indent="0" algn="ctr">
-              <a:buNone/>
-            </a:pPr>
-            <a:r>
-              <a:rPr lang="en-US" sz="900" b="1" dirty="0">
-                <a:solidFill>
-                  <a:srgbClr val="FFFFFF"/>
-                </a:solidFill>
-                <a:latin typeface="Arial" pitchFamily="34" charset="0"/>
-                <a:ea typeface="Arial" pitchFamily="34" charset="-122"/>
-                <a:cs typeface="Arial" pitchFamily="34" charset="-120"/>
-              </a:rPr>
-              <a:t>Elanco 礼蓝</a:t>
-            </a:r>
-            <a:endParaRPr lang="en-US" sz="900" dirty="0"/>
-          </a:p>
-        </p:txBody>
-      </p:sp>
-      <p:sp>
-        <p:nvSpPr>
-          <p:cNvPr id="13" name="Shape 11"/>
-          <p:cNvSpPr/>
-          <p:nvPr/>
-        </p:nvSpPr>
-        <p:spPr>
-          <a:xfrm>
-            <a:off x="6995160" y="804672"/>
-            <a:ext cx="1600200" cy="502920"/>
-          </a:xfrm>
-          <a:prstGeom prst="rect">
-            <a:avLst/>
-          </a:prstGeom>
-          <a:solidFill>
-            <a:srgbClr val="08312A"/>
-          </a:solidFill>
-          <a:ln/>
-        </p:spPr>
-        <p:txBody>
-          <a:bodyPr/>
-          <a:lstStyle/>
-          <a:p>
-            <a:endParaRPr lang="zh-CN" altLang="en-US"/>
-          </a:p>
-        </p:txBody>
-      </p:sp>
-      <p:sp>
-        <p:nvSpPr>
-          <p:cNvPr id="14" name="Text 12"/>
-          <p:cNvSpPr/>
-          <p:nvPr/>
-        </p:nvSpPr>
-        <p:spPr>
-          <a:xfrm>
-            <a:off x="6995160" y="804672"/>
-            <a:ext cx="1600200" cy="502920"/>
-          </a:xfrm>
-          <a:prstGeom prst="rect">
-            <a:avLst/>
-          </a:prstGeom>
-          <a:noFill/>
-          <a:ln/>
-        </p:spPr>
-        <p:txBody>
-          <a:bodyPr wrap="square" lIns="0" tIns="0" rIns="0" bIns="0" rtlCol="0" anchor="ctr"/>
-          <a:lstStyle/>
-          <a:p>
-            <a:pPr marL="0" indent="0" algn="ctr">
-              <a:buNone/>
-            </a:pPr>
-            <a:r>
-              <a:rPr lang="en-US" sz="900" b="1" dirty="0">
-                <a:solidFill>
-                  <a:srgbClr val="FFFFFF"/>
-                </a:solidFill>
-                <a:latin typeface="Arial" pitchFamily="34" charset="0"/>
-                <a:ea typeface="Arial" pitchFamily="34" charset="-122"/>
-                <a:cs typeface="Arial" pitchFamily="34" charset="-120"/>
-              </a:rPr>
-              <a:t>Haizhou 海正</a:t>
-            </a:r>
-            <a:endParaRPr lang="en-US" sz="900" dirty="0"/>
-          </a:p>
-        </p:txBody>
-      </p:sp>
-      <p:sp>
-        <p:nvSpPr>
-          <p:cNvPr id="15" name="Shape 13"/>
-          <p:cNvSpPr/>
-          <p:nvPr/>
-        </p:nvSpPr>
-        <p:spPr>
-          <a:xfrm>
-            <a:off x="365760" y="1307592"/>
-            <a:ext cx="1463040" cy="621792"/>
-          </a:xfrm>
-          <a:prstGeom prst="rect">
-            <a:avLst/>
-          </a:prstGeom>
-          <a:solidFill>
-            <a:srgbClr val="F5FBF7"/>
-          </a:solidFill>
-          <a:ln w="6350">
-            <a:solidFill>
-              <a:srgbClr val="DDDDDD"/>
-            </a:solidFill>
-            <a:prstDash val="solid"/>
-          </a:ln>
-        </p:spPr>
-        <p:txBody>
-          <a:bodyPr/>
-          <a:lstStyle/>
-          <a:p>
-            <a:endParaRPr lang="zh-CN" altLang="en-US"/>
-          </a:p>
-        </p:txBody>
-      </p:sp>
-      <p:sp>
-        <p:nvSpPr>
-          <p:cNvPr id="16" name="Text 14"/>
-          <p:cNvSpPr/>
-          <p:nvPr/>
-        </p:nvSpPr>
-        <p:spPr>
-          <a:xfrm>
-            <a:off x="411480" y="1307592"/>
-            <a:ext cx="1371600" cy="621792"/>
-          </a:xfrm>
-          <a:prstGeom prst="rect">
-            <a:avLst/>
-          </a:prstGeom>
-          <a:noFill/>
-          <a:ln/>
-        </p:spPr>
-        <p:txBody>
-          <a:bodyPr wrap="square" lIns="0" tIns="0" rIns="0" bIns="0" rtlCol="0" anchor="ctr"/>
-          <a:lstStyle/>
-          <a:p>
-            <a:pPr marL="0" indent="0" algn="ctr">
-              <a:buNone/>
-            </a:pPr>
-            <a:r>
-              <a:rPr lang="en-US" sz="800" dirty="0">
-                <a:solidFill>
-                  <a:srgbClr val="2E2D2C"/>
-                </a:solidFill>
-                <a:latin typeface="Arial" pitchFamily="34" charset="0"/>
-                <a:ea typeface="Arial" pitchFamily="34" charset="-122"/>
-                <a:cs typeface="Arial" pitchFamily="34" charset="-120"/>
-              </a:rPr>
-              <a:t>核心产品</a:t>
-            </a:r>
-            <a:endParaRPr lang="en-US" sz="800" dirty="0"/>
-          </a:p>
-          <a:p>
-            <a:pPr marL="0" indent="0" algn="ctr">
-              <a:buNone/>
-            </a:pPr>
-            <a:r>
-              <a:rPr lang="en-US" sz="800" dirty="0">
-                <a:solidFill>
-                  <a:srgbClr val="2E2D2C"/>
-                </a:solidFill>
-                <a:latin typeface="Arial" pitchFamily="34" charset="0"/>
-                <a:ea typeface="Arial" pitchFamily="34" charset="-122"/>
-                <a:cs typeface="Arial" pitchFamily="34" charset="-120"/>
-              </a:rPr>
-              <a:t>Core Products</a:t>
-            </a:r>
-            <a:endParaRPr lang="en-US" sz="800" dirty="0"/>
-          </a:p>
-        </p:txBody>
-      </p:sp>
-      <p:sp>
-        <p:nvSpPr>
-          <p:cNvPr id="17" name="Shape 15"/>
-          <p:cNvSpPr/>
-          <p:nvPr/>
-        </p:nvSpPr>
-        <p:spPr>
-          <a:xfrm>
-            <a:off x="1828800" y="1307592"/>
-            <a:ext cx="1828800" cy="621792"/>
-          </a:xfrm>
-          <a:prstGeom prst="rect">
-            <a:avLst/>
-          </a:prstGeom>
-          <a:solidFill>
-            <a:srgbClr val="E8FFF2"/>
-          </a:solidFill>
-          <a:ln w="6350">
-            <a:solidFill>
-              <a:srgbClr val="DDDDDD"/>
-            </a:solidFill>
-            <a:prstDash val="solid"/>
-          </a:ln>
-        </p:spPr>
-        <p:txBody>
-          <a:bodyPr/>
-          <a:lstStyle/>
-          <a:p>
-            <a:endParaRPr lang="zh-CN" altLang="en-US"/>
-          </a:p>
-        </p:txBody>
-      </p:sp>
-      <p:sp>
-        <p:nvSpPr>
-          <p:cNvPr id="18" name="Text 16"/>
-          <p:cNvSpPr/>
-          <p:nvPr/>
-        </p:nvSpPr>
-        <p:spPr>
-          <a:xfrm>
-            <a:off x="1874520" y="1307592"/>
-            <a:ext cx="1737360" cy="621792"/>
-          </a:xfrm>
-          <a:prstGeom prst="rect">
-            <a:avLst/>
-          </a:prstGeom>
-          <a:noFill/>
-          <a:ln/>
-        </p:spPr>
-        <p:txBody>
-          <a:bodyPr wrap="square" lIns="0" tIns="0" rIns="0" bIns="0" rtlCol="0" anchor="ctr"/>
-          <a:lstStyle/>
-          <a:p>
-            <a:pPr marL="0" indent="0" algn="ctr">
-              <a:buNone/>
-            </a:pPr>
-            <a:r>
-              <a:rPr lang="en-US" sz="800" dirty="0">
-                <a:solidFill>
-                  <a:srgbClr val="08312A"/>
-                </a:solidFill>
-                <a:latin typeface="Arial" pitchFamily="34" charset="0"/>
-                <a:ea typeface="Arial" pitchFamily="34" charset="-122"/>
-                <a:cs typeface="Arial" pitchFamily="34" charset="-120"/>
-              </a:rPr>
-              <a:t>超可信、NexGard COMBO</a:t>
-            </a:r>
-            <a:endParaRPr lang="en-US" sz="800" dirty="0"/>
-          </a:p>
-          <a:p>
-            <a:pPr marL="0" indent="0" algn="ctr">
-              <a:buNone/>
-            </a:pPr>
-            <a:r>
-              <a:rPr lang="en-US" sz="800" dirty="0">
-                <a:solidFill>
-                  <a:srgbClr val="08312A"/>
-                </a:solidFill>
-                <a:latin typeface="Arial" pitchFamily="34" charset="0"/>
-                <a:ea typeface="Arial" pitchFamily="34" charset="-122"/>
-                <a:cs typeface="Arial" pitchFamily="34" charset="-120"/>
-              </a:rPr>
-              <a:t>（驱虫+抗寄生虫）</a:t>
-            </a:r>
-            <a:endParaRPr lang="en-US" sz="800" dirty="0"/>
-          </a:p>
-        </p:txBody>
-      </p:sp>
-      <p:sp>
-        <p:nvSpPr>
-          <p:cNvPr id="19" name="Shape 17"/>
-          <p:cNvSpPr/>
-          <p:nvPr/>
-        </p:nvSpPr>
-        <p:spPr>
-          <a:xfrm>
-            <a:off x="3657600" y="1307592"/>
-            <a:ext cx="1737360" cy="621792"/>
-          </a:xfrm>
-          <a:prstGeom prst="rect">
-            <a:avLst/>
-          </a:prstGeom>
-          <a:solidFill>
-            <a:srgbClr val="F5FBF7"/>
-          </a:solidFill>
-          <a:ln w="6350">
-            <a:solidFill>
-              <a:srgbClr val="DDDDDD"/>
-            </a:solidFill>
-            <a:prstDash val="solid"/>
-          </a:ln>
-        </p:spPr>
-        <p:txBody>
-          <a:bodyPr/>
-          <a:lstStyle/>
-          <a:p>
-            <a:endParaRPr lang="zh-CN" altLang="en-US"/>
-          </a:p>
-        </p:txBody>
-      </p:sp>
-      <p:sp>
-        <p:nvSpPr>
-          <p:cNvPr id="20" name="Text 18"/>
-          <p:cNvSpPr/>
-          <p:nvPr/>
-        </p:nvSpPr>
-        <p:spPr>
-          <a:xfrm>
-            <a:off x="3703320" y="1307592"/>
-            <a:ext cx="1645920" cy="621792"/>
-          </a:xfrm>
-          <a:prstGeom prst="rect">
-            <a:avLst/>
-          </a:prstGeom>
-          <a:noFill/>
-          <a:ln/>
-        </p:spPr>
-        <p:txBody>
-          <a:bodyPr wrap="square" lIns="0" tIns="0" rIns="0" bIns="0" rtlCol="0" anchor="ctr"/>
-          <a:lstStyle/>
-          <a:p>
-            <a:pPr marL="0" indent="0" algn="ctr">
-              <a:buNone/>
-            </a:pPr>
-            <a:r>
-              <a:rPr lang="en-US" sz="800" dirty="0">
-                <a:solidFill>
-                  <a:srgbClr val="2E2D2C"/>
-                </a:solidFill>
-                <a:latin typeface="Arial" pitchFamily="34" charset="0"/>
-                <a:ea typeface="Arial" pitchFamily="34" charset="-122"/>
-                <a:cs typeface="Arial" pitchFamily="34" charset="-120"/>
-              </a:rPr>
-              <a:t>驱虫药、疫苗</a:t>
-            </a:r>
-            <a:endParaRPr lang="en-US" sz="800" dirty="0"/>
-          </a:p>
-          <a:p>
-            <a:pPr marL="0" indent="0" algn="ctr">
-              <a:buNone/>
-            </a:pPr>
-            <a:r>
-              <a:rPr lang="en-US" sz="800" dirty="0">
-                <a:solidFill>
-                  <a:srgbClr val="2E2D2C"/>
-                </a:solidFill>
-                <a:latin typeface="Arial" pitchFamily="34" charset="0"/>
-                <a:ea typeface="Arial" pitchFamily="34" charset="-122"/>
-                <a:cs typeface="Arial" pitchFamily="34" charset="-120"/>
-              </a:rPr>
-              <a:t>高价值处方药</a:t>
-            </a:r>
-            <a:endParaRPr lang="en-US" sz="800" dirty="0"/>
-          </a:p>
-        </p:txBody>
-      </p:sp>
-      <p:sp>
-        <p:nvSpPr>
-          <p:cNvPr id="21" name="Shape 19"/>
-          <p:cNvSpPr/>
-          <p:nvPr/>
-        </p:nvSpPr>
-        <p:spPr>
-          <a:xfrm>
-            <a:off x="5394960" y="1307592"/>
-            <a:ext cx="1600200" cy="621792"/>
-          </a:xfrm>
-          <a:prstGeom prst="rect">
-            <a:avLst/>
-          </a:prstGeom>
-          <a:solidFill>
-            <a:srgbClr val="F5FBF7"/>
-          </a:solidFill>
-          <a:ln w="6350">
-            <a:solidFill>
-              <a:srgbClr val="DDDDDD"/>
-            </a:solidFill>
-            <a:prstDash val="solid"/>
-          </a:ln>
-        </p:spPr>
-        <p:txBody>
-          <a:bodyPr/>
-          <a:lstStyle/>
-          <a:p>
-            <a:endParaRPr lang="zh-CN" altLang="en-US"/>
-          </a:p>
-        </p:txBody>
-      </p:sp>
-      <p:sp>
-        <p:nvSpPr>
-          <p:cNvPr id="22" name="Text 20"/>
-          <p:cNvSpPr/>
-          <p:nvPr/>
-        </p:nvSpPr>
-        <p:spPr>
-          <a:xfrm>
-            <a:off x="5440680" y="1307592"/>
-            <a:ext cx="1508760" cy="621792"/>
-          </a:xfrm>
-          <a:prstGeom prst="rect">
-            <a:avLst/>
-          </a:prstGeom>
-          <a:noFill/>
-          <a:ln/>
-        </p:spPr>
-        <p:txBody>
-          <a:bodyPr wrap="square" lIns="0" tIns="0" rIns="0" bIns="0" rtlCol="0" anchor="ctr"/>
-          <a:lstStyle/>
-          <a:p>
-            <a:pPr marL="0" indent="0" algn="ctr">
-              <a:buNone/>
-            </a:pPr>
-            <a:r>
-              <a:rPr lang="en-US" sz="800" dirty="0">
-                <a:solidFill>
-                  <a:srgbClr val="2E2D2C"/>
-                </a:solidFill>
-                <a:latin typeface="Arial" pitchFamily="34" charset="0"/>
-                <a:ea typeface="Arial" pitchFamily="34" charset="-122"/>
-                <a:cs typeface="Arial" pitchFamily="34" charset="-120"/>
-              </a:rPr>
-              <a:t>Zenrelia、Credelio Quattro</a:t>
-            </a:r>
-            <a:endParaRPr lang="en-US" sz="800" dirty="0"/>
-          </a:p>
-          <a:p>
-            <a:pPr marL="0" indent="0" algn="ctr">
-              <a:buNone/>
-            </a:pPr>
-            <a:r>
-              <a:rPr lang="en-US" sz="800" dirty="0">
-                <a:solidFill>
-                  <a:srgbClr val="2E2D2C"/>
-                </a:solidFill>
-                <a:latin typeface="Arial" pitchFamily="34" charset="0"/>
-                <a:ea typeface="Arial" pitchFamily="34" charset="-122"/>
-                <a:cs typeface="Arial" pitchFamily="34" charset="-120"/>
-              </a:rPr>
-              <a:t>（创新驱虫）</a:t>
-            </a:r>
-            <a:endParaRPr lang="en-US" sz="800" dirty="0"/>
-          </a:p>
-        </p:txBody>
-      </p:sp>
-      <p:sp>
-        <p:nvSpPr>
-          <p:cNvPr id="23" name="Shape 21"/>
-          <p:cNvSpPr/>
-          <p:nvPr/>
-        </p:nvSpPr>
-        <p:spPr>
-          <a:xfrm>
-            <a:off x="6995160" y="1307592"/>
-            <a:ext cx="1600200" cy="621792"/>
-          </a:xfrm>
-          <a:prstGeom prst="rect">
-            <a:avLst/>
-          </a:prstGeom>
-          <a:solidFill>
-            <a:srgbClr val="F5FBF7"/>
-          </a:solidFill>
-          <a:ln w="6350">
-            <a:solidFill>
-              <a:srgbClr val="DDDDDD"/>
-            </a:solidFill>
-            <a:prstDash val="solid"/>
-          </a:ln>
-        </p:spPr>
-        <p:txBody>
-          <a:bodyPr/>
-          <a:lstStyle/>
-          <a:p>
-            <a:endParaRPr lang="zh-CN" altLang="en-US"/>
-          </a:p>
-        </p:txBody>
-      </p:sp>
-      <p:sp>
-        <p:nvSpPr>
-          <p:cNvPr id="24" name="Text 22"/>
-          <p:cNvSpPr/>
-          <p:nvPr/>
-        </p:nvSpPr>
-        <p:spPr>
-          <a:xfrm>
-            <a:off x="7040880" y="1307592"/>
-            <a:ext cx="1508760" cy="621792"/>
-          </a:xfrm>
-          <a:prstGeom prst="rect">
-            <a:avLst/>
-          </a:prstGeom>
-          <a:noFill/>
-          <a:ln/>
-        </p:spPr>
-        <p:txBody>
-          <a:bodyPr wrap="square" lIns="0" tIns="0" rIns="0" bIns="0" rtlCol="0" anchor="ctr"/>
-          <a:lstStyle/>
-          <a:p>
-            <a:pPr marL="0" indent="0" algn="ctr">
-              <a:buNone/>
-            </a:pPr>
-            <a:r>
-              <a:rPr lang="en-US" sz="800" dirty="0">
-                <a:solidFill>
-                  <a:srgbClr val="2E2D2C"/>
-                </a:solidFill>
-                <a:latin typeface="Arial" pitchFamily="34" charset="0"/>
-                <a:ea typeface="Arial" pitchFamily="34" charset="-122"/>
-                <a:cs typeface="Arial" pitchFamily="34" charset="-120"/>
-              </a:rPr>
-              <a:t>海乐妙（猫驱虫第一）</a:t>
-            </a:r>
-            <a:endParaRPr lang="en-US" sz="800" dirty="0"/>
-          </a:p>
-          <a:p>
-            <a:pPr marL="0" indent="0" algn="ctr">
-              <a:buNone/>
-            </a:pPr>
-            <a:r>
-              <a:rPr lang="en-US" sz="800" dirty="0">
-                <a:solidFill>
-                  <a:srgbClr val="2E2D2C"/>
-                </a:solidFill>
-                <a:latin typeface="Arial" pitchFamily="34" charset="0"/>
-                <a:ea typeface="Arial" pitchFamily="34" charset="-122"/>
-                <a:cs typeface="Arial" pitchFamily="34" charset="-120"/>
-              </a:rPr>
-              <a:t>海妙哆（国产猫三联）</a:t>
-            </a:r>
-            <a:endParaRPr lang="en-US" sz="800" dirty="0"/>
-          </a:p>
-        </p:txBody>
-      </p:sp>
-      <p:sp>
-        <p:nvSpPr>
-          <p:cNvPr id="25" name="Shape 23"/>
-          <p:cNvSpPr/>
-          <p:nvPr/>
-        </p:nvSpPr>
-        <p:spPr>
-          <a:xfrm>
-            <a:off x="365760" y="1929384"/>
-            <a:ext cx="1463040" cy="621792"/>
-          </a:xfrm>
-          <a:prstGeom prst="rect">
-            <a:avLst/>
-          </a:prstGeom>
-          <a:solidFill>
-            <a:srgbClr val="FFFFFF"/>
-          </a:solidFill>
-          <a:ln w="6350">
-            <a:solidFill>
-              <a:srgbClr val="DDDDDD"/>
-            </a:solidFill>
-            <a:prstDash val="solid"/>
-          </a:ln>
-        </p:spPr>
-        <p:txBody>
-          <a:bodyPr/>
-          <a:lstStyle/>
-          <a:p>
-            <a:endParaRPr lang="zh-CN" altLang="en-US"/>
-          </a:p>
-        </p:txBody>
-      </p:sp>
-      <p:sp>
-        <p:nvSpPr>
-          <p:cNvPr id="26" name="Text 24"/>
-          <p:cNvSpPr/>
-          <p:nvPr/>
-        </p:nvSpPr>
-        <p:spPr>
-          <a:xfrm>
-            <a:off x="411480" y="1929384"/>
-            <a:ext cx="1371600" cy="621792"/>
-          </a:xfrm>
-          <a:prstGeom prst="rect">
-            <a:avLst/>
-          </a:prstGeom>
-          <a:noFill/>
-          <a:ln/>
-        </p:spPr>
-        <p:txBody>
-          <a:bodyPr wrap="square" lIns="0" tIns="0" rIns="0" bIns="0" rtlCol="0" anchor="ctr"/>
-          <a:lstStyle/>
-          <a:p>
-            <a:pPr marL="0" indent="0" algn="ctr">
-              <a:buNone/>
-            </a:pPr>
-            <a:r>
-              <a:rPr lang="en-US" sz="800" dirty="0">
-                <a:solidFill>
-                  <a:srgbClr val="2E2D2C"/>
-                </a:solidFill>
-                <a:latin typeface="Arial" pitchFamily="34" charset="0"/>
-                <a:ea typeface="Arial" pitchFamily="34" charset="-122"/>
-                <a:cs typeface="Arial" pitchFamily="34" charset="-120"/>
-              </a:rPr>
-              <a:t>技术优势</a:t>
-            </a:r>
-            <a:endParaRPr lang="en-US" sz="800" dirty="0"/>
-          </a:p>
-          <a:p>
-            <a:pPr marL="0" indent="0" algn="ctr">
-              <a:buNone/>
-            </a:pPr>
-            <a:r>
-              <a:rPr lang="en-US" sz="800" dirty="0">
-                <a:solidFill>
-                  <a:srgbClr val="2E2D2C"/>
-                </a:solidFill>
-                <a:latin typeface="Arial" pitchFamily="34" charset="0"/>
-                <a:ea typeface="Arial" pitchFamily="34" charset="-122"/>
-                <a:cs typeface="Arial" pitchFamily="34" charset="-120"/>
-              </a:rPr>
-              <a:t>Tech Edge</a:t>
-            </a:r>
-            <a:endParaRPr lang="en-US" sz="800" dirty="0"/>
-          </a:p>
-        </p:txBody>
-      </p:sp>
-      <p:sp>
-        <p:nvSpPr>
-          <p:cNvPr id="27" name="Shape 25"/>
-          <p:cNvSpPr/>
-          <p:nvPr/>
-        </p:nvSpPr>
-        <p:spPr>
-          <a:xfrm>
-            <a:off x="1828800" y="1929384"/>
-            <a:ext cx="1828800" cy="621792"/>
-          </a:xfrm>
-          <a:prstGeom prst="rect">
-            <a:avLst/>
-          </a:prstGeom>
-          <a:solidFill>
-            <a:srgbClr val="E8FFF2"/>
-          </a:solidFill>
-          <a:ln w="6350">
-            <a:solidFill>
-              <a:srgbClr val="DDDDDD"/>
-            </a:solidFill>
-            <a:prstDash val="solid"/>
-          </a:ln>
-        </p:spPr>
-        <p:txBody>
-          <a:bodyPr/>
-          <a:lstStyle/>
-          <a:p>
-            <a:endParaRPr lang="zh-CN" altLang="en-US"/>
-          </a:p>
-        </p:txBody>
-      </p:sp>
-      <p:sp>
-        <p:nvSpPr>
-          <p:cNvPr id="28" name="Text 26"/>
-          <p:cNvSpPr/>
-          <p:nvPr/>
-        </p:nvSpPr>
-        <p:spPr>
-          <a:xfrm>
-            <a:off x="1874520" y="1929384"/>
-            <a:ext cx="1737360" cy="621792"/>
-          </a:xfrm>
-          <a:prstGeom prst="rect">
-            <a:avLst/>
-          </a:prstGeom>
-          <a:noFill/>
-          <a:ln/>
-        </p:spPr>
-        <p:txBody>
-          <a:bodyPr wrap="square" lIns="0" tIns="0" rIns="0" bIns="0" rtlCol="0" anchor="ctr"/>
-          <a:lstStyle/>
-          <a:p>
-            <a:pPr marL="0" indent="0" algn="ctr">
-              <a:buNone/>
-            </a:pPr>
-            <a:r>
-              <a:rPr lang="en-US" sz="800" dirty="0">
-                <a:solidFill>
-                  <a:srgbClr val="08312A"/>
-                </a:solidFill>
-                <a:latin typeface="Arial" pitchFamily="34" charset="0"/>
-                <a:ea typeface="Arial" pitchFamily="34" charset="-122"/>
-                <a:cs typeface="Arial" pitchFamily="34" charset="-120"/>
-              </a:rPr>
-              <a:t>异恶唑啉类创新药</a:t>
-            </a:r>
-            <a:endParaRPr lang="en-US" sz="800" dirty="0"/>
-          </a:p>
-          <a:p>
-            <a:pPr marL="0" indent="0" algn="ctr">
-              <a:buNone/>
-            </a:pPr>
-            <a:r>
-              <a:rPr lang="en-US" sz="800" dirty="0">
-                <a:solidFill>
-                  <a:srgbClr val="08312A"/>
-                </a:solidFill>
-                <a:latin typeface="Arial" pitchFamily="34" charset="0"/>
-                <a:ea typeface="Arial" pitchFamily="34" charset="-122"/>
-                <a:cs typeface="Arial" pitchFamily="34" charset="-120"/>
-              </a:rPr>
-              <a:t>猫糖尿病口服在研</a:t>
-            </a:r>
-            <a:endParaRPr lang="en-US" sz="800" dirty="0"/>
-          </a:p>
-        </p:txBody>
-      </p:sp>
-      <p:sp>
-        <p:nvSpPr>
-          <p:cNvPr id="29" name="Shape 27"/>
-          <p:cNvSpPr/>
-          <p:nvPr/>
-        </p:nvSpPr>
-        <p:spPr>
-          <a:xfrm>
-            <a:off x="3657600" y="1929384"/>
-            <a:ext cx="1737360" cy="621792"/>
-          </a:xfrm>
-          <a:prstGeom prst="rect">
-            <a:avLst/>
-          </a:prstGeom>
-          <a:solidFill>
-            <a:srgbClr val="FFFFFF"/>
-          </a:solidFill>
-          <a:ln w="6350">
-            <a:solidFill>
-              <a:srgbClr val="DDDDDD"/>
-            </a:solidFill>
-            <a:prstDash val="solid"/>
-          </a:ln>
-        </p:spPr>
-        <p:txBody>
-          <a:bodyPr/>
-          <a:lstStyle/>
-          <a:p>
-            <a:endParaRPr lang="zh-CN" altLang="en-US"/>
-          </a:p>
-        </p:txBody>
-      </p:sp>
-      <p:sp>
-        <p:nvSpPr>
-          <p:cNvPr id="30" name="Text 28"/>
-          <p:cNvSpPr/>
-          <p:nvPr/>
-        </p:nvSpPr>
-        <p:spPr>
-          <a:xfrm>
-            <a:off x="3703320" y="1929384"/>
-            <a:ext cx="1645920" cy="621792"/>
-          </a:xfrm>
-          <a:prstGeom prst="rect">
-            <a:avLst/>
-          </a:prstGeom>
-          <a:noFill/>
-          <a:ln/>
-        </p:spPr>
-        <p:txBody>
-          <a:bodyPr wrap="square" lIns="0" tIns="0" rIns="0" bIns="0" rtlCol="0" anchor="ctr"/>
-          <a:lstStyle/>
-          <a:p>
-            <a:pPr marL="0" indent="0" algn="ctr">
-              <a:buNone/>
-            </a:pPr>
-            <a:r>
-              <a:rPr lang="en-US" sz="800" dirty="0">
-                <a:solidFill>
-                  <a:srgbClr val="2E2D2C"/>
-                </a:solidFill>
-                <a:latin typeface="Arial" pitchFamily="34" charset="0"/>
-                <a:ea typeface="Arial" pitchFamily="34" charset="-122"/>
-                <a:cs typeface="Arial" pitchFamily="34" charset="-120"/>
-              </a:rPr>
-              <a:t>手术机器人Ottava</a:t>
-            </a:r>
-            <a:endParaRPr lang="en-US" sz="800" dirty="0"/>
-          </a:p>
-          <a:p>
-            <a:pPr marL="0" indent="0" algn="ctr">
-              <a:buNone/>
-            </a:pPr>
-            <a:r>
-              <a:rPr lang="en-US" sz="800" dirty="0">
-                <a:solidFill>
-                  <a:srgbClr val="2E2D2C"/>
-                </a:solidFill>
-                <a:latin typeface="Arial" pitchFamily="34" charset="0"/>
-                <a:ea typeface="Arial" pitchFamily="34" charset="-122"/>
-                <a:cs typeface="Arial" pitchFamily="34" charset="-120"/>
-              </a:rPr>
-              <a:t>慢性病五大领域</a:t>
-            </a:r>
-            <a:endParaRPr lang="en-US" sz="800" dirty="0"/>
-          </a:p>
-        </p:txBody>
-      </p:sp>
-      <p:sp>
-        <p:nvSpPr>
-          <p:cNvPr id="31" name="Shape 29"/>
-          <p:cNvSpPr/>
-          <p:nvPr/>
-        </p:nvSpPr>
-        <p:spPr>
-          <a:xfrm>
-            <a:off x="5394960" y="1929384"/>
-            <a:ext cx="1600200" cy="621792"/>
-          </a:xfrm>
-          <a:prstGeom prst="rect">
-            <a:avLst/>
-          </a:prstGeom>
-          <a:solidFill>
-            <a:srgbClr val="FFFFFF"/>
-          </a:solidFill>
-          <a:ln w="6350">
-            <a:solidFill>
-              <a:srgbClr val="DDDDDD"/>
-            </a:solidFill>
-            <a:prstDash val="solid"/>
-          </a:ln>
-        </p:spPr>
-        <p:txBody>
-          <a:bodyPr/>
-          <a:lstStyle/>
-          <a:p>
-            <a:endParaRPr lang="zh-CN" altLang="en-US"/>
-          </a:p>
-        </p:txBody>
-      </p:sp>
-      <p:sp>
-        <p:nvSpPr>
-          <p:cNvPr id="32" name="Text 30"/>
-          <p:cNvSpPr/>
-          <p:nvPr/>
-        </p:nvSpPr>
-        <p:spPr>
-          <a:xfrm>
-            <a:off x="5440680" y="1929384"/>
-            <a:ext cx="1508760" cy="621792"/>
-          </a:xfrm>
-          <a:prstGeom prst="rect">
-            <a:avLst/>
-          </a:prstGeom>
-          <a:noFill/>
-          <a:ln/>
-        </p:spPr>
-        <p:txBody>
-          <a:bodyPr wrap="square" lIns="0" tIns="0" rIns="0" bIns="0" rtlCol="0" anchor="ctr"/>
-          <a:lstStyle/>
-          <a:p>
-            <a:pPr marL="0" indent="0" algn="ctr">
-              <a:buNone/>
-            </a:pPr>
-            <a:r>
-              <a:rPr lang="en-US" sz="800" dirty="0">
-                <a:solidFill>
-                  <a:srgbClr val="2E2D2C"/>
-                </a:solidFill>
-                <a:latin typeface="Arial" pitchFamily="34" charset="0"/>
-                <a:ea typeface="Arial" pitchFamily="34" charset="-122"/>
-                <a:cs typeface="Arial" pitchFamily="34" charset="-120"/>
-              </a:rPr>
-              <a:t>JAK抑制剂Zenrelia</a:t>
-            </a:r>
-            <a:endParaRPr lang="en-US" sz="800" dirty="0"/>
-          </a:p>
-          <a:p>
-            <a:pPr marL="0" indent="0" algn="ctr">
-              <a:buNone/>
-            </a:pPr>
-            <a:r>
-              <a:rPr lang="en-US" sz="800" dirty="0">
-                <a:solidFill>
-                  <a:srgbClr val="2E2D2C"/>
-                </a:solidFill>
-                <a:latin typeface="Arial" pitchFamily="34" charset="0"/>
-                <a:ea typeface="Arial" pitchFamily="34" charset="-122"/>
-                <a:cs typeface="Arial" pitchFamily="34" charset="-120"/>
-              </a:rPr>
-              <a:t>Quattro放量</a:t>
-            </a:r>
-            <a:endParaRPr lang="en-US" sz="800" dirty="0"/>
-          </a:p>
-        </p:txBody>
-      </p:sp>
-      <p:sp>
-        <p:nvSpPr>
-          <p:cNvPr id="33" name="Shape 31"/>
-          <p:cNvSpPr/>
-          <p:nvPr/>
-        </p:nvSpPr>
-        <p:spPr>
-          <a:xfrm>
-            <a:off x="6995160" y="1929384"/>
-            <a:ext cx="1600200" cy="621792"/>
-          </a:xfrm>
-          <a:prstGeom prst="rect">
-            <a:avLst/>
-          </a:prstGeom>
-          <a:solidFill>
-            <a:srgbClr val="FFFFFF"/>
-          </a:solidFill>
-          <a:ln w="6350">
-            <a:solidFill>
-              <a:srgbClr val="DDDDDD"/>
-            </a:solidFill>
-            <a:prstDash val="solid"/>
-          </a:ln>
-        </p:spPr>
-        <p:txBody>
-          <a:bodyPr/>
-          <a:lstStyle/>
-          <a:p>
-            <a:endParaRPr lang="zh-CN" altLang="en-US"/>
-          </a:p>
-        </p:txBody>
-      </p:sp>
-      <p:sp>
-        <p:nvSpPr>
-          <p:cNvPr id="34" name="Text 32"/>
-          <p:cNvSpPr/>
-          <p:nvPr/>
-        </p:nvSpPr>
-        <p:spPr>
-          <a:xfrm>
-            <a:off x="7040880" y="1929384"/>
-            <a:ext cx="1508760" cy="621792"/>
-          </a:xfrm>
-          <a:prstGeom prst="rect">
-            <a:avLst/>
-          </a:prstGeom>
-          <a:noFill/>
-          <a:ln/>
-        </p:spPr>
-        <p:txBody>
-          <a:bodyPr wrap="square" lIns="0" tIns="0" rIns="0" bIns="0" rtlCol="0" anchor="ctr"/>
-          <a:lstStyle/>
-          <a:p>
-            <a:pPr marL="0" indent="0" algn="ctr">
-              <a:buNone/>
-            </a:pPr>
-            <a:r>
-              <a:rPr lang="en-US" sz="800" dirty="0">
-                <a:solidFill>
-                  <a:srgbClr val="2E2D2C"/>
-                </a:solidFill>
-                <a:latin typeface="Arial" pitchFamily="34" charset="0"/>
-                <a:ea typeface="Arial" pitchFamily="34" charset="-122"/>
-                <a:cs typeface="Arial" pitchFamily="34" charset="-120"/>
-              </a:rPr>
-              <a:t>国产疫苗突破</a:t>
-            </a:r>
-            <a:endParaRPr lang="en-US" sz="800" dirty="0"/>
-          </a:p>
-          <a:p>
-            <a:pPr marL="0" indent="0" algn="ctr">
-              <a:buNone/>
-            </a:pPr>
-            <a:r>
-              <a:rPr lang="en-US" sz="800" dirty="0">
-                <a:solidFill>
-                  <a:srgbClr val="2E2D2C"/>
-                </a:solidFill>
-                <a:latin typeface="Arial" pitchFamily="34" charset="0"/>
-                <a:ea typeface="Arial" pitchFamily="34" charset="-122"/>
-                <a:cs typeface="Arial" pitchFamily="34" charset="-120"/>
-              </a:rPr>
-              <a:t>原料药自产 6A标准</a:t>
-            </a:r>
-            <a:endParaRPr lang="en-US" sz="800" dirty="0"/>
-          </a:p>
-        </p:txBody>
-      </p:sp>
-      <p:sp>
-        <p:nvSpPr>
-          <p:cNvPr id="35" name="Shape 33"/>
-          <p:cNvSpPr/>
-          <p:nvPr/>
-        </p:nvSpPr>
-        <p:spPr>
-          <a:xfrm>
-            <a:off x="365760" y="2551176"/>
-            <a:ext cx="1463040" cy="621792"/>
-          </a:xfrm>
-          <a:prstGeom prst="rect">
-            <a:avLst/>
-          </a:prstGeom>
-          <a:solidFill>
-            <a:srgbClr val="F5FBF7"/>
-          </a:solidFill>
-          <a:ln w="6350">
-            <a:solidFill>
-              <a:srgbClr val="DDDDDD"/>
-            </a:solidFill>
-            <a:prstDash val="solid"/>
-          </a:ln>
-        </p:spPr>
-        <p:txBody>
-          <a:bodyPr/>
-          <a:lstStyle/>
-          <a:p>
-            <a:endParaRPr lang="zh-CN" altLang="en-US"/>
-          </a:p>
-        </p:txBody>
-      </p:sp>
-      <p:sp>
-        <p:nvSpPr>
-          <p:cNvPr id="36" name="Text 34"/>
-          <p:cNvSpPr/>
-          <p:nvPr/>
-        </p:nvSpPr>
-        <p:spPr>
-          <a:xfrm>
-            <a:off x="411480" y="2551176"/>
-            <a:ext cx="1371600" cy="621792"/>
-          </a:xfrm>
-          <a:prstGeom prst="rect">
-            <a:avLst/>
-          </a:prstGeom>
-          <a:noFill/>
-          <a:ln/>
-        </p:spPr>
-        <p:txBody>
-          <a:bodyPr wrap="square" lIns="0" tIns="0" rIns="0" bIns="0" rtlCol="0" anchor="ctr"/>
-          <a:lstStyle/>
-          <a:p>
-            <a:pPr marL="0" indent="0" algn="ctr">
-              <a:buNone/>
-            </a:pPr>
-            <a:r>
-              <a:rPr lang="en-US" sz="800" dirty="0">
-                <a:solidFill>
-                  <a:srgbClr val="2E2D2C"/>
-                </a:solidFill>
-                <a:latin typeface="Arial" pitchFamily="34" charset="0"/>
-                <a:ea typeface="Arial" pitchFamily="34" charset="-122"/>
-                <a:cs typeface="Arial" pitchFamily="34" charset="-120"/>
-              </a:rPr>
-              <a:t>渠道策略</a:t>
-            </a:r>
-            <a:endParaRPr lang="en-US" sz="800" dirty="0"/>
-          </a:p>
-          <a:p>
-            <a:pPr marL="0" indent="0" algn="ctr">
-              <a:buNone/>
-            </a:pPr>
-            <a:r>
-              <a:rPr lang="en-US" sz="800" dirty="0">
-                <a:solidFill>
-                  <a:srgbClr val="2E2D2C"/>
-                </a:solidFill>
-                <a:latin typeface="Arial" pitchFamily="34" charset="0"/>
-                <a:ea typeface="Arial" pitchFamily="34" charset="-122"/>
-                <a:cs typeface="Arial" pitchFamily="34" charset="-120"/>
-              </a:rPr>
-              <a:t>Channels</a:t>
-            </a:r>
-            <a:endParaRPr lang="en-US" sz="800" dirty="0"/>
-          </a:p>
-        </p:txBody>
-      </p:sp>
-      <p:sp>
-        <p:nvSpPr>
-          <p:cNvPr id="37" name="Shape 35"/>
-          <p:cNvSpPr/>
-          <p:nvPr/>
-        </p:nvSpPr>
-        <p:spPr>
-          <a:xfrm>
-            <a:off x="1828800" y="2551176"/>
-            <a:ext cx="1828800" cy="621792"/>
-          </a:xfrm>
-          <a:prstGeom prst="rect">
-            <a:avLst/>
-          </a:prstGeom>
-          <a:solidFill>
-            <a:srgbClr val="E8FFF2"/>
-          </a:solidFill>
-          <a:ln w="6350">
-            <a:solidFill>
-              <a:srgbClr val="DDDDDD"/>
-            </a:solidFill>
-            <a:prstDash val="solid"/>
-          </a:ln>
-        </p:spPr>
-        <p:txBody>
-          <a:bodyPr/>
-          <a:lstStyle/>
-          <a:p>
-            <a:endParaRPr lang="zh-CN" altLang="en-US"/>
-          </a:p>
-        </p:txBody>
-      </p:sp>
-      <p:sp>
-        <p:nvSpPr>
-          <p:cNvPr id="38" name="Text 36"/>
-          <p:cNvSpPr/>
-          <p:nvPr/>
-        </p:nvSpPr>
-        <p:spPr>
-          <a:xfrm>
-            <a:off x="1874520" y="2551176"/>
-            <a:ext cx="1737360" cy="621792"/>
-          </a:xfrm>
-          <a:prstGeom prst="rect">
-            <a:avLst/>
-          </a:prstGeom>
-          <a:noFill/>
-          <a:ln/>
-        </p:spPr>
-        <p:txBody>
-          <a:bodyPr wrap="square" lIns="0" tIns="0" rIns="0" bIns="0" rtlCol="0" anchor="ctr"/>
-          <a:lstStyle/>
-          <a:p>
-            <a:pPr marL="0" indent="0" algn="ctr">
-              <a:buNone/>
-            </a:pPr>
-            <a:r>
-              <a:rPr lang="en-US" sz="800" dirty="0">
-                <a:solidFill>
-                  <a:srgbClr val="08312A"/>
-                </a:solidFill>
-                <a:latin typeface="Arial" pitchFamily="34" charset="0"/>
-                <a:ea typeface="Arial" pitchFamily="34" charset="-122"/>
-                <a:cs typeface="Arial" pitchFamily="34" charset="-120"/>
-              </a:rPr>
-              <a:t>宠物医院+电商</a:t>
-            </a:r>
-            <a:endParaRPr lang="en-US" sz="800" dirty="0"/>
-          </a:p>
-          <a:p>
-            <a:pPr marL="0" indent="0" algn="ctr">
-              <a:buNone/>
-            </a:pPr>
-            <a:r>
-              <a:rPr lang="en-US" sz="800" dirty="0">
-                <a:solidFill>
-                  <a:srgbClr val="08312A"/>
-                </a:solidFill>
-                <a:latin typeface="Arial" pitchFamily="34" charset="0"/>
-                <a:ea typeface="Arial" pitchFamily="34" charset="-122"/>
-                <a:cs typeface="Arial" pitchFamily="34" charset="-120"/>
-              </a:rPr>
-              <a:t>双渠道布局</a:t>
-            </a:r>
-            <a:endParaRPr lang="en-US" sz="800" dirty="0"/>
-          </a:p>
-        </p:txBody>
-      </p:sp>
-      <p:sp>
-        <p:nvSpPr>
-          <p:cNvPr id="39" name="Shape 37"/>
-          <p:cNvSpPr/>
-          <p:nvPr/>
-        </p:nvSpPr>
-        <p:spPr>
-          <a:xfrm>
-            <a:off x="3657600" y="2551176"/>
-            <a:ext cx="1737360" cy="621792"/>
-          </a:xfrm>
-          <a:prstGeom prst="rect">
-            <a:avLst/>
-          </a:prstGeom>
-          <a:solidFill>
-            <a:srgbClr val="F5FBF7"/>
-          </a:solidFill>
-          <a:ln w="6350">
-            <a:solidFill>
-              <a:srgbClr val="DDDDDD"/>
-            </a:solidFill>
-            <a:prstDash val="solid"/>
-          </a:ln>
-        </p:spPr>
-        <p:txBody>
-          <a:bodyPr/>
-          <a:lstStyle/>
-          <a:p>
-            <a:endParaRPr lang="zh-CN" altLang="en-US"/>
-          </a:p>
-        </p:txBody>
-      </p:sp>
-      <p:sp>
-        <p:nvSpPr>
-          <p:cNvPr id="40" name="Text 38"/>
-          <p:cNvSpPr/>
-          <p:nvPr/>
-        </p:nvSpPr>
-        <p:spPr>
-          <a:xfrm>
-            <a:off x="3703320" y="2551176"/>
-            <a:ext cx="1645920" cy="621792"/>
-          </a:xfrm>
-          <a:prstGeom prst="rect">
-            <a:avLst/>
-          </a:prstGeom>
-          <a:noFill/>
-          <a:ln/>
-        </p:spPr>
-        <p:txBody>
-          <a:bodyPr wrap="square" lIns="0" tIns="0" rIns="0" bIns="0" rtlCol="0" anchor="ctr"/>
-          <a:lstStyle/>
-          <a:p>
-            <a:pPr marL="0" indent="0" algn="ctr">
-              <a:buNone/>
-            </a:pPr>
-            <a:r>
-              <a:rPr lang="en-US" sz="800" dirty="0">
-                <a:solidFill>
-                  <a:srgbClr val="2E2D2C"/>
-                </a:solidFill>
-                <a:latin typeface="Arial" pitchFamily="34" charset="0"/>
-                <a:ea typeface="Arial" pitchFamily="34" charset="-122"/>
-                <a:cs typeface="Arial" pitchFamily="34" charset="-120"/>
-              </a:rPr>
-              <a:t>医院为主</a:t>
-            </a:r>
-            <a:endParaRPr lang="en-US" sz="800" dirty="0"/>
-          </a:p>
-          <a:p>
-            <a:pPr marL="0" indent="0" algn="ctr">
-              <a:buNone/>
-            </a:pPr>
-            <a:r>
-              <a:rPr lang="en-US" sz="800" dirty="0">
-                <a:solidFill>
-                  <a:srgbClr val="2E2D2C"/>
-                </a:solidFill>
-                <a:latin typeface="Arial" pitchFamily="34" charset="0"/>
-                <a:ea typeface="Arial" pitchFamily="34" charset="-122"/>
-                <a:cs typeface="Arial" pitchFamily="34" charset="-120"/>
-              </a:rPr>
-              <a:t>京东健康合作</a:t>
-            </a:r>
-            <a:endParaRPr lang="en-US" sz="800" dirty="0"/>
-          </a:p>
-        </p:txBody>
-      </p:sp>
-      <p:sp>
-        <p:nvSpPr>
-          <p:cNvPr id="41" name="Shape 39"/>
-          <p:cNvSpPr/>
-          <p:nvPr/>
-        </p:nvSpPr>
-        <p:spPr>
-          <a:xfrm>
-            <a:off x="5394960" y="2551176"/>
-            <a:ext cx="1600200" cy="621792"/>
-          </a:xfrm>
-          <a:prstGeom prst="rect">
-            <a:avLst/>
-          </a:prstGeom>
-          <a:solidFill>
-            <a:srgbClr val="F5FBF7"/>
-          </a:solidFill>
-          <a:ln w="6350">
-            <a:solidFill>
-              <a:srgbClr val="DDDDDD"/>
-            </a:solidFill>
-            <a:prstDash val="solid"/>
-          </a:ln>
-        </p:spPr>
-        <p:txBody>
-          <a:bodyPr/>
-          <a:lstStyle/>
-          <a:p>
-            <a:endParaRPr lang="zh-CN" altLang="en-US"/>
-          </a:p>
-        </p:txBody>
-      </p:sp>
-      <p:sp>
-        <p:nvSpPr>
-          <p:cNvPr id="42" name="Text 40"/>
-          <p:cNvSpPr/>
-          <p:nvPr/>
-        </p:nvSpPr>
-        <p:spPr>
-          <a:xfrm>
-            <a:off x="5440680" y="2551176"/>
-            <a:ext cx="1508760" cy="621792"/>
-          </a:xfrm>
-          <a:prstGeom prst="rect">
-            <a:avLst/>
-          </a:prstGeom>
-          <a:noFill/>
-          <a:ln/>
-        </p:spPr>
-        <p:txBody>
-          <a:bodyPr wrap="square" lIns="0" tIns="0" rIns="0" bIns="0" rtlCol="0" anchor="ctr"/>
-          <a:lstStyle/>
-          <a:p>
-            <a:pPr marL="0" indent="0" algn="ctr">
-              <a:buNone/>
-            </a:pPr>
-            <a:r>
-              <a:rPr lang="en-US" sz="800" dirty="0">
-                <a:solidFill>
-                  <a:srgbClr val="2E2D2C"/>
-                </a:solidFill>
-                <a:latin typeface="Arial" pitchFamily="34" charset="0"/>
-                <a:ea typeface="Arial" pitchFamily="34" charset="-122"/>
-                <a:cs typeface="Arial" pitchFamily="34" charset="-120"/>
-              </a:rPr>
-              <a:t>医院深耕</a:t>
-            </a:r>
-            <a:endParaRPr lang="en-US" sz="800" dirty="0"/>
-          </a:p>
-          <a:p>
-            <a:pPr marL="0" indent="0" algn="ctr">
-              <a:buNone/>
-            </a:pPr>
-            <a:r>
-              <a:rPr lang="en-US" sz="800" dirty="0">
-                <a:solidFill>
-                  <a:srgbClr val="2E2D2C"/>
-                </a:solidFill>
-                <a:latin typeface="Arial" pitchFamily="34" charset="0"/>
-                <a:ea typeface="Arial" pitchFamily="34" charset="-122"/>
-                <a:cs typeface="Arial" pitchFamily="34" charset="-120"/>
-              </a:rPr>
-              <a:t>K+N物流合作</a:t>
-            </a:r>
-            <a:endParaRPr lang="en-US" sz="800" dirty="0"/>
-          </a:p>
-        </p:txBody>
-      </p:sp>
-      <p:sp>
-        <p:nvSpPr>
-          <p:cNvPr id="43" name="Shape 41"/>
-          <p:cNvSpPr/>
-          <p:nvPr/>
-        </p:nvSpPr>
-        <p:spPr>
-          <a:xfrm>
-            <a:off x="6995160" y="2551176"/>
-            <a:ext cx="1600200" cy="621792"/>
-          </a:xfrm>
-          <a:prstGeom prst="rect">
-            <a:avLst/>
-          </a:prstGeom>
-          <a:solidFill>
-            <a:srgbClr val="F5FBF7"/>
-          </a:solidFill>
-          <a:ln w="6350">
-            <a:solidFill>
-              <a:srgbClr val="DDDDDD"/>
-            </a:solidFill>
-            <a:prstDash val="solid"/>
-          </a:ln>
-        </p:spPr>
-        <p:txBody>
-          <a:bodyPr/>
-          <a:lstStyle/>
-          <a:p>
-            <a:endParaRPr lang="zh-CN" altLang="en-US"/>
-          </a:p>
-        </p:txBody>
-      </p:sp>
-      <p:sp>
-        <p:nvSpPr>
-          <p:cNvPr id="44" name="Text 42"/>
-          <p:cNvSpPr/>
-          <p:nvPr/>
-        </p:nvSpPr>
-        <p:spPr>
-          <a:xfrm>
-            <a:off x="7040880" y="2551176"/>
-            <a:ext cx="1508760" cy="621792"/>
-          </a:xfrm>
-          <a:prstGeom prst="rect">
-            <a:avLst/>
-          </a:prstGeom>
-          <a:noFill/>
-          <a:ln/>
-        </p:spPr>
-        <p:txBody>
-          <a:bodyPr wrap="square" lIns="0" tIns="0" rIns="0" bIns="0" rtlCol="0" anchor="ctr"/>
-          <a:lstStyle/>
-          <a:p>
-            <a:pPr marL="0" indent="0" algn="ctr">
-              <a:buNone/>
-            </a:pPr>
-            <a:r>
-              <a:rPr lang="en-US" sz="800" dirty="0">
-                <a:solidFill>
-                  <a:srgbClr val="2E2D2C"/>
-                </a:solidFill>
-                <a:latin typeface="Arial" pitchFamily="34" charset="0"/>
-                <a:ea typeface="Arial" pitchFamily="34" charset="-122"/>
-                <a:cs typeface="Arial" pitchFamily="34" charset="-120"/>
-              </a:rPr>
-              <a:t>电商增速80%+</a:t>
-            </a:r>
-            <a:endParaRPr lang="en-US" sz="800" dirty="0"/>
-          </a:p>
-          <a:p>
-            <a:pPr marL="0" indent="0" algn="ctr">
-              <a:buNone/>
-            </a:pPr>
-            <a:r>
-              <a:rPr lang="en-US" sz="800" dirty="0">
-                <a:solidFill>
-                  <a:srgbClr val="2E2D2C"/>
-                </a:solidFill>
-                <a:latin typeface="Arial" pitchFamily="34" charset="0"/>
-                <a:ea typeface="Arial" pitchFamily="34" charset="-122"/>
-                <a:cs typeface="Arial" pitchFamily="34" charset="-120"/>
-              </a:rPr>
-              <a:t>医院线下布局</a:t>
-            </a:r>
-            <a:endParaRPr lang="en-US" sz="800" dirty="0"/>
-          </a:p>
-        </p:txBody>
-      </p:sp>
-      <p:sp>
-        <p:nvSpPr>
-          <p:cNvPr id="45" name="Shape 43"/>
-          <p:cNvSpPr/>
-          <p:nvPr/>
-        </p:nvSpPr>
-        <p:spPr>
-          <a:xfrm>
-            <a:off x="365760" y="3172968"/>
-            <a:ext cx="1463040" cy="621792"/>
-          </a:xfrm>
-          <a:prstGeom prst="rect">
-            <a:avLst/>
-          </a:prstGeom>
-          <a:solidFill>
-            <a:srgbClr val="FFFFFF"/>
-          </a:solidFill>
-          <a:ln w="6350">
-            <a:solidFill>
-              <a:srgbClr val="DDDDDD"/>
-            </a:solidFill>
-            <a:prstDash val="solid"/>
-          </a:ln>
-        </p:spPr>
-        <p:txBody>
-          <a:bodyPr/>
-          <a:lstStyle/>
-          <a:p>
-            <a:endParaRPr lang="zh-CN" altLang="en-US"/>
-          </a:p>
-        </p:txBody>
-      </p:sp>
-      <p:sp>
-        <p:nvSpPr>
-          <p:cNvPr id="46" name="Text 44"/>
-          <p:cNvSpPr/>
-          <p:nvPr/>
-        </p:nvSpPr>
-        <p:spPr>
-          <a:xfrm>
-            <a:off x="411480" y="3172968"/>
-            <a:ext cx="1371600" cy="621792"/>
-          </a:xfrm>
-          <a:prstGeom prst="rect">
-            <a:avLst/>
-          </a:prstGeom>
-          <a:noFill/>
-          <a:ln/>
-        </p:spPr>
-        <p:txBody>
-          <a:bodyPr wrap="square" lIns="0" tIns="0" rIns="0" bIns="0" rtlCol="0" anchor="ctr"/>
-          <a:lstStyle/>
-          <a:p>
-            <a:pPr marL="0" indent="0" algn="ctr">
-              <a:buNone/>
-            </a:pPr>
-            <a:r>
-              <a:rPr lang="en-US" sz="800" dirty="0">
-                <a:solidFill>
-                  <a:srgbClr val="2E2D2C"/>
-                </a:solidFill>
-                <a:latin typeface="Arial" pitchFamily="34" charset="0"/>
-                <a:ea typeface="Arial" pitchFamily="34" charset="-122"/>
-                <a:cs typeface="Arial" pitchFamily="34" charset="-120"/>
-              </a:rPr>
-              <a:t>市场定位</a:t>
-            </a:r>
-            <a:endParaRPr lang="en-US" sz="800" dirty="0"/>
-          </a:p>
-          <a:p>
-            <a:pPr marL="0" indent="0" algn="ctr">
-              <a:buNone/>
-            </a:pPr>
-            <a:r>
-              <a:rPr lang="en-US" sz="800" dirty="0">
-                <a:solidFill>
-                  <a:srgbClr val="2E2D2C"/>
-                </a:solidFill>
-                <a:latin typeface="Arial" pitchFamily="34" charset="0"/>
-                <a:ea typeface="Arial" pitchFamily="34" charset="-122"/>
-                <a:cs typeface="Arial" pitchFamily="34" charset="-120"/>
-              </a:rPr>
-              <a:t>Positioning</a:t>
-            </a:r>
-            <a:endParaRPr lang="en-US" sz="800" dirty="0"/>
-          </a:p>
-        </p:txBody>
-      </p:sp>
-      <p:sp>
-        <p:nvSpPr>
-          <p:cNvPr id="47" name="Shape 45"/>
-          <p:cNvSpPr/>
-          <p:nvPr/>
-        </p:nvSpPr>
-        <p:spPr>
-          <a:xfrm>
-            <a:off x="1828800" y="3172968"/>
-            <a:ext cx="1828800" cy="621792"/>
-          </a:xfrm>
-          <a:prstGeom prst="rect">
-            <a:avLst/>
-          </a:prstGeom>
-          <a:solidFill>
-            <a:srgbClr val="E8FFF2"/>
-          </a:solidFill>
-          <a:ln w="6350">
-            <a:solidFill>
-              <a:srgbClr val="DDDDDD"/>
-            </a:solidFill>
-            <a:prstDash val="solid"/>
-          </a:ln>
-        </p:spPr>
-        <p:txBody>
-          <a:bodyPr/>
-          <a:lstStyle/>
-          <a:p>
-            <a:endParaRPr lang="zh-CN" altLang="en-US"/>
-          </a:p>
-        </p:txBody>
-      </p:sp>
-      <p:sp>
-        <p:nvSpPr>
-          <p:cNvPr id="48" name="Text 46"/>
-          <p:cNvSpPr/>
-          <p:nvPr/>
-        </p:nvSpPr>
-        <p:spPr>
-          <a:xfrm>
-            <a:off x="1874520" y="3172968"/>
-            <a:ext cx="1737360" cy="621792"/>
-          </a:xfrm>
-          <a:prstGeom prst="rect">
-            <a:avLst/>
-          </a:prstGeom>
-          <a:noFill/>
-          <a:ln/>
-        </p:spPr>
-        <p:txBody>
-          <a:bodyPr wrap="square" lIns="0" tIns="0" rIns="0" bIns="0" rtlCol="0" anchor="ctr"/>
-          <a:lstStyle/>
-          <a:p>
-            <a:pPr marL="0" indent="0" algn="ctr">
-              <a:buNone/>
-            </a:pPr>
-            <a:r>
-              <a:rPr lang="en-US" sz="800" dirty="0">
-                <a:solidFill>
-                  <a:srgbClr val="08312A"/>
-                </a:solidFill>
-                <a:latin typeface="Arial" pitchFamily="34" charset="0"/>
-                <a:ea typeface="Arial" pitchFamily="34" charset="-122"/>
-                <a:cs typeface="Arial" pitchFamily="34" charset="-120"/>
-              </a:rPr>
-              <a:t>高端驱虫/抗寄生虫</a:t>
-            </a:r>
-            <a:endParaRPr lang="en-US" sz="800" dirty="0"/>
-          </a:p>
-          <a:p>
-            <a:pPr marL="0" indent="0" algn="ctr">
-              <a:buNone/>
-            </a:pPr>
-            <a:r>
-              <a:rPr lang="en-US" sz="800" dirty="0">
-                <a:solidFill>
-                  <a:srgbClr val="08312A"/>
-                </a:solidFill>
-                <a:latin typeface="Arial" pitchFamily="34" charset="0"/>
-                <a:ea typeface="Arial" pitchFamily="34" charset="-122"/>
-                <a:cs typeface="Arial" pitchFamily="34" charset="-120"/>
-              </a:rPr>
-              <a:t>预防性用药</a:t>
-            </a:r>
-            <a:endParaRPr lang="en-US" sz="800" dirty="0"/>
-          </a:p>
-        </p:txBody>
-      </p:sp>
-      <p:sp>
-        <p:nvSpPr>
-          <p:cNvPr id="49" name="Shape 47"/>
-          <p:cNvSpPr/>
-          <p:nvPr/>
-        </p:nvSpPr>
-        <p:spPr>
-          <a:xfrm>
-            <a:off x="3657600" y="3172968"/>
-            <a:ext cx="1737360" cy="621792"/>
-          </a:xfrm>
-          <a:prstGeom prst="rect">
-            <a:avLst/>
-          </a:prstGeom>
-          <a:solidFill>
-            <a:srgbClr val="FFFFFF"/>
-          </a:solidFill>
-          <a:ln w="6350">
-            <a:solidFill>
-              <a:srgbClr val="DDDDDD"/>
-            </a:solidFill>
-            <a:prstDash val="solid"/>
-          </a:ln>
-        </p:spPr>
-        <p:txBody>
-          <a:bodyPr/>
-          <a:lstStyle/>
-          <a:p>
-            <a:endParaRPr lang="zh-CN" altLang="en-US"/>
-          </a:p>
-        </p:txBody>
-      </p:sp>
-      <p:sp>
-        <p:nvSpPr>
-          <p:cNvPr id="50" name="Text 48"/>
-          <p:cNvSpPr/>
-          <p:nvPr/>
-        </p:nvSpPr>
-        <p:spPr>
-          <a:xfrm>
-            <a:off x="3703320" y="3172968"/>
-            <a:ext cx="1645920" cy="621792"/>
-          </a:xfrm>
-          <a:prstGeom prst="rect">
-            <a:avLst/>
-          </a:prstGeom>
-          <a:noFill/>
-          <a:ln/>
-        </p:spPr>
-        <p:txBody>
-          <a:bodyPr wrap="square" lIns="0" tIns="0" rIns="0" bIns="0" rtlCol="0" anchor="ctr"/>
-          <a:lstStyle/>
-          <a:p>
-            <a:pPr marL="0" indent="0" algn="ctr">
-              <a:buNone/>
-            </a:pPr>
-            <a:r>
-              <a:rPr lang="en-US" sz="800" dirty="0">
-                <a:solidFill>
-                  <a:srgbClr val="2E2D2C"/>
-                </a:solidFill>
-                <a:latin typeface="Arial" pitchFamily="34" charset="0"/>
-                <a:ea typeface="Arial" pitchFamily="34" charset="-122"/>
-                <a:cs typeface="Arial" pitchFamily="34" charset="-120"/>
-              </a:rPr>
-              <a:t>高价值处方药</a:t>
-            </a:r>
-            <a:endParaRPr lang="en-US" sz="800" dirty="0"/>
-          </a:p>
-          <a:p>
-            <a:pPr marL="0" indent="0" algn="ctr">
-              <a:buNone/>
-            </a:pPr>
-            <a:r>
-              <a:rPr lang="en-US" sz="800" dirty="0">
-                <a:solidFill>
-                  <a:srgbClr val="2E2D2C"/>
-                </a:solidFill>
-                <a:latin typeface="Arial" pitchFamily="34" charset="0"/>
-                <a:ea typeface="Arial" pitchFamily="34" charset="-122"/>
-                <a:cs typeface="Arial" pitchFamily="34" charset="-120"/>
-              </a:rPr>
-              <a:t>慢性病长期管理</a:t>
-            </a:r>
-            <a:endParaRPr lang="en-US" sz="800" dirty="0"/>
-          </a:p>
-        </p:txBody>
-      </p:sp>
-      <p:sp>
-        <p:nvSpPr>
-          <p:cNvPr id="51" name="Shape 49"/>
-          <p:cNvSpPr/>
-          <p:nvPr/>
-        </p:nvSpPr>
-        <p:spPr>
-          <a:xfrm>
-            <a:off x="5394960" y="3172968"/>
-            <a:ext cx="1600200" cy="621792"/>
-          </a:xfrm>
-          <a:prstGeom prst="rect">
-            <a:avLst/>
-          </a:prstGeom>
-          <a:solidFill>
-            <a:srgbClr val="FFFFFF"/>
-          </a:solidFill>
-          <a:ln w="6350">
-            <a:solidFill>
-              <a:srgbClr val="DDDDDD"/>
-            </a:solidFill>
-            <a:prstDash val="solid"/>
-          </a:ln>
-        </p:spPr>
-        <p:txBody>
-          <a:bodyPr/>
-          <a:lstStyle/>
-          <a:p>
-            <a:endParaRPr lang="zh-CN" altLang="en-US"/>
-          </a:p>
-        </p:txBody>
-      </p:sp>
-      <p:sp>
-        <p:nvSpPr>
-          <p:cNvPr id="52" name="Text 50"/>
-          <p:cNvSpPr/>
-          <p:nvPr/>
-        </p:nvSpPr>
-        <p:spPr>
-          <a:xfrm>
-            <a:off x="5440680" y="3172968"/>
-            <a:ext cx="1508760" cy="621792"/>
-          </a:xfrm>
-          <a:prstGeom prst="rect">
-            <a:avLst/>
-          </a:prstGeom>
-          <a:noFill/>
-          <a:ln/>
-        </p:spPr>
-        <p:txBody>
-          <a:bodyPr wrap="square" lIns="0" tIns="0" rIns="0" bIns="0" rtlCol="0" anchor="ctr"/>
-          <a:lstStyle/>
-          <a:p>
-            <a:pPr marL="0" indent="0" algn="ctr">
-              <a:buNone/>
-            </a:pPr>
-            <a:r>
-              <a:rPr lang="en-US" sz="800" dirty="0">
-                <a:solidFill>
-                  <a:srgbClr val="2E2D2C"/>
-                </a:solidFill>
-                <a:latin typeface="Arial" pitchFamily="34" charset="0"/>
-                <a:ea typeface="Arial" pitchFamily="34" charset="-122"/>
-                <a:cs typeface="Arial" pitchFamily="34" charset="-120"/>
-              </a:rPr>
-              <a:t>预防+治疗</a:t>
-            </a:r>
-            <a:endParaRPr lang="en-US" sz="800" dirty="0"/>
-          </a:p>
-          <a:p>
-            <a:pPr marL="0" indent="0" algn="ctr">
-              <a:buNone/>
-            </a:pPr>
-            <a:r>
-              <a:rPr lang="en-US" sz="800" dirty="0">
-                <a:solidFill>
-                  <a:srgbClr val="2E2D2C"/>
-                </a:solidFill>
-                <a:latin typeface="Arial" pitchFamily="34" charset="0"/>
-                <a:ea typeface="Arial" pitchFamily="34" charset="-122"/>
-                <a:cs typeface="Arial" pitchFamily="34" charset="-120"/>
-              </a:rPr>
-              <a:t>精准干预</a:t>
-            </a:r>
-            <a:endParaRPr lang="en-US" sz="800" dirty="0"/>
-          </a:p>
-        </p:txBody>
-      </p:sp>
-      <p:sp>
-        <p:nvSpPr>
-          <p:cNvPr id="53" name="Shape 51"/>
-          <p:cNvSpPr/>
-          <p:nvPr/>
-        </p:nvSpPr>
-        <p:spPr>
-          <a:xfrm>
-            <a:off x="6995160" y="3172968"/>
-            <a:ext cx="1600200" cy="621792"/>
-          </a:xfrm>
-          <a:prstGeom prst="rect">
-            <a:avLst/>
-          </a:prstGeom>
-          <a:solidFill>
-            <a:srgbClr val="FFFFFF"/>
-          </a:solidFill>
-          <a:ln w="6350">
-            <a:solidFill>
-              <a:srgbClr val="DDDDDD"/>
-            </a:solidFill>
-            <a:prstDash val="solid"/>
-          </a:ln>
-        </p:spPr>
-        <p:txBody>
-          <a:bodyPr/>
-          <a:lstStyle/>
-          <a:p>
-            <a:endParaRPr lang="zh-CN" altLang="en-US"/>
-          </a:p>
-        </p:txBody>
-      </p:sp>
-      <p:sp>
-        <p:nvSpPr>
-          <p:cNvPr id="54" name="Text 52"/>
-          <p:cNvSpPr/>
-          <p:nvPr/>
-        </p:nvSpPr>
-        <p:spPr>
-          <a:xfrm>
-            <a:off x="7040880" y="3172968"/>
-            <a:ext cx="1508760" cy="621792"/>
-          </a:xfrm>
-          <a:prstGeom prst="rect">
-            <a:avLst/>
-          </a:prstGeom>
-          <a:noFill/>
-          <a:ln/>
-        </p:spPr>
-        <p:txBody>
-          <a:bodyPr wrap="square" lIns="0" tIns="0" rIns="0" bIns="0" rtlCol="0" anchor="ctr"/>
-          <a:lstStyle/>
-          <a:p>
-            <a:pPr marL="0" indent="0" algn="ctr">
-              <a:buNone/>
-            </a:pPr>
-            <a:r>
-              <a:rPr lang="en-US" sz="800" dirty="0">
-                <a:solidFill>
-                  <a:srgbClr val="2E2D2C"/>
-                </a:solidFill>
-                <a:latin typeface="Arial" pitchFamily="34" charset="0"/>
-                <a:ea typeface="Arial" pitchFamily="34" charset="-122"/>
-                <a:cs typeface="Arial" pitchFamily="34" charset="-120"/>
-              </a:rPr>
-              <a:t>性价比+国产</a:t>
-            </a:r>
-            <a:endParaRPr lang="en-US" sz="800" dirty="0"/>
-          </a:p>
-          <a:p>
-            <a:pPr marL="0" indent="0" algn="ctr">
-              <a:buNone/>
-            </a:pPr>
-            <a:r>
-              <a:rPr lang="en-US" sz="800" dirty="0">
-                <a:solidFill>
-                  <a:srgbClr val="2E2D2C"/>
-                </a:solidFill>
-                <a:latin typeface="Arial" pitchFamily="34" charset="0"/>
-                <a:ea typeface="Arial" pitchFamily="34" charset="-122"/>
-                <a:cs typeface="Arial" pitchFamily="34" charset="-120"/>
-              </a:rPr>
-              <a:t>进口替代</a:t>
-            </a:r>
-            <a:endParaRPr lang="en-US" sz="800" dirty="0"/>
-          </a:p>
-        </p:txBody>
-      </p:sp>
-      <p:sp>
-        <p:nvSpPr>
-          <p:cNvPr id="55" name="Shape 53"/>
-          <p:cNvSpPr/>
-          <p:nvPr/>
-        </p:nvSpPr>
-        <p:spPr>
-          <a:xfrm>
-            <a:off x="365760" y="3794760"/>
-            <a:ext cx="1463040" cy="621792"/>
-          </a:xfrm>
-          <a:prstGeom prst="rect">
-            <a:avLst/>
-          </a:prstGeom>
-          <a:solidFill>
-            <a:srgbClr val="F5FBF7"/>
-          </a:solidFill>
-          <a:ln w="6350">
-            <a:solidFill>
-              <a:srgbClr val="DDDDDD"/>
-            </a:solidFill>
-            <a:prstDash val="solid"/>
-          </a:ln>
-        </p:spPr>
-        <p:txBody>
-          <a:bodyPr/>
-          <a:lstStyle/>
-          <a:p>
-            <a:endParaRPr lang="zh-CN" altLang="en-US"/>
-          </a:p>
-        </p:txBody>
-      </p:sp>
-      <p:sp>
-        <p:nvSpPr>
-          <p:cNvPr id="56" name="Text 54"/>
-          <p:cNvSpPr/>
-          <p:nvPr/>
-        </p:nvSpPr>
-        <p:spPr>
-          <a:xfrm>
-            <a:off x="411480" y="3794760"/>
-            <a:ext cx="1371600" cy="621792"/>
-          </a:xfrm>
-          <a:prstGeom prst="rect">
-            <a:avLst/>
-          </a:prstGeom>
-          <a:noFill/>
-          <a:ln/>
-        </p:spPr>
-        <p:txBody>
-          <a:bodyPr wrap="square" lIns="0" tIns="0" rIns="0" bIns="0" rtlCol="0" anchor="ctr"/>
-          <a:lstStyle/>
-          <a:p>
-            <a:pPr marL="0" indent="0" algn="ctr">
-              <a:buNone/>
-            </a:pPr>
-            <a:r>
-              <a:rPr lang="en-US" sz="800" dirty="0">
-                <a:solidFill>
-                  <a:srgbClr val="2E2D2C"/>
-                </a:solidFill>
-                <a:latin typeface="Arial" pitchFamily="34" charset="0"/>
-                <a:ea typeface="Arial" pitchFamily="34" charset="-122"/>
-                <a:cs typeface="Arial" pitchFamily="34" charset="-120"/>
-              </a:rPr>
-              <a:t>主要挑战</a:t>
-            </a:r>
-            <a:endParaRPr lang="en-US" sz="800" dirty="0"/>
-          </a:p>
-          <a:p>
-            <a:pPr marL="0" indent="0" algn="ctr">
-              <a:buNone/>
-            </a:pPr>
-            <a:r>
-              <a:rPr lang="en-US" sz="800" dirty="0">
-                <a:solidFill>
-                  <a:srgbClr val="2E2D2C"/>
-                </a:solidFill>
-                <a:latin typeface="Arial" pitchFamily="34" charset="0"/>
-                <a:ea typeface="Arial" pitchFamily="34" charset="-122"/>
-                <a:cs typeface="Arial" pitchFamily="34" charset="-120"/>
-              </a:rPr>
-              <a:t>Challenges</a:t>
-            </a:r>
-            <a:endParaRPr lang="en-US" sz="800" dirty="0"/>
-          </a:p>
-        </p:txBody>
-      </p:sp>
-      <p:sp>
-        <p:nvSpPr>
-          <p:cNvPr id="57" name="Shape 55"/>
-          <p:cNvSpPr/>
-          <p:nvPr/>
-        </p:nvSpPr>
-        <p:spPr>
-          <a:xfrm>
-            <a:off x="1828800" y="3794760"/>
-            <a:ext cx="1828800" cy="621792"/>
-          </a:xfrm>
-          <a:prstGeom prst="rect">
-            <a:avLst/>
-          </a:prstGeom>
-          <a:solidFill>
-            <a:srgbClr val="E8FFF2"/>
-          </a:solidFill>
-          <a:ln w="6350">
-            <a:solidFill>
-              <a:srgbClr val="DDDDDD"/>
-            </a:solidFill>
-            <a:prstDash val="solid"/>
-          </a:ln>
-        </p:spPr>
-        <p:txBody>
-          <a:bodyPr/>
-          <a:lstStyle/>
-          <a:p>
-            <a:endParaRPr lang="zh-CN" altLang="en-US"/>
-          </a:p>
-        </p:txBody>
-      </p:sp>
-      <p:sp>
-        <p:nvSpPr>
-          <p:cNvPr id="58" name="Text 56"/>
-          <p:cNvSpPr/>
-          <p:nvPr/>
-        </p:nvSpPr>
-        <p:spPr>
-          <a:xfrm>
-            <a:off x="1874520" y="3794760"/>
-            <a:ext cx="1737360" cy="621792"/>
-          </a:xfrm>
-          <a:prstGeom prst="rect">
-            <a:avLst/>
-          </a:prstGeom>
-          <a:noFill/>
-          <a:ln/>
-        </p:spPr>
-        <p:txBody>
-          <a:bodyPr wrap="square" lIns="0" tIns="0" rIns="0" bIns="0" rtlCol="0" anchor="ctr"/>
-          <a:lstStyle/>
-          <a:p>
-            <a:pPr marL="0" indent="0" algn="ctr">
-              <a:buNone/>
-            </a:pPr>
-            <a:r>
-              <a:rPr lang="en-US" sz="800" dirty="0">
-                <a:solidFill>
-                  <a:srgbClr val="08312A"/>
-                </a:solidFill>
-                <a:latin typeface="Arial" pitchFamily="34" charset="0"/>
-                <a:ea typeface="Arial" pitchFamily="34" charset="-122"/>
-                <a:cs typeface="Arial" pitchFamily="34" charset="-120"/>
-              </a:rPr>
-              <a:t>国产品性价比竞争</a:t>
-            </a:r>
-            <a:endParaRPr lang="en-US" sz="800" dirty="0"/>
-          </a:p>
-          <a:p>
-            <a:pPr marL="0" indent="0" algn="ctr">
-              <a:buNone/>
-            </a:pPr>
-            <a:r>
-              <a:rPr lang="en-US" sz="800" dirty="0">
-                <a:solidFill>
-                  <a:srgbClr val="08312A"/>
-                </a:solidFill>
-                <a:latin typeface="Arial" pitchFamily="34" charset="0"/>
-                <a:ea typeface="Arial" pitchFamily="34" charset="-122"/>
-                <a:cs typeface="Arial" pitchFamily="34" charset="-120"/>
-              </a:rPr>
-              <a:t>新品上市速度</a:t>
-            </a:r>
-            <a:endParaRPr lang="en-US" sz="800" dirty="0"/>
-          </a:p>
-        </p:txBody>
-      </p:sp>
-      <p:sp>
-        <p:nvSpPr>
-          <p:cNvPr id="59" name="Shape 57"/>
-          <p:cNvSpPr/>
-          <p:nvPr/>
-        </p:nvSpPr>
-        <p:spPr>
-          <a:xfrm>
-            <a:off x="3657600" y="3794760"/>
-            <a:ext cx="1737360" cy="621792"/>
-          </a:xfrm>
-          <a:prstGeom prst="rect">
-            <a:avLst/>
-          </a:prstGeom>
-          <a:solidFill>
-            <a:srgbClr val="F5FBF7"/>
-          </a:solidFill>
-          <a:ln w="6350">
-            <a:solidFill>
-              <a:srgbClr val="DDDDDD"/>
-            </a:solidFill>
-            <a:prstDash val="solid"/>
-          </a:ln>
-        </p:spPr>
-        <p:txBody>
-          <a:bodyPr/>
-          <a:lstStyle/>
-          <a:p>
-            <a:endParaRPr lang="zh-CN" altLang="en-US"/>
-          </a:p>
-        </p:txBody>
-      </p:sp>
-      <p:sp>
-        <p:nvSpPr>
-          <p:cNvPr id="60" name="Text 58"/>
-          <p:cNvSpPr/>
-          <p:nvPr/>
-        </p:nvSpPr>
-        <p:spPr>
-          <a:xfrm>
-            <a:off x="3703320" y="3794760"/>
-            <a:ext cx="1645920" cy="621792"/>
-          </a:xfrm>
-          <a:prstGeom prst="rect">
-            <a:avLst/>
-          </a:prstGeom>
-          <a:noFill/>
-          <a:ln/>
-        </p:spPr>
-        <p:txBody>
-          <a:bodyPr wrap="square" lIns="0" tIns="0" rIns="0" bIns="0" rtlCol="0" anchor="ctr"/>
-          <a:lstStyle/>
-          <a:p>
-            <a:pPr marL="0" indent="0" algn="ctr">
-              <a:buNone/>
-            </a:pPr>
-            <a:r>
-              <a:rPr lang="en-US" sz="800" dirty="0">
-                <a:solidFill>
-                  <a:srgbClr val="2E2D2C"/>
-                </a:solidFill>
-                <a:latin typeface="Arial" pitchFamily="34" charset="0"/>
-                <a:ea typeface="Arial" pitchFamily="34" charset="-122"/>
-                <a:cs typeface="Arial" pitchFamily="34" charset="-120"/>
-              </a:rPr>
-              <a:t>增速放缓-11%</a:t>
-            </a:r>
-            <a:endParaRPr lang="en-US" sz="800" dirty="0"/>
-          </a:p>
-          <a:p>
-            <a:pPr marL="0" indent="0" algn="ctr">
-              <a:buNone/>
-            </a:pPr>
-            <a:r>
-              <a:rPr lang="en-US" sz="800" dirty="0">
-                <a:solidFill>
-                  <a:srgbClr val="2E2D2C"/>
-                </a:solidFill>
-                <a:latin typeface="Arial" pitchFamily="34" charset="0"/>
-                <a:ea typeface="Arial" pitchFamily="34" charset="-122"/>
-                <a:cs typeface="Arial" pitchFamily="34" charset="-120"/>
-              </a:rPr>
-              <a:t>市场竞争加剧</a:t>
-            </a:r>
-            <a:endParaRPr lang="en-US" sz="800" dirty="0"/>
-          </a:p>
-        </p:txBody>
-      </p:sp>
-      <p:sp>
-        <p:nvSpPr>
-          <p:cNvPr id="61" name="Shape 59"/>
-          <p:cNvSpPr/>
-          <p:nvPr/>
-        </p:nvSpPr>
-        <p:spPr>
-          <a:xfrm>
-            <a:off x="5394960" y="3794760"/>
-            <a:ext cx="1600200" cy="621792"/>
-          </a:xfrm>
-          <a:prstGeom prst="rect">
-            <a:avLst/>
-          </a:prstGeom>
-          <a:solidFill>
-            <a:srgbClr val="F5FBF7"/>
-          </a:solidFill>
-          <a:ln w="6350">
-            <a:solidFill>
-              <a:srgbClr val="DDDDDD"/>
-            </a:solidFill>
-            <a:prstDash val="solid"/>
-          </a:ln>
-        </p:spPr>
-        <p:txBody>
-          <a:bodyPr/>
-          <a:lstStyle/>
-          <a:p>
-            <a:endParaRPr lang="zh-CN" altLang="en-US"/>
-          </a:p>
-        </p:txBody>
-      </p:sp>
-      <p:sp>
-        <p:nvSpPr>
-          <p:cNvPr id="62" name="Text 60"/>
-          <p:cNvSpPr/>
-          <p:nvPr/>
-        </p:nvSpPr>
-        <p:spPr>
-          <a:xfrm>
-            <a:off x="5440680" y="3794760"/>
-            <a:ext cx="1508760" cy="621792"/>
-          </a:xfrm>
-          <a:prstGeom prst="rect">
-            <a:avLst/>
-          </a:prstGeom>
-          <a:noFill/>
-          <a:ln/>
-        </p:spPr>
-        <p:txBody>
-          <a:bodyPr wrap="square" lIns="0" tIns="0" rIns="0" bIns="0" rtlCol="0" anchor="ctr"/>
-          <a:lstStyle/>
-          <a:p>
-            <a:pPr marL="0" indent="0" algn="ctr">
-              <a:buNone/>
-            </a:pPr>
-            <a:r>
-              <a:rPr lang="en-US" sz="800" dirty="0">
-                <a:solidFill>
-                  <a:srgbClr val="2E2D2C"/>
-                </a:solidFill>
-                <a:latin typeface="Arial" pitchFamily="34" charset="0"/>
-                <a:ea typeface="Arial" pitchFamily="34" charset="-122"/>
-                <a:cs typeface="Arial" pitchFamily="34" charset="-120"/>
-              </a:rPr>
-              <a:t>净负债33亿美元</a:t>
-            </a:r>
-            <a:endParaRPr lang="en-US" sz="800" dirty="0"/>
-          </a:p>
-          <a:p>
-            <a:pPr marL="0" indent="0" algn="ctr">
-              <a:buNone/>
-            </a:pPr>
-            <a:r>
-              <a:rPr lang="en-US" sz="800" dirty="0">
-                <a:solidFill>
-                  <a:srgbClr val="2E2D2C"/>
-                </a:solidFill>
-                <a:latin typeface="Arial" pitchFamily="34" charset="0"/>
-                <a:ea typeface="Arial" pitchFamily="34" charset="-122"/>
-                <a:cs typeface="Arial" pitchFamily="34" charset="-120"/>
-              </a:rPr>
-              <a:t>新兴市场压力</a:t>
-            </a:r>
-            <a:endParaRPr lang="en-US" sz="800" dirty="0"/>
-          </a:p>
-        </p:txBody>
-      </p:sp>
-      <p:sp>
-        <p:nvSpPr>
-          <p:cNvPr id="63" name="Shape 61"/>
-          <p:cNvSpPr/>
-          <p:nvPr/>
-        </p:nvSpPr>
-        <p:spPr>
-          <a:xfrm>
-            <a:off x="6995160" y="3794760"/>
-            <a:ext cx="1600200" cy="621792"/>
-          </a:xfrm>
-          <a:prstGeom prst="rect">
-            <a:avLst/>
-          </a:prstGeom>
-          <a:solidFill>
-            <a:srgbClr val="F5FBF7"/>
-          </a:solidFill>
-          <a:ln w="6350">
-            <a:solidFill>
-              <a:srgbClr val="DDDDDD"/>
-            </a:solidFill>
-            <a:prstDash val="solid"/>
-          </a:ln>
-        </p:spPr>
-        <p:txBody>
-          <a:bodyPr/>
-          <a:lstStyle/>
-          <a:p>
-            <a:endParaRPr lang="zh-CN" altLang="en-US"/>
-          </a:p>
-        </p:txBody>
-      </p:sp>
-      <p:sp>
-        <p:nvSpPr>
-          <p:cNvPr id="64" name="Text 62"/>
-          <p:cNvSpPr/>
-          <p:nvPr/>
-        </p:nvSpPr>
-        <p:spPr>
-          <a:xfrm>
-            <a:off x="7040880" y="3794760"/>
-            <a:ext cx="1508760" cy="621792"/>
-          </a:xfrm>
-          <a:prstGeom prst="rect">
-            <a:avLst/>
-          </a:prstGeom>
-          <a:noFill/>
-          <a:ln/>
-        </p:spPr>
-        <p:txBody>
-          <a:bodyPr wrap="square" lIns="0" tIns="0" rIns="0" bIns="0" rtlCol="0" anchor="ctr"/>
-          <a:lstStyle/>
-          <a:p>
-            <a:pPr marL="0" indent="0" algn="ctr">
-              <a:buNone/>
-            </a:pPr>
-            <a:r>
-              <a:rPr lang="en-US" sz="800" dirty="0">
-                <a:solidFill>
-                  <a:srgbClr val="2E2D2C"/>
-                </a:solidFill>
-                <a:latin typeface="Arial" pitchFamily="34" charset="0"/>
-                <a:ea typeface="Arial" pitchFamily="34" charset="-122"/>
-                <a:cs typeface="Arial" pitchFamily="34" charset="-120"/>
-              </a:rPr>
-              <a:t>高端突破</a:t>
-            </a:r>
-            <a:endParaRPr lang="en-US" sz="800" dirty="0"/>
-          </a:p>
-          <a:p>
-            <a:pPr marL="0" indent="0" algn="ctr">
-              <a:buNone/>
-            </a:pPr>
-            <a:r>
-              <a:rPr lang="en-US" sz="800" dirty="0">
-                <a:solidFill>
-                  <a:srgbClr val="2E2D2C"/>
-                </a:solidFill>
-                <a:latin typeface="Arial" pitchFamily="34" charset="0"/>
-                <a:ea typeface="Arial" pitchFamily="34" charset="-122"/>
-                <a:cs typeface="Arial" pitchFamily="34" charset="-120"/>
-              </a:rPr>
-              <a:t>国际化经验</a:t>
-            </a:r>
-            <a:endParaRPr lang="en-US" sz="800" dirty="0"/>
-          </a:p>
-        </p:txBody>
-      </p:sp>
-      <p:sp>
-        <p:nvSpPr>
-          <p:cNvPr id="65" name="Shape 63"/>
-          <p:cNvSpPr/>
-          <p:nvPr/>
-        </p:nvSpPr>
-        <p:spPr>
-          <a:xfrm>
-            <a:off x="365760" y="1307592"/>
-            <a:ext cx="1463040" cy="3108960"/>
-          </a:xfrm>
-          <a:prstGeom prst="rect">
-            <a:avLst/>
-          </a:prstGeom>
-          <a:solidFill>
-            <a:srgbClr val="00E47C"/>
-          </a:solidFill>
-          <a:ln/>
-        </p:spPr>
-        <p:txBody>
-          <a:bodyPr/>
-          <a:lstStyle/>
-          <a:p>
-            <a:endParaRPr lang="zh-CN" altLang="en-US"/>
-          </a:p>
-        </p:txBody>
-      </p:sp>
-      <p:sp>
-        <p:nvSpPr>
-          <p:cNvPr id="66" name="Text 64"/>
-          <p:cNvSpPr/>
-          <p:nvPr/>
-        </p:nvSpPr>
-        <p:spPr>
-          <a:xfrm>
-            <a:off x="365760" y="1307592"/>
-            <a:ext cx="1463040" cy="3108960"/>
-          </a:xfrm>
-          <a:prstGeom prst="rect">
-            <a:avLst/>
-          </a:prstGeom>
-          <a:noFill/>
-          <a:ln/>
-        </p:spPr>
-        <p:txBody>
-          <a:bodyPr wrap="square" lIns="0" tIns="0" rIns="0" bIns="0" rtlCol="0" anchor="ctr"/>
-          <a:lstStyle/>
-          <a:p>
-            <a:pPr marL="0" indent="0" algn="ctr">
-              <a:buNone/>
-            </a:pPr>
-            <a:r>
-              <a:rPr lang="en-US" sz="1100" b="1" dirty="0">
-                <a:solidFill>
-                  <a:srgbClr val="08312A"/>
-                </a:solidFill>
-                <a:latin typeface="Arial" pitchFamily="34" charset="0"/>
-                <a:ea typeface="Arial" pitchFamily="34" charset="-122"/>
-                <a:cs typeface="Arial" pitchFamily="34" charset="-120"/>
-              </a:rPr>
-              <a:t>BI</a:t>
-            </a:r>
-            <a:endParaRPr lang="en-US" sz="1100" dirty="0"/>
-          </a:p>
-          <a:p>
-            <a:pPr marL="0" indent="0" algn="ctr">
-              <a:buNone/>
-            </a:pPr>
-            <a:r>
-              <a:rPr lang="en-US" sz="1100" b="1" dirty="0">
-                <a:solidFill>
-                  <a:srgbClr val="08312A"/>
-                </a:solidFill>
-                <a:latin typeface="Arial" pitchFamily="34" charset="0"/>
-                <a:ea typeface="Arial" pitchFamily="34" charset="-122"/>
-                <a:cs typeface="Arial" pitchFamily="34" charset="-120"/>
-              </a:rPr>
-              <a:t>优势</a:t>
-            </a:r>
-            <a:endParaRPr lang="en-US" sz="1100" dirty="0"/>
-          </a:p>
-          <a:p>
-            <a:pPr marL="0" indent="0" algn="ctr">
-              <a:buNone/>
-            </a:pPr>
-            <a:r>
-              <a:rPr lang="en-US" sz="1100" b="1" dirty="0">
-                <a:solidFill>
-                  <a:srgbClr val="08312A"/>
-                </a:solidFill>
-                <a:latin typeface="Arial" pitchFamily="34" charset="0"/>
-                <a:ea typeface="Arial" pitchFamily="34" charset="-122"/>
-                <a:cs typeface="Arial" pitchFamily="34" charset="-120"/>
-              </a:rPr>
-              <a:t>BI Edge</a:t>
-            </a:r>
-            <a:endParaRPr lang="en-US" sz="1100" dirty="0"/>
           </a:p>
         </p:txBody>
       </p:sp>
